--- a/lectures/محاضرة الذكاء الاصطناعي وتطبيقاته في الحياة اليومية.pptx
+++ b/lectures/محاضرة الذكاء الاصطناعي وتطبيقاته في الحياة اليومية.pptx
@@ -18,9 +18,10 @@
     <p:sldId id="266" r:id="rId12"/>
     <p:sldId id="267" r:id="rId13"/>
     <p:sldId id="268" r:id="rId14"/>
+    <p:sldId id="269" r:id="rId15"/>
   </p:sldIdLst>
   <p:notesMasterIdLst>
-    <p:notesMasterId r:id="rId15"/>
+    <p:notesMasterId r:id="rId16"/>
   </p:notesMasterIdLst>
   <p:sldSz cx="12191695" cy="6858000"/>
   <p:notesSz cx="6858000" cy="12191695"/>
@@ -602,7 +603,7 @@
           <a:p>
             <a:r>
               <a:rPr lang="en-US" dirty="0"/>
-              <a:t>اربط بالواقع المحلي: هل توجد سيارات بمساعد قيادة في بلدكم؟ إشارات مرور ذكية؟ حتى تطبيقات التوصيل تستخدم الذكاء الاصطناعي لتوزيع الطلبات وتقدير وقت الوصول.</a:t>
+              <a:t>قصة AlphaFold ملهمة للطلاب المهتمين بالطب والصيدلة: حصل مطوروه على جائزة نوبل في الكيمياء 2024. أكد أن هذه الأنظمة أدوات مساعدة تحت إشراف بشري، والمسؤولية النهائية للطبيب.</a:t>
             </a:r>
             <a:endParaRPr lang="en-US" dirty="0"/>
           </a:p>
@@ -690,7 +691,7 @@
           <a:p>
             <a:r>
               <a:rPr lang="en-US" dirty="0"/>
-              <a:t>خصص وقتاً للنقاش هنا. أمثلة: خوارزمية توظيف تعلمت من بيانات متحيزة فرفضت فئة من المتقدمين؛ فيديو مزيف لشخصية عامة انتشر قبل تكذيبه. الرسالة: كن مستخدماً واعياً وناقداً، لا مستهلكاً سلبياً.</a:t>
+              <a:t>اربط بالواقع المحلي: هل توجد سيارات بمساعد قيادة في بلدكم؟ إشارات مرور ذكية؟ حتى تطبيقات التوصيل تستخدم الذكاء الاصطناعي لتوزيع الطلبات وتقدير وقت الوصول.</a:t>
             </a:r>
             <a:endParaRPr lang="en-US" dirty="0"/>
           </a:p>
@@ -778,7 +779,7 @@
           <a:p>
             <a:r>
               <a:rPr lang="en-US" dirty="0"/>
-              <a:t>رسالة تحفيزية: الذكاء الاصطناعي لن يستبدل معظم الوظائف، لكن من يجيد استخدامه سيتفوق على من لا يجيده. شجع الطلاب على تجربة أدوات مجانية وتعلم Python عبر منصات مفتوحة، وذكّرهم أن كل التخصصات ستحتاج هذه المهارات وليس الحاسوب فقط.</a:t>
+              <a:t>خصص وقتاً للنقاش هنا. أمثلة: خوارزمية توظيف تعلمت من بيانات متحيزة فرفضت فئة من المتقدمين؛ فيديو مزيف لشخصية عامة انتشر قبل تكذيبه. الرسالة: كن مستخدماً واعياً وناقداً، لا مستهلكاً سلبياً.</a:t>
             </a:r>
             <a:endParaRPr lang="en-US" dirty="0"/>
           </a:p>
@@ -866,7 +867,7 @@
           <a:p>
             <a:r>
               <a:rPr lang="en-US" dirty="0"/>
-              <a:t>اختم بالرسائل الثلاث ثم افتح باب النقاش. أسئلة مقترحة للنقاش: ما التطبيق الذي فاجأكم أنه يستخدم الذكاء الاصطناعي؟ أين ترون حدود استخدامه في الدراسة؟ ما المهارة التي ستبدؤون بتعلمها؟</a:t>
+              <a:t>رسالة تحفيزية: الذكاء الاصطناعي لن يستبدل معظم الوظائف، لكن من يجيد استخدامه سيتفوق على من لا يجيده. شجع الطلاب على تجربة أدوات مجانية وتعلم Python عبر منصات مفتوحة، وذكّرهم أن كل التخصصات ستحتاج هذه المهارات وليس الحاسوب فقط.</a:t>
             </a:r>
             <a:endParaRPr lang="en-US" dirty="0"/>
           </a:p>
@@ -890,6 +891,94 @@
             <a:fld id="{F7021451-1387-4CA6-816F-3879F97B5CBC}" type="slidenum">
               <a:rPr lang="en-US"/>
               <a:t>13</a:t>
+            </a:fld>
+            <a:endParaRPr lang="en-US"/>
+          </a:p>
+        </p:txBody>
+      </p:sp>
+    </p:spTree>
+    <p:extLst>
+      <p:ext uri="{BB962C8B-B14F-4D97-AF65-F5344CB8AC3E}">
+        <p14:creationId xmlns:p14="http://schemas.microsoft.com/office/powerpoint/2010/main" val="1024086991"/>
+      </p:ext>
+    </p:extLst>
+  </p:cSld>
+  <p:clrMapOvr>
+    <a:masterClrMapping/>
+  </p:clrMapOvr>
+</p:notes>
+</file>
+
+<file path=ppt/notesSlides/notesSlide14.xml><?xml version="1.0" encoding="utf-8"?>
+<p:notes xmlns:a="http://schemas.openxmlformats.org/drawingml/2006/main" xmlns:r="http://schemas.openxmlformats.org/officeDocument/2006/relationships" xmlns:p="http://schemas.openxmlformats.org/presentationml/2006/main">
+  <p:cSld>
+    <p:spTree>
+      <p:nvGrpSpPr>
+        <p:cNvPr id="1" name=""/>
+        <p:cNvGrpSpPr/>
+        <p:nvPr/>
+      </p:nvGrpSpPr>
+      <p:grpSpPr>
+        <a:xfrm>
+          <a:off x="0" y="0"/>
+          <a:ext cx="0" cy="0"/>
+          <a:chOff x="0" y="0"/>
+          <a:chExt cx="0" cy="0"/>
+        </a:xfrm>
+      </p:grpSpPr>
+      <p:sp>
+        <p:nvSpPr>
+          <p:cNvPr id="2" name="Slide Image Placeholder 1"/>
+          <p:cNvSpPr>
+            <a:spLocks noGrp="1" noRot="1" noChangeAspect="1"/>
+          </p:cNvSpPr>
+          <p:nvPr>
+            <p:ph type="sldImg"/>
+          </p:nvPr>
+        </p:nvSpPr>
+        <p:spPr/>
+      </p:sp>
+      <p:sp>
+        <p:nvSpPr>
+          <p:cNvPr id="3" name="Notes Placeholder 2"/>
+          <p:cNvSpPr>
+            <a:spLocks noGrp="1"/>
+          </p:cNvSpPr>
+          <p:nvPr>
+            <p:ph type="body" idx="1"/>
+          </p:nvPr>
+        </p:nvSpPr>
+        <p:spPr/>
+        <p:txBody>
+          <a:bodyPr/>
+          <a:lstStyle/>
+          <a:p>
+            <a:r>
+              <a:rPr lang="en-US" dirty="0"/>
+              <a:t>اختم بالرسائل الثلاث ثم افتح باب النقاش. أسئلة مقترحة للنقاش: ما التطبيق الذي فاجأكم أنه يستخدم الذكاء الاصطناعي؟ أين ترون حدود استخدامه في الدراسة؟ ما المهارة التي ستبدؤون بتعلمها؟</a:t>
+            </a:r>
+            <a:endParaRPr lang="en-US" dirty="0"/>
+          </a:p>
+        </p:txBody>
+      </p:sp>
+      <p:sp>
+        <p:nvSpPr>
+          <p:cNvPr id="4" name="Slide Number Placeholder 3"/>
+          <p:cNvSpPr>
+            <a:spLocks noGrp="1"/>
+          </p:cNvSpPr>
+          <p:nvPr>
+            <p:ph type="sldNum" sz="quarter" idx="10"/>
+          </p:nvPr>
+        </p:nvSpPr>
+        <p:spPr/>
+        <p:txBody>
+          <a:bodyPr/>
+          <a:lstStyle/>
+          <a:p>
+            <a:fld id="{F7021451-1387-4CA6-816F-3879F97B5CBC}" type="slidenum">
+              <a:rPr lang="en-US"/>
+              <a:t>14</a:t>
             </a:fld>
             <a:endParaRPr lang="en-US"/>
           </a:p>
@@ -1218,7 +1307,7 @@
           <a:p>
             <a:r>
               <a:rPr lang="en-US" dirty="0"/>
-              <a:t>صحح المفهوم الشائع: ما نراه في الأفلام (روبوتات واعية) هو الذكاء العام، وهو غير موجود بعد. كل التطبيقات الحالية إما ذكاء ضيق متخصص أو ذكاء توليدي ينتج محتوى. هذا التمييز يساعد الطلاب على تقييم الأخبار المبالغ فيها.</a:t>
+              <a:t>اشرح العلاقة الهرمية بالدوائر المتداخلة: الذكاء الاصطناعي هو المفهوم الشامل، وتعلم الآلة طريقة لتحقيقه عبر التعلم من البيانات، والتعلم العميق نوع متقدم من تعلم الآلة يعتمد على شبكات عصبية متعددة الطبقات وهو وراء الطفرة الحالية. مثال للتوضيح: نظام خبير قديم بقواعد مكتوبة يدوياً هو ذكاء اصطناعي لكنه ليس تعلم آلة.</a:t>
             </a:r>
             <a:endParaRPr lang="en-US" dirty="0"/>
           </a:p>
@@ -1306,7 +1395,7 @@
           <a:p>
             <a:r>
               <a:rPr lang="en-US" dirty="0"/>
-              <a:t>اطلب من الطلاب فتح هواتفهم ذهنياً: كل ميزة من هذه الأربع تعمل بنموذج ذكاء اصطناعي مدرَّب. مثال جيد للنقاش: كيف تعرف الخرائط أن الطريق مزدحم؟ (من سرعة حركة هواتف المستخدمين الآخرين على الطريق نفسه).</a:t>
+              <a:t>صحح المفهوم الشائع: ما نراه في الأفلام (روبوتات واعية) هو الذكاء العام، وهو غير موجود بعد. كل التطبيقات الحالية إما ذكاء ضيق متخصص أو ذكاء توليدي ينتج محتوى. هذا التمييز يساعد الطلاب على تقييم الأخبار المبالغ فيها.</a:t>
             </a:r>
             <a:endParaRPr lang="en-US" dirty="0"/>
           </a:p>
@@ -1394,7 +1483,7 @@
           <a:p>
             <a:r>
               <a:rPr lang="en-US" dirty="0"/>
-              <a:t>نقطة نقاش مهمة: الخوارزمية تتعلم منك لتبقيك أطول وقتاً — وهذا سيف ذو حدين: اقتراحات ممتازة، لكنه قد يحبسك في «فقاعة» محتوى متشابه. اسأل الطلاب: هل لاحظتم أن التطبيق يعرف اهتماماتكم؟</a:t>
+              <a:t>اطلب من الطلاب فتح هواتفهم ذهنياً: كل ميزة من هذه الأربع تعمل بنموذج ذكاء اصطناعي مدرَّب. مثال جيد للنقاش: كيف تعرف الخرائط أن الطريق مزدحم؟ (من سرعة حركة هواتف المستخدمين الآخرين على الطريق نفسه).</a:t>
             </a:r>
             <a:endParaRPr lang="en-US" dirty="0"/>
           </a:p>
@@ -1482,7 +1571,7 @@
           <a:p>
             <a:r>
               <a:rPr lang="en-US" dirty="0"/>
-              <a:t>هذه أهم شريحة للطلاب عملياً. وازن بين الفائدة الحقيقية (معلم خصوصي متاح دائماً) والمخاطر (الهلوسة، الغش، ضمور مهارة التفكير). أعطِ مثالاً: اطلب من النموذج أن يشرح لك خطوة بخطوة ثم حل مسألة مشابهة بنفسك.</a:t>
+              <a:t>نقطة نقاش مهمة: الخوارزمية تتعلم منك لتبقيك أطول وقتاً — وهذا سيف ذو حدين: اقتراحات ممتازة، لكنه قد يحبسك في «فقاعة» محتوى متشابه. اسأل الطلاب: هل لاحظتم أن التطبيق يعرف اهتماماتكم؟</a:t>
             </a:r>
             <a:endParaRPr lang="en-US" dirty="0"/>
           </a:p>
@@ -1570,7 +1659,7 @@
           <a:p>
             <a:r>
               <a:rPr lang="en-US" dirty="0"/>
-              <a:t>قصة AlphaFold ملهمة للطلاب المهتمين بالطب والصيدلة: حصل مطوروه على جائزة نوبل في الكيمياء 2024. أكد أن هذه الأنظمة أدوات مساعدة تحت إشراف بشري، والمسؤولية النهائية للطبيب.</a:t>
+              <a:t>هذه أهم شريحة للطلاب عملياً. وازن بين الفائدة الحقيقية (معلم خصوصي متاح دائماً) والمخاطر (الهلوسة، الغش، ضمور مهارة التفكير). أعطِ مثالاً: اطلب من النموذج أن يشرح لك خطوة بخطوة ثم حل مسألة مشابهة بنفسك.</a:t>
             </a:r>
             <a:endParaRPr lang="en-US" dirty="0"/>
           </a:p>
@@ -2406,7 +2495,7 @@
                 <a:ea typeface="Arial" pitchFamily="34" charset="-122"/>
                 <a:cs typeface="Arial" pitchFamily="34" charset="-120"/>
               </a:rPr>
-              <a:t>النقل والمنزل والمدن الذكية</a:t>
+              <a:t>في الصحة والطب</a:t>
             </a:r>
             <a:endParaRPr lang="ar-SA" sz="3100" dirty="0"/>
           </a:p>
@@ -2420,23 +2509,18 @@
         </p:nvSpPr>
         <p:spPr>
           <a:xfrm>
-            <a:off x="6255868" y="1600200"/>
-            <a:ext cx="5440680" cy="1965960"/>
+            <a:off x="8198968" y="1554480"/>
+            <a:ext cx="3566160" cy="3063240"/>
           </a:xfrm>
           <a:prstGeom prst="roundRect">
             <a:avLst>
-              <a:gd name="adj" fmla="val 5581"/>
+              <a:gd name="adj" fmla="val 4179"/>
             </a:avLst>
           </a:prstGeom>
           <a:solidFill>
-            <a:srgbClr val="FFFFFF"/>
-          </a:solidFill>
-          <a:ln w="12700">
-            <a:solidFill>
-              <a:srgbClr val="DCE8E8"/>
-            </a:solidFill>
-            <a:prstDash val="solid"/>
-          </a:ln>
+            <a:srgbClr val="F2F7F7"/>
+          </a:solidFill>
+          <a:ln/>
           <a:effectLst>
             <a:outerShdw sx="100000" sy="100000" kx="0" ky="0" algn="bl" rotWithShape="0" blurRad="88900" dist="25400" dir="5400000">
               <a:srgbClr val="0E2A32">
@@ -2454,8 +2538,8 @@
         </p:nvSpPr>
         <p:spPr>
           <a:xfrm>
-            <a:off x="10644988" y="2180844"/>
-            <a:ext cx="804672" cy="804672"/>
+            <a:off x="9524848" y="1874520"/>
+            <a:ext cx="914400" cy="914400"/>
           </a:xfrm>
           <a:prstGeom prst="ellipse">
             <a:avLst/>
@@ -2482,8 +2566,8 @@
         </p:blipFill>
         <p:spPr>
           <a:xfrm>
-            <a:off x="10854202" y="2390059"/>
-            <a:ext cx="386243" cy="386243"/>
+            <a:off x="9762592" y="2112264"/>
+            <a:ext cx="438912" cy="438912"/>
           </a:xfrm>
           <a:prstGeom prst="rect">
             <a:avLst/>
@@ -2498,8 +2582,8 @@
         </p:nvSpPr>
         <p:spPr>
           <a:xfrm>
-            <a:off x="6530188" y="1874520"/>
-            <a:ext cx="3977640" cy="411480"/>
+            <a:off x="8381848" y="2926080"/>
+            <a:ext cx="3200400" cy="457200"/>
           </a:xfrm>
           <a:prstGeom prst="rect">
             <a:avLst/>
@@ -2511,11 +2595,11 @@
           <a:bodyPr wrap="square" rtlCol="0" anchor="ctr"/>
           <a:lstStyle/>
           <a:p>
-            <a:pPr rtl="1" algn="r" indent="0" marL="0">
-              <a:buNone/>
-            </a:pPr>
-            <a:r>
-              <a:rPr lang="ar-SA" altLang="en-US" sz="1700" b="1" dirty="0">
+            <a:pPr rtl="1" algn="ctr" indent="0" marL="0">
+              <a:buNone/>
+            </a:pPr>
+            <a:r>
+              <a:rPr lang="ar-SA" altLang="en-US" sz="1650" b="1" dirty="0">
                 <a:solidFill>
                   <a:srgbClr val="0E2A32"/>
                 </a:solidFill>
@@ -2523,9 +2607,9 @@
                 <a:ea typeface="Arial" pitchFamily="34" charset="-122"/>
                 <a:cs typeface="Arial" pitchFamily="34" charset="-120"/>
               </a:rPr>
-              <a:t>السيارات ذاتية القيادة</a:t>
-            </a:r>
-            <a:endParaRPr lang="ar-SA" sz="1700" dirty="0"/>
+              <a:t>تحليل الصور الطبية</a:t>
+            </a:r>
+            <a:endParaRPr lang="ar-SA" sz="1650" dirty="0"/>
           </a:p>
         </p:txBody>
       </p:sp>
@@ -2537,8 +2621,8 @@
         </p:nvSpPr>
         <p:spPr>
           <a:xfrm>
-            <a:off x="6530188" y="2331720"/>
-            <a:ext cx="3977640" cy="1051560"/>
+            <a:off x="8455000" y="3383280"/>
+            <a:ext cx="3054096" cy="1143000"/>
           </a:xfrm>
           <a:prstGeom prst="rect">
             <a:avLst/>
@@ -2550,14 +2634,14 @@
           <a:bodyPr wrap="square" rtlCol="0" anchor="ctr"/>
           <a:lstStyle/>
           <a:p>
-            <a:pPr rtl="1" algn="r" indent="0" marL="0">
+            <a:pPr rtl="1" algn="ctr" indent="0" marL="0">
               <a:lnSpc>
-                <a:spcPct val="120000"/>
+                <a:spcPct val="118000"/>
               </a:lnSpc>
               <a:buNone/>
             </a:pPr>
             <a:r>
-              <a:rPr lang="ar-SA" altLang="en-US" sz="1300" dirty="0">
+              <a:rPr lang="ar-SA" altLang="en-US" sz="1250" dirty="0">
                 <a:solidFill>
                   <a:srgbClr val="587076"/>
                 </a:solidFill>
@@ -2565,9 +2649,9 @@
                 <a:ea typeface="Arial" pitchFamily="34" charset="-122"/>
                 <a:cs typeface="Arial" pitchFamily="34" charset="-120"/>
               </a:rPr>
-              <a:t>كاميرات ورادارات ونماذج رؤية حاسوبية تقرأ الطريق وتتخذ قرارات في أجزاء من الثانية.</a:t>
-            </a:r>
-            <a:endParaRPr lang="ar-SA" sz="1300" dirty="0"/>
+              <a:t>أنظمة تكشف الأورام والكسور في صور الأشعة بدقة تضاهي الأطباء المتخصصين، وتساعدهم على قرارات أسرع.</a:t>
+            </a:r>
+            <a:endParaRPr lang="ar-SA" sz="1250" dirty="0"/>
           </a:p>
         </p:txBody>
       </p:sp>
@@ -2579,23 +2663,18 @@
         </p:nvSpPr>
         <p:spPr>
           <a:xfrm>
-            <a:off x="495148" y="1600200"/>
-            <a:ext cx="5440680" cy="1965960"/>
+            <a:off x="4312768" y="1554480"/>
+            <a:ext cx="3566160" cy="3063240"/>
           </a:xfrm>
           <a:prstGeom prst="roundRect">
             <a:avLst>
-              <a:gd name="adj" fmla="val 5581"/>
+              <a:gd name="adj" fmla="val 4179"/>
             </a:avLst>
           </a:prstGeom>
           <a:solidFill>
-            <a:srgbClr val="FFFFFF"/>
-          </a:solidFill>
-          <a:ln w="12700">
-            <a:solidFill>
-              <a:srgbClr val="DCE8E8"/>
-            </a:solidFill>
-            <a:prstDash val="solid"/>
-          </a:ln>
+            <a:srgbClr val="F2F7F7"/>
+          </a:solidFill>
+          <a:ln/>
           <a:effectLst>
             <a:outerShdw sx="100000" sy="100000" kx="0" ky="0" algn="bl" rotWithShape="0" blurRad="88900" dist="25400" dir="5400000">
               <a:srgbClr val="0E2A32">
@@ -2613,14 +2692,14 @@
         </p:nvSpPr>
         <p:spPr>
           <a:xfrm>
-            <a:off x="4884268" y="2180844"/>
-            <a:ext cx="804672" cy="804672"/>
+            <a:off x="5638648" y="1874520"/>
+            <a:ext cx="914400" cy="914400"/>
           </a:xfrm>
           <a:prstGeom prst="ellipse">
             <a:avLst/>
           </a:prstGeom>
           <a:solidFill>
-            <a:srgbClr val="00A896"/>
+            <a:srgbClr val="02C39A"/>
           </a:solidFill>
           <a:ln/>
         </p:spPr>
@@ -2641,8 +2720,8 @@
         </p:blipFill>
         <p:spPr>
           <a:xfrm>
-            <a:off x="5093482" y="2390059"/>
-            <a:ext cx="386243" cy="386243"/>
+            <a:off x="5876392" y="2112264"/>
+            <a:ext cx="438912" cy="438912"/>
           </a:xfrm>
           <a:prstGeom prst="rect">
             <a:avLst/>
@@ -2657,8 +2736,8 @@
         </p:nvSpPr>
         <p:spPr>
           <a:xfrm>
-            <a:off x="769468" y="1874520"/>
-            <a:ext cx="3977640" cy="411480"/>
+            <a:off x="4495648" y="2926080"/>
+            <a:ext cx="3200400" cy="457200"/>
           </a:xfrm>
           <a:prstGeom prst="rect">
             <a:avLst/>
@@ -2670,11 +2749,11 @@
           <a:bodyPr wrap="square" rtlCol="0" anchor="ctr"/>
           <a:lstStyle/>
           <a:p>
-            <a:pPr rtl="1" algn="r" indent="0" marL="0">
-              <a:buNone/>
-            </a:pPr>
-            <a:r>
-              <a:rPr lang="ar-SA" altLang="en-US" sz="1700" b="1" dirty="0">
+            <a:pPr rtl="1" algn="ctr" indent="0" marL="0">
+              <a:buNone/>
+            </a:pPr>
+            <a:r>
+              <a:rPr lang="ar-SA" altLang="en-US" sz="1650" b="1" dirty="0">
                 <a:solidFill>
                   <a:srgbClr val="0E2A32"/>
                 </a:solidFill>
@@ -2682,9 +2761,9 @@
                 <a:ea typeface="Arial" pitchFamily="34" charset="-122"/>
                 <a:cs typeface="Arial" pitchFamily="34" charset="-120"/>
               </a:rPr>
-              <a:t>إدارة المرور</a:t>
-            </a:r>
-            <a:endParaRPr lang="ar-SA" sz="1700" dirty="0"/>
+              <a:t>اكتشاف الأدوية</a:t>
+            </a:r>
+            <a:endParaRPr lang="ar-SA" sz="1650" dirty="0"/>
           </a:p>
         </p:txBody>
       </p:sp>
@@ -2696,8 +2775,8 @@
         </p:nvSpPr>
         <p:spPr>
           <a:xfrm>
-            <a:off x="769468" y="2331720"/>
-            <a:ext cx="3977640" cy="1051560"/>
+            <a:off x="4568800" y="3383280"/>
+            <a:ext cx="3054096" cy="1143000"/>
           </a:xfrm>
           <a:prstGeom prst="rect">
             <a:avLst/>
@@ -2709,14 +2788,14 @@
           <a:bodyPr wrap="square" rtlCol="0" anchor="ctr"/>
           <a:lstStyle/>
           <a:p>
-            <a:pPr rtl="1" algn="r" indent="0" marL="0">
+            <a:pPr rtl="1" algn="ctr" indent="0" marL="0">
               <a:lnSpc>
-                <a:spcPct val="120000"/>
+                <a:spcPct val="118000"/>
               </a:lnSpc>
               <a:buNone/>
             </a:pPr>
             <a:r>
-              <a:rPr lang="ar-SA" altLang="en-US" sz="1300" dirty="0">
+              <a:rPr lang="ar-SA" altLang="en-US" sz="1250" dirty="0">
                 <a:solidFill>
                   <a:srgbClr val="587076"/>
                 </a:solidFill>
@@ -2724,9 +2803,9 @@
                 <a:ea typeface="Arial" pitchFamily="34" charset="-122"/>
                 <a:cs typeface="Arial" pitchFamily="34" charset="-120"/>
               </a:rPr>
-              <a:t>إشارات ذكية تتكيف مع كثافة السير لحظياً وتقلل الازدحام والانبعاثات في المدن الكبرى.</a:t>
-            </a:r>
-            <a:endParaRPr lang="ar-SA" sz="1300" dirty="0"/>
+              <a:t>نظام AlphaFold تنبأ ببنية أكثر من 200 مليون بروتين — عمل كان يستغرق سنوات في المختبر لكل بروتين.</a:t>
+            </a:r>
+            <a:endParaRPr lang="ar-SA" sz="1250" dirty="0"/>
           </a:p>
         </p:txBody>
       </p:sp>
@@ -2738,23 +2817,18 @@
         </p:nvSpPr>
         <p:spPr>
           <a:xfrm>
-            <a:off x="6255868" y="3886200"/>
-            <a:ext cx="5440680" cy="1965960"/>
+            <a:off x="426568" y="1554480"/>
+            <a:ext cx="3566160" cy="3063240"/>
           </a:xfrm>
           <a:prstGeom prst="roundRect">
             <a:avLst>
-              <a:gd name="adj" fmla="val 5581"/>
+              <a:gd name="adj" fmla="val 4179"/>
             </a:avLst>
           </a:prstGeom>
           <a:solidFill>
-            <a:srgbClr val="FFFFFF"/>
-          </a:solidFill>
-          <a:ln w="12700">
-            <a:solidFill>
-              <a:srgbClr val="DCE8E8"/>
-            </a:solidFill>
-            <a:prstDash val="solid"/>
-          </a:ln>
+            <a:srgbClr val="F2F7F7"/>
+          </a:solidFill>
+          <a:ln/>
           <a:effectLst>
             <a:outerShdw sx="100000" sy="100000" kx="0" ky="0" algn="bl" rotWithShape="0" blurRad="88900" dist="25400" dir="5400000">
               <a:srgbClr val="0E2A32">
@@ -2772,8 +2846,8 @@
         </p:nvSpPr>
         <p:spPr>
           <a:xfrm>
-            <a:off x="10644988" y="4466844"/>
-            <a:ext cx="804672" cy="804672"/>
+            <a:off x="1752448" y="1874520"/>
+            <a:ext cx="914400" cy="914400"/>
           </a:xfrm>
           <a:prstGeom prst="ellipse">
             <a:avLst/>
@@ -2800,8 +2874,8 @@
         </p:blipFill>
         <p:spPr>
           <a:xfrm>
-            <a:off x="10854202" y="4676059"/>
-            <a:ext cx="386243" cy="386243"/>
+            <a:off x="1990192" y="2112264"/>
+            <a:ext cx="438912" cy="438912"/>
           </a:xfrm>
           <a:prstGeom prst="rect">
             <a:avLst/>
@@ -2816,8 +2890,8 @@
         </p:nvSpPr>
         <p:spPr>
           <a:xfrm>
-            <a:off x="6530188" y="4160520"/>
-            <a:ext cx="3977640" cy="411480"/>
+            <a:off x="609448" y="2926080"/>
+            <a:ext cx="3200400" cy="457200"/>
           </a:xfrm>
           <a:prstGeom prst="rect">
             <a:avLst/>
@@ -2829,11 +2903,11 @@
           <a:bodyPr wrap="square" rtlCol="0" anchor="ctr"/>
           <a:lstStyle/>
           <a:p>
-            <a:pPr rtl="1" algn="r" indent="0" marL="0">
-              <a:buNone/>
-            </a:pPr>
-            <a:r>
-              <a:rPr lang="ar-SA" altLang="en-US" sz="1700" b="1" dirty="0">
+            <a:pPr rtl="1" algn="ctr" indent="0" marL="0">
+              <a:buNone/>
+            </a:pPr>
+            <a:r>
+              <a:rPr lang="ar-SA" altLang="en-US" sz="1650" b="1" dirty="0">
                 <a:solidFill>
                   <a:srgbClr val="0E2A32"/>
                 </a:solidFill>
@@ -2841,9 +2915,9 @@
                 <a:ea typeface="Arial" pitchFamily="34" charset="-122"/>
                 <a:cs typeface="Arial" pitchFamily="34" charset="-120"/>
               </a:rPr>
-              <a:t>المنزل الذكي</a:t>
-            </a:r>
-            <a:endParaRPr lang="ar-SA" sz="1700" dirty="0"/>
+              <a:t>الأجهزة القابلة للارتداء</a:t>
+            </a:r>
+            <a:endParaRPr lang="ar-SA" sz="1650" dirty="0"/>
           </a:p>
         </p:txBody>
       </p:sp>
@@ -2855,8 +2929,72 @@
         </p:nvSpPr>
         <p:spPr>
           <a:xfrm>
-            <a:off x="6530188" y="4617720"/>
-            <a:ext cx="3977640" cy="1051560"/>
+            <a:off x="682600" y="3383280"/>
+            <a:ext cx="3054096" cy="1143000"/>
+          </a:xfrm>
+          <a:prstGeom prst="rect">
+            <a:avLst/>
+          </a:prstGeom>
+          <a:noFill/>
+          <a:ln/>
+        </p:spPr>
+        <p:txBody>
+          <a:bodyPr wrap="square" rtlCol="0" anchor="ctr"/>
+          <a:lstStyle/>
+          <a:p>
+            <a:pPr rtl="1" algn="ctr" indent="0" marL="0">
+              <a:lnSpc>
+                <a:spcPct val="118000"/>
+              </a:lnSpc>
+              <a:buNone/>
+            </a:pPr>
+            <a:r>
+              <a:rPr lang="ar-SA" altLang="en-US" sz="1250" dirty="0">
+                <a:solidFill>
+                  <a:srgbClr val="587076"/>
+                </a:solidFill>
+                <a:latin typeface="Arial" pitchFamily="34" charset="0"/>
+                <a:ea typeface="Arial" pitchFamily="34" charset="-122"/>
+                <a:cs typeface="Arial" pitchFamily="34" charset="-120"/>
+              </a:rPr>
+              <a:t>الساعات الذكية تراقب نبض القلب والنوم وترسل تنبيهات مبكرة عند اكتشاف اضطراب في النظم.</a:t>
+            </a:r>
+            <a:endParaRPr lang="ar-SA" sz="1250" dirty="0"/>
+          </a:p>
+        </p:txBody>
+      </p:sp>
+      <p:sp>
+        <p:nvSpPr>
+          <p:cNvPr id="20" name="Shape 14"/>
+          <p:cNvSpPr/>
+          <p:nvPr/>
+        </p:nvSpPr>
+        <p:spPr>
+          <a:xfrm>
+            <a:off x="1645920" y="5074920"/>
+            <a:ext cx="8897112" cy="868680"/>
+          </a:xfrm>
+          <a:prstGeom prst="roundRect">
+            <a:avLst>
+              <a:gd name="adj" fmla="val 12632"/>
+            </a:avLst>
+          </a:prstGeom>
+          <a:solidFill>
+            <a:srgbClr val="0E2A32"/>
+          </a:solidFill>
+          <a:ln/>
+        </p:spPr>
+      </p:sp>
+      <p:sp>
+        <p:nvSpPr>
+          <p:cNvPr id="21" name="Text 15"/>
+          <p:cNvSpPr/>
+          <p:nvPr/>
+        </p:nvSpPr>
+        <p:spPr>
+          <a:xfrm>
+            <a:off x="1920240" y="5074920"/>
+            <a:ext cx="8321040" cy="868680"/>
           </a:xfrm>
           <a:prstGeom prst="rect">
             <a:avLst/>
@@ -2870,220 +3008,39 @@
           <a:p>
             <a:pPr rtl="1" algn="r" indent="0" marL="0">
               <a:lnSpc>
-                <a:spcPct val="120000"/>
+                <a:spcPct val="110000"/>
               </a:lnSpc>
               <a:buNone/>
             </a:pPr>
             <a:r>
-              <a:rPr lang="ar-SA" altLang="en-US" sz="1300" dirty="0">
-                <a:solidFill>
-                  <a:srgbClr val="587076"/>
-                </a:solidFill>
-                <a:latin typeface="Arial" pitchFamily="34" charset="0"/>
-                <a:ea typeface="Arial" pitchFamily="34" charset="-122"/>
-                <a:cs typeface="Arial" pitchFamily="34" charset="-120"/>
-              </a:rPr>
-              <a:t>مساعدات صوتية، إضاءة وتكييف يتعلمان جدولك اليومي لتوفير الطاقة والراحة.</a:t>
-            </a:r>
-            <a:endParaRPr lang="ar-SA" sz="1300" dirty="0"/>
-          </a:p>
-        </p:txBody>
-      </p:sp>
-      <p:sp>
-        <p:nvSpPr>
-          <p:cNvPr id="20" name="Shape 14"/>
-          <p:cNvSpPr/>
-          <p:nvPr/>
-        </p:nvSpPr>
-        <p:spPr>
-          <a:xfrm>
-            <a:off x="495148" y="3886200"/>
-            <a:ext cx="5440680" cy="1965960"/>
-          </a:xfrm>
-          <a:prstGeom prst="roundRect">
-            <a:avLst>
-              <a:gd name="adj" fmla="val 5581"/>
-            </a:avLst>
-          </a:prstGeom>
-          <a:solidFill>
-            <a:srgbClr val="FFFFFF"/>
-          </a:solidFill>
-          <a:ln w="12700">
-            <a:solidFill>
-              <a:srgbClr val="DCE8E8"/>
-            </a:solidFill>
-            <a:prstDash val="solid"/>
-          </a:ln>
-          <a:effectLst>
-            <a:outerShdw sx="100000" sy="100000" kx="0" ky="0" algn="bl" rotWithShape="0" blurRad="88900" dist="25400" dir="5400000">
-              <a:srgbClr val="0E2A32">
-                <a:alpha val="16000"/>
-              </a:srgbClr>
-            </a:outerShdw>
-          </a:effectLst>
-        </p:spPr>
-      </p:sp>
-      <p:sp>
-        <p:nvSpPr>
-          <p:cNvPr id="21" name="Shape 15"/>
-          <p:cNvSpPr/>
-          <p:nvPr/>
-        </p:nvSpPr>
-        <p:spPr>
-          <a:xfrm>
-            <a:off x="4884268" y="4466844"/>
-            <a:ext cx="804672" cy="804672"/>
-          </a:xfrm>
-          <a:prstGeom prst="ellipse">
-            <a:avLst/>
-          </a:prstGeom>
-          <a:solidFill>
-            <a:srgbClr val="00A896"/>
-          </a:solidFill>
-          <a:ln/>
-        </p:spPr>
-      </p:sp>
-      <p:pic>
-        <p:nvPicPr>
-          <p:cNvPr id="22" name="Image 4" descr="preencoded.png">    </p:cNvPr>
-          <p:cNvPicPr>
-            <a:picLocks noChangeAspect="1"/>
-          </p:cNvPicPr>
-          <p:nvPr/>
-        </p:nvPicPr>
-        <p:blipFill>
-          <a:blip r:embed="rId5"/>
-          <a:stretch>
-            <a:fillRect/>
-          </a:stretch>
-        </p:blipFill>
-        <p:spPr>
-          <a:xfrm>
-            <a:off x="5093482" y="4676059"/>
-            <a:ext cx="386243" cy="386243"/>
-          </a:xfrm>
-          <a:prstGeom prst="rect">
-            <a:avLst/>
-          </a:prstGeom>
-        </p:spPr>
-      </p:pic>
-      <p:sp>
-        <p:nvSpPr>
-          <p:cNvPr id="23" name="Text 16"/>
-          <p:cNvSpPr/>
-          <p:nvPr/>
-        </p:nvSpPr>
-        <p:spPr>
-          <a:xfrm>
-            <a:off x="769468" y="4160520"/>
-            <a:ext cx="3977640" cy="411480"/>
-          </a:xfrm>
-          <a:prstGeom prst="rect">
-            <a:avLst/>
-          </a:prstGeom>
-          <a:noFill/>
-          <a:ln/>
-        </p:spPr>
-        <p:txBody>
-          <a:bodyPr wrap="square" rtlCol="0" anchor="ctr"/>
-          <a:lstStyle/>
-          <a:p>
-            <a:pPr rtl="1" algn="r" indent="0" marL="0">
-              <a:buNone/>
-            </a:pPr>
-            <a:r>
-              <a:rPr lang="ar-SA" altLang="en-US" sz="1700" b="1" dirty="0">
-                <a:solidFill>
-                  <a:srgbClr val="0E2A32"/>
-                </a:solidFill>
-                <a:latin typeface="Arial" pitchFamily="34" charset="0"/>
-                <a:ea typeface="Arial" pitchFamily="34" charset="-122"/>
-                <a:cs typeface="Arial" pitchFamily="34" charset="-120"/>
-              </a:rPr>
-              <a:t>الطقس والزراعة</a:t>
-            </a:r>
-            <a:endParaRPr lang="ar-SA" sz="1700" dirty="0"/>
-          </a:p>
-        </p:txBody>
-      </p:sp>
-      <p:sp>
-        <p:nvSpPr>
-          <p:cNvPr id="24" name="Text 17"/>
-          <p:cNvSpPr/>
-          <p:nvPr/>
-        </p:nvSpPr>
-        <p:spPr>
-          <a:xfrm>
-            <a:off x="769468" y="4617720"/>
-            <a:ext cx="3977640" cy="1051560"/>
-          </a:xfrm>
-          <a:prstGeom prst="rect">
-            <a:avLst/>
-          </a:prstGeom>
-          <a:noFill/>
-          <a:ln/>
-        </p:spPr>
-        <p:txBody>
-          <a:bodyPr wrap="square" rtlCol="0" anchor="ctr"/>
-          <a:lstStyle/>
-          <a:p>
+              <a:rPr lang="ar-SA" altLang="en-US" sz="1450" b="1" dirty="0">
+                <a:solidFill>
+                  <a:srgbClr val="02C39A"/>
+                </a:solidFill>
+                <a:latin typeface="Arial" pitchFamily="34" charset="0"/>
+                <a:ea typeface="Arial" pitchFamily="34" charset="-122"/>
+                <a:cs typeface="Arial" pitchFamily="34" charset="-120"/>
+              </a:rPr>
+              <a:t>القاعدة الذهبية:  </a:t>
+            </a:r>
             <a:pPr rtl="1" algn="r" indent="0" marL="0">
               <a:lnSpc>
-                <a:spcPct val="120000"/>
+                <a:spcPct val="110000"/>
               </a:lnSpc>
               <a:buNone/>
             </a:pPr>
             <a:r>
-              <a:rPr lang="ar-SA" altLang="en-US" sz="1300" dirty="0">
-                <a:solidFill>
-                  <a:srgbClr val="587076"/>
-                </a:solidFill>
-                <a:latin typeface="Arial" pitchFamily="34" charset="0"/>
-                <a:ea typeface="Arial" pitchFamily="34" charset="-122"/>
-                <a:cs typeface="Arial" pitchFamily="34" charset="-120"/>
-              </a:rPr>
-              <a:t>نماذج تتوقع الطقس بدقة أعلى، وطائرات مسيّرة تراقب المحاصيل وتحدد احتياجها للري.</a:t>
-            </a:r>
-            <a:endParaRPr lang="ar-SA" sz="1300" dirty="0"/>
-          </a:p>
-        </p:txBody>
-      </p:sp>
-      <p:sp>
-        <p:nvSpPr>
-          <p:cNvPr id="25" name="Text 18"/>
-          <p:cNvSpPr/>
-          <p:nvPr/>
-        </p:nvSpPr>
-        <p:spPr>
-          <a:xfrm>
-            <a:off x="548640" y="6172200"/>
-            <a:ext cx="11094415" cy="411480"/>
-          </a:xfrm>
-          <a:prstGeom prst="rect">
-            <a:avLst/>
-          </a:prstGeom>
-          <a:noFill/>
-          <a:ln/>
-        </p:spPr>
-        <p:txBody>
-          <a:bodyPr wrap="square" rtlCol="0" anchor="ctr"/>
-          <a:lstStyle/>
-          <a:p>
-            <a:pPr rtl="1" algn="ctr" indent="0" marL="0">
-              <a:buNone/>
-            </a:pPr>
-            <a:r>
-              <a:rPr lang="ar-SA" altLang="en-US" sz="1400" i="1" dirty="0">
-                <a:solidFill>
-                  <a:srgbClr val="028090"/>
-                </a:solidFill>
-                <a:latin typeface="Arial" pitchFamily="34" charset="0"/>
-                <a:ea typeface="Arial" pitchFamily="34" charset="-122"/>
-                <a:cs typeface="Arial" pitchFamily="34" charset="-120"/>
-              </a:rPr>
-              <a:t>من إشارة المرور إلى مكيف غرفتك — البنية التحتية من حولنا تصبح أذكى عاماً بعد عام.</a:t>
-            </a:r>
-            <a:endParaRPr lang="ar-SA" sz="1400" dirty="0"/>
+              <a:rPr lang="ar-SA" altLang="en-US" sz="1450" dirty="0">
+                <a:solidFill>
+                  <a:srgbClr val="FFFFFF"/>
+                </a:solidFill>
+                <a:latin typeface="Arial" pitchFamily="34" charset="0"/>
+                <a:ea typeface="Arial" pitchFamily="34" charset="-122"/>
+                <a:cs typeface="Arial" pitchFamily="34" charset="-120"/>
+              </a:rPr>
+              <a:t>الذكاء الاصطناعي مساعد للطبيب لا بديل عنه — القرار الطبي يبقى بشرياً.</a:t>
+            </a:r>
+            <a:endParaRPr lang="ar-SA" sz="1450" dirty="0"/>
           </a:p>
         </p:txBody>
       </p:sp>
@@ -3196,7 +3153,7 @@
                 <a:ea typeface="Arial" pitchFamily="34" charset="-122"/>
                 <a:cs typeface="Arial" pitchFamily="34" charset="-120"/>
               </a:rPr>
-              <a:t>تحديات يجب أن نعيها</a:t>
+              <a:t>النقل والمنزل والمدن الذكية</a:t>
             </a:r>
             <a:endParaRPr lang="ar-SA" sz="3100" dirty="0"/>
           </a:p>
@@ -3219,9 +3176,14 @@
             </a:avLst>
           </a:prstGeom>
           <a:solidFill>
-            <a:srgbClr val="F2F7F7"/>
-          </a:solidFill>
-          <a:ln/>
+            <a:srgbClr val="FFFFFF"/>
+          </a:solidFill>
+          <a:ln w="12700">
+            <a:solidFill>
+              <a:srgbClr val="DCE8E8"/>
+            </a:solidFill>
+            <a:prstDash val="solid"/>
+          </a:ln>
           <a:effectLst>
             <a:outerShdw sx="100000" sy="100000" kx="0" ky="0" algn="bl" rotWithShape="0" blurRad="88900" dist="25400" dir="5400000">
               <a:srgbClr val="0E2A32">
@@ -3246,7 +3208,7 @@
             <a:avLst/>
           </a:prstGeom>
           <a:solidFill>
-            <a:srgbClr val="0E2A32"/>
+            <a:srgbClr val="028090"/>
           </a:solidFill>
           <a:ln/>
         </p:spPr>
@@ -3308,7 +3270,7 @@
                 <a:ea typeface="Arial" pitchFamily="34" charset="-122"/>
                 <a:cs typeface="Arial" pitchFamily="34" charset="-120"/>
               </a:rPr>
-              <a:t>الخصوصية</a:t>
+              <a:t>السيارات ذاتية القيادة</a:t>
             </a:r>
             <a:endParaRPr lang="ar-SA" sz="1700" dirty="0"/>
           </a:p>
@@ -3350,7 +3312,7 @@
                 <a:ea typeface="Arial" pitchFamily="34" charset="-122"/>
                 <a:cs typeface="Arial" pitchFamily="34" charset="-120"/>
               </a:rPr>
-              <a:t>بياناتك هي الوقود: كل نقرة ومشاهدة تُجمع وتُحلل. اقرأ الصلاحيات وفكر فيما تشاركه.</a:t>
+              <a:t>كاميرات ورادارات ونماذج رؤية حاسوبية تقرأ الطريق وتتخذ قرارات في أجزاء من الثانية.</a:t>
             </a:r>
             <a:endParaRPr lang="ar-SA" sz="1300" dirty="0"/>
           </a:p>
@@ -3373,9 +3335,14 @@
             </a:avLst>
           </a:prstGeom>
           <a:solidFill>
-            <a:srgbClr val="F2F7F7"/>
-          </a:solidFill>
-          <a:ln/>
+            <a:srgbClr val="FFFFFF"/>
+          </a:solidFill>
+          <a:ln w="12700">
+            <a:solidFill>
+              <a:srgbClr val="DCE8E8"/>
+            </a:solidFill>
+            <a:prstDash val="solid"/>
+          </a:ln>
           <a:effectLst>
             <a:outerShdw sx="100000" sy="100000" kx="0" ky="0" algn="bl" rotWithShape="0" blurRad="88900" dist="25400" dir="5400000">
               <a:srgbClr val="0E2A32">
@@ -3400,7 +3367,7 @@
             <a:avLst/>
           </a:prstGeom>
           <a:solidFill>
-            <a:srgbClr val="0E2A32"/>
+            <a:srgbClr val="00A896"/>
           </a:solidFill>
           <a:ln/>
         </p:spPr>
@@ -3462,7 +3429,7 @@
                 <a:ea typeface="Arial" pitchFamily="34" charset="-122"/>
                 <a:cs typeface="Arial" pitchFamily="34" charset="-120"/>
               </a:rPr>
-              <a:t>التحيز</a:t>
+              <a:t>إدارة المرور</a:t>
             </a:r>
             <a:endParaRPr lang="ar-SA" sz="1700" dirty="0"/>
           </a:p>
@@ -3504,7 +3471,7 @@
                 <a:ea typeface="Arial" pitchFamily="34" charset="-122"/>
                 <a:cs typeface="Arial" pitchFamily="34" charset="-120"/>
               </a:rPr>
-              <a:t>النموذج يتعلم من بيانات بشرية قد تحمل تحيزات — فيكررها في قراراته دون قصد.</a:t>
+              <a:t>إشارات ذكية تتكيف مع كثافة السير لحظياً وتقلل الازدحام والانبعاثات في المدن الكبرى.</a:t>
             </a:r>
             <a:endParaRPr lang="ar-SA" sz="1300" dirty="0"/>
           </a:p>
@@ -3527,9 +3494,14 @@
             </a:avLst>
           </a:prstGeom>
           <a:solidFill>
-            <a:srgbClr val="F2F7F7"/>
-          </a:solidFill>
-          <a:ln/>
+            <a:srgbClr val="FFFFFF"/>
+          </a:solidFill>
+          <a:ln w="12700">
+            <a:solidFill>
+              <a:srgbClr val="DCE8E8"/>
+            </a:solidFill>
+            <a:prstDash val="solid"/>
+          </a:ln>
           <a:effectLst>
             <a:outerShdw sx="100000" sy="100000" kx="0" ky="0" algn="bl" rotWithShape="0" blurRad="88900" dist="25400" dir="5400000">
               <a:srgbClr val="0E2A32">
@@ -3554,7 +3526,7 @@
             <a:avLst/>
           </a:prstGeom>
           <a:solidFill>
-            <a:srgbClr val="0E2A32"/>
+            <a:srgbClr val="028090"/>
           </a:solidFill>
           <a:ln/>
         </p:spPr>
@@ -3616,7 +3588,7 @@
                 <a:ea typeface="Arial" pitchFamily="34" charset="-122"/>
                 <a:cs typeface="Arial" pitchFamily="34" charset="-120"/>
               </a:rPr>
-              <a:t>المعلومات المضللة</a:t>
+              <a:t>المنزل الذكي</a:t>
             </a:r>
             <a:endParaRPr lang="ar-SA" sz="1700" dirty="0"/>
           </a:p>
@@ -3658,7 +3630,7 @@
                 <a:ea typeface="Arial" pitchFamily="34" charset="-122"/>
                 <a:cs typeface="Arial" pitchFamily="34" charset="-120"/>
               </a:rPr>
-              <a:t>التزييف العميق (Deepfake) ينتج صوراً وفيديوهات مزيفة يصعب تمييزها — تحقق قبل أن تصدق أو تشارك.</a:t>
+              <a:t>مساعدات صوتية، إضاءة وتكييف يتعلمان جدولك اليومي لتوفير الطاقة والراحة.</a:t>
             </a:r>
             <a:endParaRPr lang="ar-SA" sz="1300" dirty="0"/>
           </a:p>
@@ -3681,9 +3653,14 @@
             </a:avLst>
           </a:prstGeom>
           <a:solidFill>
-            <a:srgbClr val="F2F7F7"/>
-          </a:solidFill>
-          <a:ln/>
+            <a:srgbClr val="FFFFFF"/>
+          </a:solidFill>
+          <a:ln w="12700">
+            <a:solidFill>
+              <a:srgbClr val="DCE8E8"/>
+            </a:solidFill>
+            <a:prstDash val="solid"/>
+          </a:ln>
           <a:effectLst>
             <a:outerShdw sx="100000" sy="100000" kx="0" ky="0" algn="bl" rotWithShape="0" blurRad="88900" dist="25400" dir="5400000">
               <a:srgbClr val="0E2A32">
@@ -3708,7 +3685,7 @@
             <a:avLst/>
           </a:prstGeom>
           <a:solidFill>
-            <a:srgbClr val="0E2A32"/>
+            <a:srgbClr val="00A896"/>
           </a:solidFill>
           <a:ln/>
         </p:spPr>
@@ -3770,7 +3747,7 @@
                 <a:ea typeface="Arial" pitchFamily="34" charset="-122"/>
                 <a:cs typeface="Arial" pitchFamily="34" charset="-120"/>
               </a:rPr>
-              <a:t>الاعتماد الزائد</a:t>
+              <a:t>الطقس والزراعة</a:t>
             </a:r>
             <a:endParaRPr lang="ar-SA" sz="1700" dirty="0"/>
           </a:p>
@@ -3812,7 +3789,7 @@
                 <a:ea typeface="Arial" pitchFamily="34" charset="-122"/>
                 <a:cs typeface="Arial" pitchFamily="34" charset="-120"/>
               </a:rPr>
-              <a:t>إن تركت الأداة تفكر بدلاً عنك ضمرت مهاراتك — استخدمها لتتعلم أسرع، لا لتتوقف عن التعلم.</a:t>
+              <a:t>نماذج تتوقع الطقس بدقة أعلى، وطائرات مسيّرة تراقب المحاصيل وتحدد احتياجها للري.</a:t>
             </a:r>
             <a:endParaRPr lang="ar-SA" sz="1300" dirty="0"/>
           </a:p>
@@ -3851,7 +3828,7 @@
                 <a:ea typeface="Arial" pitchFamily="34" charset="-122"/>
                 <a:cs typeface="Arial" pitchFamily="34" charset="-120"/>
               </a:rPr>
-              <a:t>التقنية محايدة — طريقة استخدامنا لها هي التي تصنع الفرق.</a:t>
+              <a:t>من إشارة المرور إلى مكيف غرفتك — البنية التحتية من حولنا تصبح أذكى عاماً بعد عام.</a:t>
             </a:r>
             <a:endParaRPr lang="ar-SA" sz="1400" dirty="0"/>
           </a:p>
@@ -3966,7 +3943,7 @@
                 <a:ea typeface="Arial" pitchFamily="34" charset="-122"/>
                 <a:cs typeface="Arial" pitchFamily="34" charset="-120"/>
               </a:rPr>
-              <a:t>مستقبلك مع الذكاء الاصطناعي</a:t>
+              <a:t>تحديات يجب أن نعيها</a:t>
             </a:r>
             <a:endParaRPr lang="ar-SA" sz="3100" dirty="0"/>
           </a:p>
@@ -3980,21 +3957,50 @@
         </p:nvSpPr>
         <p:spPr>
           <a:xfrm>
-            <a:off x="10911535" y="1645920"/>
-            <a:ext cx="731520" cy="731520"/>
+            <a:off x="6255868" y="1600200"/>
+            <a:ext cx="5440680" cy="1965960"/>
+          </a:xfrm>
+          <a:prstGeom prst="roundRect">
+            <a:avLst>
+              <a:gd name="adj" fmla="val 5581"/>
+            </a:avLst>
+          </a:prstGeom>
+          <a:solidFill>
+            <a:srgbClr val="F2F7F7"/>
+          </a:solidFill>
+          <a:ln/>
+          <a:effectLst>
+            <a:outerShdw sx="100000" sy="100000" kx="0" ky="0" algn="bl" rotWithShape="0" blurRad="88900" dist="25400" dir="5400000">
+              <a:srgbClr val="0E2A32">
+                <a:alpha val="16000"/>
+              </a:srgbClr>
+            </a:outerShdw>
+          </a:effectLst>
+        </p:spPr>
+      </p:sp>
+      <p:sp>
+        <p:nvSpPr>
+          <p:cNvPr id="6" name="Shape 3"/>
+          <p:cNvSpPr/>
+          <p:nvPr/>
+        </p:nvSpPr>
+        <p:spPr>
+          <a:xfrm>
+            <a:off x="10644988" y="2180844"/>
+            <a:ext cx="804672" cy="804672"/>
           </a:xfrm>
           <a:prstGeom prst="ellipse">
             <a:avLst/>
           </a:prstGeom>
           <a:solidFill>
-            <a:srgbClr val="028090"/>
+            <a:srgbClr val="0E2A32"/>
           </a:solidFill>
           <a:ln/>
         </p:spPr>
       </p:sp>
       <p:pic>
         <p:nvPicPr>
-          <p:cNvPr id="6" name="Image 1" descr="preencoded.png">    </p:cNvPr>
+          <p:cNvPr id="7" name="Image 1" descr="preencoded.png">    </p:cNvPr>
           <p:cNvPicPr>
             <a:picLocks noChangeAspect="1"/>
           </p:cNvPicPr>
@@ -4008,8 +4014,8 @@
         </p:blipFill>
         <p:spPr>
           <a:xfrm>
-            <a:off x="11101730" y="1836115"/>
-            <a:ext cx="351130" cy="351130"/>
+            <a:off x="10854202" y="2390059"/>
+            <a:ext cx="386243" cy="386243"/>
           </a:xfrm>
           <a:prstGeom prst="rect">
             <a:avLst/>
@@ -4018,14 +4024,14 @@
       </p:pic>
       <p:sp>
         <p:nvSpPr>
-          <p:cNvPr id="7" name="Text 3"/>
-          <p:cNvSpPr/>
-          <p:nvPr/>
-        </p:nvSpPr>
-        <p:spPr>
-          <a:xfrm>
-            <a:off x="4892040" y="1554480"/>
-            <a:ext cx="5745175" cy="384048"/>
+          <p:cNvPr id="8" name="Text 4"/>
+          <p:cNvSpPr/>
+          <p:nvPr/>
+        </p:nvSpPr>
+        <p:spPr>
+          <a:xfrm>
+            <a:off x="6530188" y="1874520"/>
+            <a:ext cx="3977640" cy="411480"/>
           </a:xfrm>
           <a:prstGeom prst="rect">
             <a:avLst/>
@@ -4041,7 +4047,7 @@
               <a:buNone/>
             </a:pPr>
             <a:r>
-              <a:rPr lang="ar-SA" altLang="en-US" sz="1600" b="1" dirty="0">
+              <a:rPr lang="ar-SA" altLang="en-US" sz="1700" b="1" dirty="0">
                 <a:solidFill>
                   <a:srgbClr val="0E2A32"/>
                 </a:solidFill>
@@ -4049,22 +4055,22 @@
                 <a:ea typeface="Arial" pitchFamily="34" charset="-122"/>
                 <a:cs typeface="Arial" pitchFamily="34" charset="-120"/>
               </a:rPr>
-              <a:t>أساسيات البرمجة والبيانات</a:t>
-            </a:r>
-            <a:endParaRPr lang="ar-SA" sz="1600" dirty="0"/>
-          </a:p>
-        </p:txBody>
-      </p:sp>
-      <p:sp>
-        <p:nvSpPr>
-          <p:cNvPr id="8" name="Text 4"/>
-          <p:cNvSpPr/>
-          <p:nvPr/>
-        </p:nvSpPr>
-        <p:spPr>
-          <a:xfrm>
-            <a:off x="4892040" y="1938528"/>
-            <a:ext cx="5745175" cy="603504"/>
+              <a:t>الخصوصية</a:t>
+            </a:r>
+            <a:endParaRPr lang="ar-SA" sz="1700" dirty="0"/>
+          </a:p>
+        </p:txBody>
+      </p:sp>
+      <p:sp>
+        <p:nvSpPr>
+          <p:cNvPr id="9" name="Text 5"/>
+          <p:cNvSpPr/>
+          <p:nvPr/>
+        </p:nvSpPr>
+        <p:spPr>
+          <a:xfrm>
+            <a:off x="6530188" y="2331720"/>
+            <a:ext cx="3977640" cy="1051560"/>
           </a:xfrm>
           <a:prstGeom prst="rect">
             <a:avLst/>
@@ -4078,12 +4084,12 @@
           <a:p>
             <a:pPr rtl="1" algn="r" indent="0" marL="0">
               <a:lnSpc>
-                <a:spcPct val="112000"/>
+                <a:spcPct val="120000"/>
               </a:lnSpc>
               <a:buNone/>
             </a:pPr>
             <a:r>
-              <a:rPr lang="ar-SA" altLang="en-US" sz="1250" dirty="0">
+              <a:rPr lang="ar-SA" altLang="en-US" sz="1300" dirty="0">
                 <a:solidFill>
                   <a:srgbClr val="587076"/>
                 </a:solidFill>
@@ -4091,35 +4097,64 @@
                 <a:ea typeface="Arial" pitchFamily="34" charset="-122"/>
                 <a:cs typeface="Arial" pitchFamily="34" charset="-120"/>
               </a:rPr>
-              <a:t>لغة Python مدخل ممتاز لفهم كيف تعمل هذه الأنظمة من الداخل.</a:t>
-            </a:r>
-            <a:endParaRPr lang="ar-SA" sz="1250" dirty="0"/>
-          </a:p>
-        </p:txBody>
-      </p:sp>
-      <p:sp>
-        <p:nvSpPr>
-          <p:cNvPr id="9" name="Shape 5"/>
-          <p:cNvSpPr/>
-          <p:nvPr/>
-        </p:nvSpPr>
-        <p:spPr>
-          <a:xfrm>
-            <a:off x="10911535" y="2798064"/>
-            <a:ext cx="731520" cy="731520"/>
+              <a:t>بياناتك هي الوقود: كل نقرة ومشاهدة تُجمع وتُحلل. اقرأ الصلاحيات وفكر فيما تشاركه.</a:t>
+            </a:r>
+            <a:endParaRPr lang="ar-SA" sz="1300" dirty="0"/>
+          </a:p>
+        </p:txBody>
+      </p:sp>
+      <p:sp>
+        <p:nvSpPr>
+          <p:cNvPr id="10" name="Shape 6"/>
+          <p:cNvSpPr/>
+          <p:nvPr/>
+        </p:nvSpPr>
+        <p:spPr>
+          <a:xfrm>
+            <a:off x="495148" y="1600200"/>
+            <a:ext cx="5440680" cy="1965960"/>
+          </a:xfrm>
+          <a:prstGeom prst="roundRect">
+            <a:avLst>
+              <a:gd name="adj" fmla="val 5581"/>
+            </a:avLst>
+          </a:prstGeom>
+          <a:solidFill>
+            <a:srgbClr val="F2F7F7"/>
+          </a:solidFill>
+          <a:ln/>
+          <a:effectLst>
+            <a:outerShdw sx="100000" sy="100000" kx="0" ky="0" algn="bl" rotWithShape="0" blurRad="88900" dist="25400" dir="5400000">
+              <a:srgbClr val="0E2A32">
+                <a:alpha val="16000"/>
+              </a:srgbClr>
+            </a:outerShdw>
+          </a:effectLst>
+        </p:spPr>
+      </p:sp>
+      <p:sp>
+        <p:nvSpPr>
+          <p:cNvPr id="11" name="Shape 7"/>
+          <p:cNvSpPr/>
+          <p:nvPr/>
+        </p:nvSpPr>
+        <p:spPr>
+          <a:xfrm>
+            <a:off x="4884268" y="2180844"/>
+            <a:ext cx="804672" cy="804672"/>
           </a:xfrm>
           <a:prstGeom prst="ellipse">
             <a:avLst/>
           </a:prstGeom>
           <a:solidFill>
-            <a:srgbClr val="00A896"/>
+            <a:srgbClr val="0E2A32"/>
           </a:solidFill>
           <a:ln/>
         </p:spPr>
       </p:sp>
       <p:pic>
         <p:nvPicPr>
-          <p:cNvPr id="10" name="Image 2" descr="preencoded.png">    </p:cNvPr>
+          <p:cNvPr id="12" name="Image 2" descr="preencoded.png">    </p:cNvPr>
           <p:cNvPicPr>
             <a:picLocks noChangeAspect="1"/>
           </p:cNvPicPr>
@@ -4133,8 +4168,8 @@
         </p:blipFill>
         <p:spPr>
           <a:xfrm>
-            <a:off x="11101730" y="2988259"/>
-            <a:ext cx="351130" cy="351130"/>
+            <a:off x="5093482" y="2390059"/>
+            <a:ext cx="386243" cy="386243"/>
           </a:xfrm>
           <a:prstGeom prst="rect">
             <a:avLst/>
@@ -4143,14 +4178,14 @@
       </p:pic>
       <p:sp>
         <p:nvSpPr>
-          <p:cNvPr id="11" name="Text 6"/>
-          <p:cNvSpPr/>
-          <p:nvPr/>
-        </p:nvSpPr>
-        <p:spPr>
-          <a:xfrm>
-            <a:off x="4892040" y="2706624"/>
-            <a:ext cx="5745175" cy="384048"/>
+          <p:cNvPr id="13" name="Text 8"/>
+          <p:cNvSpPr/>
+          <p:nvPr/>
+        </p:nvSpPr>
+        <p:spPr>
+          <a:xfrm>
+            <a:off x="769468" y="1874520"/>
+            <a:ext cx="3977640" cy="411480"/>
           </a:xfrm>
           <a:prstGeom prst="rect">
             <a:avLst/>
@@ -4166,7 +4201,7 @@
               <a:buNone/>
             </a:pPr>
             <a:r>
-              <a:rPr lang="ar-SA" altLang="en-US" sz="1600" b="1" dirty="0">
+              <a:rPr lang="ar-SA" altLang="en-US" sz="1700" b="1" dirty="0">
                 <a:solidFill>
                   <a:srgbClr val="0E2A32"/>
                 </a:solidFill>
@@ -4174,22 +4209,22 @@
                 <a:ea typeface="Arial" pitchFamily="34" charset="-122"/>
                 <a:cs typeface="Arial" pitchFamily="34" charset="-120"/>
               </a:rPr>
-              <a:t>التفكير النقدي</a:t>
-            </a:r>
-            <a:endParaRPr lang="ar-SA" sz="1600" dirty="0"/>
-          </a:p>
-        </p:txBody>
-      </p:sp>
-      <p:sp>
-        <p:nvSpPr>
-          <p:cNvPr id="12" name="Text 7"/>
-          <p:cNvSpPr/>
-          <p:nvPr/>
-        </p:nvSpPr>
-        <p:spPr>
-          <a:xfrm>
-            <a:off x="4892040" y="3090672"/>
-            <a:ext cx="5745175" cy="603504"/>
+              <a:t>التحيز</a:t>
+            </a:r>
+            <a:endParaRPr lang="ar-SA" sz="1700" dirty="0"/>
+          </a:p>
+        </p:txBody>
+      </p:sp>
+      <p:sp>
+        <p:nvSpPr>
+          <p:cNvPr id="14" name="Text 9"/>
+          <p:cNvSpPr/>
+          <p:nvPr/>
+        </p:nvSpPr>
+        <p:spPr>
+          <a:xfrm>
+            <a:off x="769468" y="2331720"/>
+            <a:ext cx="3977640" cy="1051560"/>
           </a:xfrm>
           <a:prstGeom prst="rect">
             <a:avLst/>
@@ -4203,12 +4238,12 @@
           <a:p>
             <a:pPr rtl="1" algn="r" indent="0" marL="0">
               <a:lnSpc>
-                <a:spcPct val="112000"/>
+                <a:spcPct val="120000"/>
               </a:lnSpc>
               <a:buNone/>
             </a:pPr>
             <a:r>
-              <a:rPr lang="ar-SA" altLang="en-US" sz="1250" dirty="0">
+              <a:rPr lang="ar-SA" altLang="en-US" sz="1300" dirty="0">
                 <a:solidFill>
                   <a:srgbClr val="587076"/>
                 </a:solidFill>
@@ -4216,35 +4251,64 @@
                 <a:ea typeface="Arial" pitchFamily="34" charset="-122"/>
                 <a:cs typeface="Arial" pitchFamily="34" charset="-120"/>
               </a:rPr>
-              <a:t>أهم مهارة في عصر المعلومات: اسأل، قارن، وتحقق قبل التصديق.</a:t>
-            </a:r>
-            <a:endParaRPr lang="ar-SA" sz="1250" dirty="0"/>
-          </a:p>
-        </p:txBody>
-      </p:sp>
-      <p:sp>
-        <p:nvSpPr>
-          <p:cNvPr id="13" name="Shape 8"/>
-          <p:cNvSpPr/>
-          <p:nvPr/>
-        </p:nvSpPr>
-        <p:spPr>
-          <a:xfrm>
-            <a:off x="10911535" y="3950208"/>
-            <a:ext cx="731520" cy="731520"/>
+              <a:t>النموذج يتعلم من بيانات بشرية قد تحمل تحيزات — فيكررها في قراراته دون قصد.</a:t>
+            </a:r>
+            <a:endParaRPr lang="ar-SA" sz="1300" dirty="0"/>
+          </a:p>
+        </p:txBody>
+      </p:sp>
+      <p:sp>
+        <p:nvSpPr>
+          <p:cNvPr id="15" name="Shape 10"/>
+          <p:cNvSpPr/>
+          <p:nvPr/>
+        </p:nvSpPr>
+        <p:spPr>
+          <a:xfrm>
+            <a:off x="6255868" y="3886200"/>
+            <a:ext cx="5440680" cy="1965960"/>
+          </a:xfrm>
+          <a:prstGeom prst="roundRect">
+            <a:avLst>
+              <a:gd name="adj" fmla="val 5581"/>
+            </a:avLst>
+          </a:prstGeom>
+          <a:solidFill>
+            <a:srgbClr val="F2F7F7"/>
+          </a:solidFill>
+          <a:ln/>
+          <a:effectLst>
+            <a:outerShdw sx="100000" sy="100000" kx="0" ky="0" algn="bl" rotWithShape="0" blurRad="88900" dist="25400" dir="5400000">
+              <a:srgbClr val="0E2A32">
+                <a:alpha val="16000"/>
+              </a:srgbClr>
+            </a:outerShdw>
+          </a:effectLst>
+        </p:spPr>
+      </p:sp>
+      <p:sp>
+        <p:nvSpPr>
+          <p:cNvPr id="16" name="Shape 11"/>
+          <p:cNvSpPr/>
+          <p:nvPr/>
+        </p:nvSpPr>
+        <p:spPr>
+          <a:xfrm>
+            <a:off x="10644988" y="4466844"/>
+            <a:ext cx="804672" cy="804672"/>
           </a:xfrm>
           <a:prstGeom prst="ellipse">
             <a:avLst/>
           </a:prstGeom>
           <a:solidFill>
-            <a:srgbClr val="028090"/>
+            <a:srgbClr val="0E2A32"/>
           </a:solidFill>
           <a:ln/>
         </p:spPr>
       </p:sp>
       <p:pic>
         <p:nvPicPr>
-          <p:cNvPr id="14" name="Image 3" descr="preencoded.png">    </p:cNvPr>
+          <p:cNvPr id="17" name="Image 3" descr="preencoded.png">    </p:cNvPr>
           <p:cNvPicPr>
             <a:picLocks noChangeAspect="1"/>
           </p:cNvPicPr>
@@ -4258,8 +4322,8 @@
         </p:blipFill>
         <p:spPr>
           <a:xfrm>
-            <a:off x="11101730" y="4140403"/>
-            <a:ext cx="351130" cy="351130"/>
+            <a:off x="10854202" y="4676059"/>
+            <a:ext cx="386243" cy="386243"/>
           </a:xfrm>
           <a:prstGeom prst="rect">
             <a:avLst/>
@@ -4268,14 +4332,14 @@
       </p:pic>
       <p:sp>
         <p:nvSpPr>
-          <p:cNvPr id="15" name="Text 9"/>
-          <p:cNvSpPr/>
-          <p:nvPr/>
-        </p:nvSpPr>
-        <p:spPr>
-          <a:xfrm>
-            <a:off x="4892040" y="3858768"/>
-            <a:ext cx="5745175" cy="384048"/>
+          <p:cNvPr id="18" name="Text 12"/>
+          <p:cNvSpPr/>
+          <p:nvPr/>
+        </p:nvSpPr>
+        <p:spPr>
+          <a:xfrm>
+            <a:off x="6530188" y="4160520"/>
+            <a:ext cx="3977640" cy="411480"/>
           </a:xfrm>
           <a:prstGeom prst="rect">
             <a:avLst/>
@@ -4291,7 +4355,7 @@
               <a:buNone/>
             </a:pPr>
             <a:r>
-              <a:rPr lang="ar-SA" altLang="en-US" sz="1600" b="1" dirty="0">
+              <a:rPr lang="ar-SA" altLang="en-US" sz="1700" b="1" dirty="0">
                 <a:solidFill>
                   <a:srgbClr val="0E2A32"/>
                 </a:solidFill>
@@ -4299,22 +4363,22 @@
                 <a:ea typeface="Arial" pitchFamily="34" charset="-122"/>
                 <a:cs typeface="Arial" pitchFamily="34" charset="-120"/>
               </a:rPr>
-              <a:t>التواصل مع النماذج</a:t>
-            </a:r>
-            <a:endParaRPr lang="ar-SA" sz="1600" dirty="0"/>
-          </a:p>
-        </p:txBody>
-      </p:sp>
-      <p:sp>
-        <p:nvSpPr>
-          <p:cNvPr id="16" name="Text 10"/>
-          <p:cNvSpPr/>
-          <p:nvPr/>
-        </p:nvSpPr>
-        <p:spPr>
-          <a:xfrm>
-            <a:off x="4892040" y="4242816"/>
-            <a:ext cx="5745175" cy="603504"/>
+              <a:t>المعلومات المضللة</a:t>
+            </a:r>
+            <a:endParaRPr lang="ar-SA" sz="1700" dirty="0"/>
+          </a:p>
+        </p:txBody>
+      </p:sp>
+      <p:sp>
+        <p:nvSpPr>
+          <p:cNvPr id="19" name="Text 13"/>
+          <p:cNvSpPr/>
+          <p:nvPr/>
+        </p:nvSpPr>
+        <p:spPr>
+          <a:xfrm>
+            <a:off x="6530188" y="4617720"/>
+            <a:ext cx="3977640" cy="1051560"/>
           </a:xfrm>
           <a:prstGeom prst="rect">
             <a:avLst/>
@@ -4328,12 +4392,12 @@
           <a:p>
             <a:pPr rtl="1" algn="r" indent="0" marL="0">
               <a:lnSpc>
-                <a:spcPct val="112000"/>
+                <a:spcPct val="120000"/>
               </a:lnSpc>
               <a:buNone/>
             </a:pPr>
             <a:r>
-              <a:rPr lang="ar-SA" altLang="en-US" sz="1250" dirty="0">
+              <a:rPr lang="ar-SA" altLang="en-US" sz="1300" dirty="0">
                 <a:solidFill>
                   <a:srgbClr val="587076"/>
                 </a:solidFill>
@@ -4341,35 +4405,64 @@
                 <a:ea typeface="Arial" pitchFamily="34" charset="-122"/>
                 <a:cs typeface="Arial" pitchFamily="34" charset="-120"/>
               </a:rPr>
-              <a:t>صياغة الأوامر بوضوح (Prompting) مهارة جديدة يحتاجها كل تخصص.</a:t>
-            </a:r>
-            <a:endParaRPr lang="ar-SA" sz="1250" dirty="0"/>
-          </a:p>
-        </p:txBody>
-      </p:sp>
-      <p:sp>
-        <p:nvSpPr>
-          <p:cNvPr id="17" name="Shape 11"/>
-          <p:cNvSpPr/>
-          <p:nvPr/>
-        </p:nvSpPr>
-        <p:spPr>
-          <a:xfrm>
-            <a:off x="10911535" y="5102352"/>
-            <a:ext cx="731520" cy="731520"/>
+              <a:t>التزييف العميق (Deepfake) ينتج صوراً وفيديوهات مزيفة يصعب تمييزها — تحقق قبل أن تصدق أو تشارك.</a:t>
+            </a:r>
+            <a:endParaRPr lang="ar-SA" sz="1300" dirty="0"/>
+          </a:p>
+        </p:txBody>
+      </p:sp>
+      <p:sp>
+        <p:nvSpPr>
+          <p:cNvPr id="20" name="Shape 14"/>
+          <p:cNvSpPr/>
+          <p:nvPr/>
+        </p:nvSpPr>
+        <p:spPr>
+          <a:xfrm>
+            <a:off x="495148" y="3886200"/>
+            <a:ext cx="5440680" cy="1965960"/>
+          </a:xfrm>
+          <a:prstGeom prst="roundRect">
+            <a:avLst>
+              <a:gd name="adj" fmla="val 5581"/>
+            </a:avLst>
+          </a:prstGeom>
+          <a:solidFill>
+            <a:srgbClr val="F2F7F7"/>
+          </a:solidFill>
+          <a:ln/>
+          <a:effectLst>
+            <a:outerShdw sx="100000" sy="100000" kx="0" ky="0" algn="bl" rotWithShape="0" blurRad="88900" dist="25400" dir="5400000">
+              <a:srgbClr val="0E2A32">
+                <a:alpha val="16000"/>
+              </a:srgbClr>
+            </a:outerShdw>
+          </a:effectLst>
+        </p:spPr>
+      </p:sp>
+      <p:sp>
+        <p:nvSpPr>
+          <p:cNvPr id="21" name="Shape 15"/>
+          <p:cNvSpPr/>
+          <p:nvPr/>
+        </p:nvSpPr>
+        <p:spPr>
+          <a:xfrm>
+            <a:off x="4884268" y="4466844"/>
+            <a:ext cx="804672" cy="804672"/>
           </a:xfrm>
           <a:prstGeom prst="ellipse">
             <a:avLst/>
           </a:prstGeom>
           <a:solidFill>
-            <a:srgbClr val="00A896"/>
+            <a:srgbClr val="0E2A32"/>
           </a:solidFill>
           <a:ln/>
         </p:spPr>
       </p:sp>
       <p:pic>
         <p:nvPicPr>
-          <p:cNvPr id="18" name="Image 4" descr="preencoded.png">    </p:cNvPr>
+          <p:cNvPr id="22" name="Image 4" descr="preencoded.png">    </p:cNvPr>
           <p:cNvPicPr>
             <a:picLocks noChangeAspect="1"/>
           </p:cNvPicPr>
@@ -4383,8 +4476,8 @@
         </p:blipFill>
         <p:spPr>
           <a:xfrm>
-            <a:off x="11101730" y="5292547"/>
-            <a:ext cx="351130" cy="351130"/>
+            <a:off x="5093482" y="4676059"/>
+            <a:ext cx="386243" cy="386243"/>
           </a:xfrm>
           <a:prstGeom prst="rect">
             <a:avLst/>
@@ -4393,14 +4486,14 @@
       </p:pic>
       <p:sp>
         <p:nvSpPr>
-          <p:cNvPr id="19" name="Text 12"/>
-          <p:cNvSpPr/>
-          <p:nvPr/>
-        </p:nvSpPr>
-        <p:spPr>
-          <a:xfrm>
-            <a:off x="4892040" y="5010912"/>
-            <a:ext cx="5745175" cy="384048"/>
+          <p:cNvPr id="23" name="Text 16"/>
+          <p:cNvSpPr/>
+          <p:nvPr/>
+        </p:nvSpPr>
+        <p:spPr>
+          <a:xfrm>
+            <a:off x="769468" y="4160520"/>
+            <a:ext cx="3977640" cy="411480"/>
           </a:xfrm>
           <a:prstGeom prst="rect">
             <a:avLst/>
@@ -4416,7 +4509,7 @@
               <a:buNone/>
             </a:pPr>
             <a:r>
-              <a:rPr lang="ar-SA" altLang="en-US" sz="1600" b="1" dirty="0">
+              <a:rPr lang="ar-SA" altLang="en-US" sz="1700" b="1" dirty="0">
                 <a:solidFill>
                   <a:srgbClr val="0E2A32"/>
                 </a:solidFill>
@@ -4424,22 +4517,22 @@
                 <a:ea typeface="Arial" pitchFamily="34" charset="-122"/>
                 <a:cs typeface="Arial" pitchFamily="34" charset="-120"/>
               </a:rPr>
-              <a:t>التعلم المستمر</a:t>
-            </a:r>
-            <a:endParaRPr lang="ar-SA" sz="1600" dirty="0"/>
-          </a:p>
-        </p:txBody>
-      </p:sp>
-      <p:sp>
-        <p:nvSpPr>
-          <p:cNvPr id="20" name="Text 13"/>
-          <p:cNvSpPr/>
-          <p:nvPr/>
-        </p:nvSpPr>
-        <p:spPr>
-          <a:xfrm>
-            <a:off x="4892040" y="5394960"/>
-            <a:ext cx="5745175" cy="603504"/>
+              <a:t>الاعتماد الزائد</a:t>
+            </a:r>
+            <a:endParaRPr lang="ar-SA" sz="1700" dirty="0"/>
+          </a:p>
+        </p:txBody>
+      </p:sp>
+      <p:sp>
+        <p:nvSpPr>
+          <p:cNvPr id="24" name="Text 17"/>
+          <p:cNvSpPr/>
+          <p:nvPr/>
+        </p:nvSpPr>
+        <p:spPr>
+          <a:xfrm>
+            <a:off x="769468" y="4617720"/>
+            <a:ext cx="3977640" cy="1051560"/>
           </a:xfrm>
           <a:prstGeom prst="rect">
             <a:avLst/>
@@ -4453,12 +4546,12 @@
           <a:p>
             <a:pPr rtl="1" algn="r" indent="0" marL="0">
               <a:lnSpc>
-                <a:spcPct val="112000"/>
+                <a:spcPct val="120000"/>
               </a:lnSpc>
               <a:buNone/>
             </a:pPr>
             <a:r>
-              <a:rPr lang="ar-SA" altLang="en-US" sz="1250" dirty="0">
+              <a:rPr lang="ar-SA" altLang="en-US" sz="1300" dirty="0">
                 <a:solidFill>
                   <a:srgbClr val="587076"/>
                 </a:solidFill>
@@ -4466,95 +4559,22 @@
                 <a:ea typeface="Arial" pitchFamily="34" charset="-122"/>
                 <a:cs typeface="Arial" pitchFamily="34" charset="-120"/>
               </a:rPr>
-              <a:t>التقنية تتغير كل عام — من يستمر في التعلم يبقى في المقدمة.</a:t>
-            </a:r>
-            <a:endParaRPr lang="ar-SA" sz="1250" dirty="0"/>
-          </a:p>
-        </p:txBody>
-      </p:sp>
-      <p:sp>
-        <p:nvSpPr>
-          <p:cNvPr id="21" name="Shape 14"/>
-          <p:cNvSpPr/>
-          <p:nvPr/>
-        </p:nvSpPr>
-        <p:spPr>
-          <a:xfrm>
-            <a:off x="548640" y="1554480"/>
-            <a:ext cx="3977640" cy="4480560"/>
-          </a:xfrm>
-          <a:prstGeom prst="roundRect">
-            <a:avLst>
-              <a:gd name="adj" fmla="val 3218"/>
-            </a:avLst>
-          </a:prstGeom>
-          <a:solidFill>
-            <a:srgbClr val="0E2A32"/>
-          </a:solidFill>
-          <a:ln/>
-          <a:effectLst>
-            <a:outerShdw sx="100000" sy="100000" kx="0" ky="0" algn="bl" rotWithShape="0" blurRad="88900" dist="25400" dir="5400000">
-              <a:srgbClr val="0E2A32">
-                <a:alpha val="16000"/>
-              </a:srgbClr>
-            </a:outerShdw>
-          </a:effectLst>
-        </p:spPr>
-      </p:sp>
-      <p:sp>
-        <p:nvSpPr>
-          <p:cNvPr id="22" name="Shape 15"/>
-          <p:cNvSpPr/>
-          <p:nvPr/>
-        </p:nvSpPr>
-        <p:spPr>
-          <a:xfrm>
-            <a:off x="2153412" y="1828800"/>
-            <a:ext cx="768096" cy="768096"/>
-          </a:xfrm>
-          <a:prstGeom prst="ellipse">
-            <a:avLst/>
-          </a:prstGeom>
-          <a:solidFill>
-            <a:srgbClr val="02C39A"/>
-          </a:solidFill>
-          <a:ln/>
-        </p:spPr>
-      </p:sp>
-      <p:pic>
-        <p:nvPicPr>
-          <p:cNvPr id="23" name="Image 5" descr="preencoded.png">    </p:cNvPr>
-          <p:cNvPicPr>
-            <a:picLocks noChangeAspect="1"/>
-          </p:cNvPicPr>
-          <p:nvPr/>
-        </p:nvPicPr>
-        <p:blipFill>
-          <a:blip r:embed="rId6"/>
-          <a:stretch>
-            <a:fillRect/>
-          </a:stretch>
-        </p:blipFill>
-        <p:spPr>
-          <a:xfrm>
-            <a:off x="2353117" y="2028505"/>
-            <a:ext cx="368686" cy="368686"/>
-          </a:xfrm>
-          <a:prstGeom prst="rect">
-            <a:avLst/>
-          </a:prstGeom>
-        </p:spPr>
-      </p:pic>
-      <p:sp>
-        <p:nvSpPr>
-          <p:cNvPr id="24" name="Text 16"/>
-          <p:cNvSpPr/>
-          <p:nvPr/>
-        </p:nvSpPr>
-        <p:spPr>
-          <a:xfrm>
-            <a:off x="777240" y="2697480"/>
-            <a:ext cx="3520440" cy="457200"/>
+              <a:t>إن تركت الأداة تفكر بدلاً عنك ضمرت مهاراتك — استخدمها لتتعلم أسرع، لا لتتوقف عن التعلم.</a:t>
+            </a:r>
+            <a:endParaRPr lang="ar-SA" sz="1300" dirty="0"/>
+          </a:p>
+        </p:txBody>
+      </p:sp>
+      <p:sp>
+        <p:nvSpPr>
+          <p:cNvPr id="25" name="Text 18"/>
+          <p:cNvSpPr/>
+          <p:nvPr/>
+        </p:nvSpPr>
+        <p:spPr>
+          <a:xfrm>
+            <a:off x="548640" y="6172200"/>
+            <a:ext cx="11094415" cy="411480"/>
           </a:xfrm>
           <a:prstGeom prst="rect">
             <a:avLst/>
@@ -4570,327 +4590,17 @@
               <a:buNone/>
             </a:pPr>
             <a:r>
-              <a:rPr lang="ar-SA" altLang="en-US" sz="1650" b="1" dirty="0">
-                <a:solidFill>
-                  <a:srgbClr val="FFFFFF"/>
-                </a:solidFill>
-                <a:latin typeface="Arial" pitchFamily="34" charset="0"/>
-                <a:ea typeface="Arial" pitchFamily="34" charset="-122"/>
-                <a:cs typeface="Arial" pitchFamily="34" charset="-120"/>
-              </a:rPr>
-              <a:t>وظائف يفتحها هذا المجال</a:t>
-            </a:r>
-            <a:endParaRPr lang="ar-SA" sz="1650" dirty="0"/>
-          </a:p>
-        </p:txBody>
-      </p:sp>
-      <p:sp>
-        <p:nvSpPr>
-          <p:cNvPr id="25" name="Shape 17"/>
-          <p:cNvSpPr/>
-          <p:nvPr/>
-        </p:nvSpPr>
-        <p:spPr>
-          <a:xfrm>
-            <a:off x="4050792" y="3374136"/>
-            <a:ext cx="128016" cy="128016"/>
-          </a:xfrm>
-          <a:prstGeom prst="ellipse">
-            <a:avLst/>
-          </a:prstGeom>
-          <a:solidFill>
-            <a:srgbClr val="02C39A"/>
-          </a:solidFill>
-          <a:ln/>
-        </p:spPr>
-      </p:sp>
-      <p:sp>
-        <p:nvSpPr>
-          <p:cNvPr id="26" name="Text 18"/>
-          <p:cNvSpPr/>
-          <p:nvPr/>
-        </p:nvSpPr>
-        <p:spPr>
-          <a:xfrm>
-            <a:off x="777240" y="3291840"/>
-            <a:ext cx="3108960" cy="512064"/>
-          </a:xfrm>
-          <a:prstGeom prst="rect">
-            <a:avLst/>
-          </a:prstGeom>
-          <a:noFill/>
-          <a:ln/>
-        </p:spPr>
-        <p:txBody>
-          <a:bodyPr wrap="square" rtlCol="0" anchor="t"/>
-          <a:lstStyle/>
-          <a:p>
-            <a:pPr rtl="1" algn="r" indent="0" marL="0">
-              <a:lnSpc>
-                <a:spcPct val="105000"/>
-              </a:lnSpc>
-              <a:buNone/>
-            </a:pPr>
-            <a:r>
-              <a:rPr lang="ar-SA" altLang="en-US" sz="1250" dirty="0">
-                <a:solidFill>
-                  <a:srgbClr val="CDE9E5"/>
-                </a:solidFill>
-                <a:latin typeface="Arial" pitchFamily="34" charset="0"/>
-                <a:ea typeface="Arial" pitchFamily="34" charset="-122"/>
-                <a:cs typeface="Arial" pitchFamily="34" charset="-120"/>
-              </a:rPr>
-              <a:t>مهندس تعلم آلة</a:t>
-            </a:r>
-            <a:endParaRPr lang="ar-SA" sz="1250" dirty="0"/>
-          </a:p>
-        </p:txBody>
-      </p:sp>
-      <p:sp>
-        <p:nvSpPr>
-          <p:cNvPr id="27" name="Shape 19"/>
-          <p:cNvSpPr/>
-          <p:nvPr/>
-        </p:nvSpPr>
-        <p:spPr>
-          <a:xfrm>
-            <a:off x="4050792" y="3904488"/>
-            <a:ext cx="128016" cy="128016"/>
-          </a:xfrm>
-          <a:prstGeom prst="ellipse">
-            <a:avLst/>
-          </a:prstGeom>
-          <a:solidFill>
-            <a:srgbClr val="02C39A"/>
-          </a:solidFill>
-          <a:ln/>
-        </p:spPr>
-      </p:sp>
-      <p:sp>
-        <p:nvSpPr>
-          <p:cNvPr id="28" name="Text 20"/>
-          <p:cNvSpPr/>
-          <p:nvPr/>
-        </p:nvSpPr>
-        <p:spPr>
-          <a:xfrm>
-            <a:off x="777240" y="3822192"/>
-            <a:ext cx="3108960" cy="512064"/>
-          </a:xfrm>
-          <a:prstGeom prst="rect">
-            <a:avLst/>
-          </a:prstGeom>
-          <a:noFill/>
-          <a:ln/>
-        </p:spPr>
-        <p:txBody>
-          <a:bodyPr wrap="square" rtlCol="0" anchor="t"/>
-          <a:lstStyle/>
-          <a:p>
-            <a:pPr rtl="1" algn="r" indent="0" marL="0">
-              <a:lnSpc>
-                <a:spcPct val="105000"/>
-              </a:lnSpc>
-              <a:buNone/>
-            </a:pPr>
-            <a:r>
-              <a:rPr lang="ar-SA" altLang="en-US" sz="1250" dirty="0">
-                <a:solidFill>
-                  <a:srgbClr val="CDE9E5"/>
-                </a:solidFill>
-                <a:latin typeface="Arial" pitchFamily="34" charset="0"/>
-                <a:ea typeface="Arial" pitchFamily="34" charset="-122"/>
-                <a:cs typeface="Arial" pitchFamily="34" charset="-120"/>
-              </a:rPr>
-              <a:t>محلل وعالم بيانات</a:t>
-            </a:r>
-            <a:endParaRPr lang="ar-SA" sz="1250" dirty="0"/>
-          </a:p>
-        </p:txBody>
-      </p:sp>
-      <p:sp>
-        <p:nvSpPr>
-          <p:cNvPr id="29" name="Shape 21"/>
-          <p:cNvSpPr/>
-          <p:nvPr/>
-        </p:nvSpPr>
-        <p:spPr>
-          <a:xfrm>
-            <a:off x="4050792" y="4434840"/>
-            <a:ext cx="128016" cy="128016"/>
-          </a:xfrm>
-          <a:prstGeom prst="ellipse">
-            <a:avLst/>
-          </a:prstGeom>
-          <a:solidFill>
-            <a:srgbClr val="02C39A"/>
-          </a:solidFill>
-          <a:ln/>
-        </p:spPr>
-      </p:sp>
-      <p:sp>
-        <p:nvSpPr>
-          <p:cNvPr id="30" name="Text 22"/>
-          <p:cNvSpPr/>
-          <p:nvPr/>
-        </p:nvSpPr>
-        <p:spPr>
-          <a:xfrm>
-            <a:off x="777240" y="4352544"/>
-            <a:ext cx="3108960" cy="512064"/>
-          </a:xfrm>
-          <a:prstGeom prst="rect">
-            <a:avLst/>
-          </a:prstGeom>
-          <a:noFill/>
-          <a:ln/>
-        </p:spPr>
-        <p:txBody>
-          <a:bodyPr wrap="square" rtlCol="0" anchor="t"/>
-          <a:lstStyle/>
-          <a:p>
-            <a:pPr rtl="1" algn="r" indent="0" marL="0">
-              <a:lnSpc>
-                <a:spcPct val="105000"/>
-              </a:lnSpc>
-              <a:buNone/>
-            </a:pPr>
-            <a:r>
-              <a:rPr lang="ar-SA" altLang="en-US" sz="1250" dirty="0">
-                <a:solidFill>
-                  <a:srgbClr val="CDE9E5"/>
-                </a:solidFill>
-                <a:latin typeface="Arial" pitchFamily="34" charset="0"/>
-                <a:ea typeface="Arial" pitchFamily="34" charset="-122"/>
-                <a:cs typeface="Arial" pitchFamily="34" charset="-120"/>
-              </a:rPr>
-              <a:t>مختص أخلاقيات الذكاء الاصطناعي</a:t>
-            </a:r>
-            <a:endParaRPr lang="ar-SA" sz="1250" dirty="0"/>
-          </a:p>
-        </p:txBody>
-      </p:sp>
-      <p:sp>
-        <p:nvSpPr>
-          <p:cNvPr id="31" name="Shape 23"/>
-          <p:cNvSpPr/>
-          <p:nvPr/>
-        </p:nvSpPr>
-        <p:spPr>
-          <a:xfrm>
-            <a:off x="4050792" y="4965192"/>
-            <a:ext cx="128016" cy="128016"/>
-          </a:xfrm>
-          <a:prstGeom prst="ellipse">
-            <a:avLst/>
-          </a:prstGeom>
-          <a:solidFill>
-            <a:srgbClr val="02C39A"/>
-          </a:solidFill>
-          <a:ln/>
-        </p:spPr>
-      </p:sp>
-      <p:sp>
-        <p:nvSpPr>
-          <p:cNvPr id="32" name="Text 24"/>
-          <p:cNvSpPr/>
-          <p:nvPr/>
-        </p:nvSpPr>
-        <p:spPr>
-          <a:xfrm>
-            <a:off x="777240" y="4882896"/>
-            <a:ext cx="3108960" cy="512064"/>
-          </a:xfrm>
-          <a:prstGeom prst="rect">
-            <a:avLst/>
-          </a:prstGeom>
-          <a:noFill/>
-          <a:ln/>
-        </p:spPr>
-        <p:txBody>
-          <a:bodyPr wrap="square" rtlCol="0" anchor="t"/>
-          <a:lstStyle/>
-          <a:p>
-            <a:pPr rtl="1" algn="r" indent="0" marL="0">
-              <a:lnSpc>
-                <a:spcPct val="105000"/>
-              </a:lnSpc>
-              <a:buNone/>
-            </a:pPr>
-            <a:r>
-              <a:rPr lang="ar-SA" altLang="en-US" sz="1250" dirty="0">
-                <a:solidFill>
-                  <a:srgbClr val="CDE9E5"/>
-                </a:solidFill>
-                <a:latin typeface="Arial" pitchFamily="34" charset="0"/>
-                <a:ea typeface="Arial" pitchFamily="34" charset="-122"/>
-                <a:cs typeface="Arial" pitchFamily="34" charset="-120"/>
-              </a:rPr>
-              <a:t>مطور تطبيقات ذكية</a:t>
-            </a:r>
-            <a:endParaRPr lang="ar-SA" sz="1250" dirty="0"/>
-          </a:p>
-        </p:txBody>
-      </p:sp>
-      <p:sp>
-        <p:nvSpPr>
-          <p:cNvPr id="33" name="Shape 25"/>
-          <p:cNvSpPr/>
-          <p:nvPr/>
-        </p:nvSpPr>
-        <p:spPr>
-          <a:xfrm>
-            <a:off x="4050792" y="5495544"/>
-            <a:ext cx="128016" cy="128016"/>
-          </a:xfrm>
-          <a:prstGeom prst="ellipse">
-            <a:avLst/>
-          </a:prstGeom>
-          <a:solidFill>
-            <a:srgbClr val="02C39A"/>
-          </a:solidFill>
-          <a:ln/>
-        </p:spPr>
-      </p:sp>
-      <p:sp>
-        <p:nvSpPr>
-          <p:cNvPr id="34" name="Text 26"/>
-          <p:cNvSpPr/>
-          <p:nvPr/>
-        </p:nvSpPr>
-        <p:spPr>
-          <a:xfrm>
-            <a:off x="777240" y="5413248"/>
-            <a:ext cx="3108960" cy="512064"/>
-          </a:xfrm>
-          <a:prstGeom prst="rect">
-            <a:avLst/>
-          </a:prstGeom>
-          <a:noFill/>
-          <a:ln/>
-        </p:spPr>
-        <p:txBody>
-          <a:bodyPr wrap="square" rtlCol="0" anchor="t"/>
-          <a:lstStyle/>
-          <a:p>
-            <a:pPr rtl="1" algn="r" indent="0" marL="0">
-              <a:lnSpc>
-                <a:spcPct val="105000"/>
-              </a:lnSpc>
-              <a:buNone/>
-            </a:pPr>
-            <a:r>
-              <a:rPr lang="ar-SA" altLang="en-US" sz="1250" dirty="0">
-                <a:solidFill>
-                  <a:srgbClr val="CDE9E5"/>
-                </a:solidFill>
-                <a:latin typeface="Arial" pitchFamily="34" charset="0"/>
-                <a:ea typeface="Arial" pitchFamily="34" charset="-122"/>
-                <a:cs typeface="Arial" pitchFamily="34" charset="-120"/>
-              </a:rPr>
-              <a:t>وكل تخصص + ذكاء اصطناعي: طب، قانون، تعليم، إعلام…</a:t>
-            </a:r>
-            <a:endParaRPr lang="ar-SA" sz="1250" dirty="0"/>
+              <a:rPr lang="ar-SA" altLang="en-US" sz="1400" i="1" dirty="0">
+                <a:solidFill>
+                  <a:srgbClr val="028090"/>
+                </a:solidFill>
+                <a:latin typeface="Arial" pitchFamily="34" charset="0"/>
+                <a:ea typeface="Arial" pitchFamily="34" charset="-122"/>
+                <a:cs typeface="Arial" pitchFamily="34" charset="-120"/>
+              </a:rPr>
+              <a:t>التقنية محايدة — طريقة استخدامنا لها هي التي تصنع الفرق.</a:t>
+            </a:r>
+            <a:endParaRPr lang="ar-SA" sz="1400" dirty="0"/>
           </a:p>
         </p:txBody>
       </p:sp>
@@ -4905,6 +4615,1043 @@
 <file path=ppt/slides/slide13.xml><?xml version="1.0" encoding="utf-8"?>
 <p:sld xmlns:a="http://schemas.openxmlformats.org/drawingml/2006/main" xmlns:r="http://schemas.openxmlformats.org/officeDocument/2006/relationships" xmlns:p="http://schemas.openxmlformats.org/presentationml/2006/main">
   <p:cSld name="Slide 13">
+    <p:bg>
+      <p:bgPr>
+        <a:solidFill>
+          <a:srgbClr val="FFFFFF"/>
+        </a:solidFill>
+      </p:bgPr>
+    </p:bg>
+    <p:spTree>
+      <p:nvGrpSpPr>
+        <p:cNvPr id="1" name=""/>
+        <p:cNvGrpSpPr/>
+        <p:nvPr/>
+      </p:nvGrpSpPr>
+      <p:grpSpPr>
+        <a:xfrm>
+          <a:off x="0" y="0"/>
+          <a:ext cx="0" cy="0"/>
+          <a:chOff x="0" y="0"/>
+          <a:chExt cx="0" cy="0"/>
+        </a:xfrm>
+      </p:grpSpPr>
+      <p:sp>
+        <p:nvSpPr>
+          <p:cNvPr id="2" name="Shape 0"/>
+          <p:cNvSpPr/>
+          <p:nvPr/>
+        </p:nvSpPr>
+        <p:spPr>
+          <a:xfrm>
+            <a:off x="11076127" y="384048"/>
+            <a:ext cx="566928" cy="566928"/>
+          </a:xfrm>
+          <a:prstGeom prst="ellipse">
+            <a:avLst/>
+          </a:prstGeom>
+          <a:solidFill>
+            <a:srgbClr val="028090"/>
+          </a:solidFill>
+          <a:ln/>
+        </p:spPr>
+      </p:sp>
+      <p:pic>
+        <p:nvPicPr>
+          <p:cNvPr id="3" name="Image 0" descr="preencoded.png">    </p:cNvPr>
+          <p:cNvPicPr>
+            <a:picLocks noChangeAspect="1"/>
+          </p:cNvPicPr>
+          <p:nvPr/>
+        </p:nvPicPr>
+        <p:blipFill>
+          <a:blip r:embed="rId1"/>
+          <a:stretch>
+            <a:fillRect/>
+          </a:stretch>
+        </p:blipFill>
+        <p:spPr>
+          <a:xfrm>
+            <a:off x="11223528" y="531449"/>
+            <a:ext cx="272125" cy="272125"/>
+          </a:xfrm>
+          <a:prstGeom prst="rect">
+            <a:avLst/>
+          </a:prstGeom>
+        </p:spPr>
+      </p:pic>
+      <p:sp>
+        <p:nvSpPr>
+          <p:cNvPr id="4" name="Text 1"/>
+          <p:cNvSpPr/>
+          <p:nvPr/>
+        </p:nvSpPr>
+        <p:spPr>
+          <a:xfrm>
+            <a:off x="548640" y="310896"/>
+            <a:ext cx="10298887" cy="713232"/>
+          </a:xfrm>
+          <a:prstGeom prst="rect">
+            <a:avLst/>
+          </a:prstGeom>
+          <a:noFill/>
+          <a:ln/>
+        </p:spPr>
+        <p:txBody>
+          <a:bodyPr wrap="square" rtlCol="0" anchor="ctr"/>
+          <a:lstStyle/>
+          <a:p>
+            <a:pPr rtl="1" algn="r" indent="0" marL="0">
+              <a:buNone/>
+            </a:pPr>
+            <a:r>
+              <a:rPr lang="ar-SA" altLang="en-US" sz="3100" b="1" dirty="0">
+                <a:solidFill>
+                  <a:srgbClr val="0E2A32"/>
+                </a:solidFill>
+                <a:latin typeface="Arial" pitchFamily="34" charset="0"/>
+                <a:ea typeface="Arial" pitchFamily="34" charset="-122"/>
+                <a:cs typeface="Arial" pitchFamily="34" charset="-120"/>
+              </a:rPr>
+              <a:t>مستقبلك مع الذكاء الاصطناعي</a:t>
+            </a:r>
+            <a:endParaRPr lang="ar-SA" sz="3100" dirty="0"/>
+          </a:p>
+        </p:txBody>
+      </p:sp>
+      <p:sp>
+        <p:nvSpPr>
+          <p:cNvPr id="5" name="Shape 2"/>
+          <p:cNvSpPr/>
+          <p:nvPr/>
+        </p:nvSpPr>
+        <p:spPr>
+          <a:xfrm>
+            <a:off x="10911535" y="1645920"/>
+            <a:ext cx="731520" cy="731520"/>
+          </a:xfrm>
+          <a:prstGeom prst="ellipse">
+            <a:avLst/>
+          </a:prstGeom>
+          <a:solidFill>
+            <a:srgbClr val="028090"/>
+          </a:solidFill>
+          <a:ln/>
+        </p:spPr>
+      </p:sp>
+      <p:pic>
+        <p:nvPicPr>
+          <p:cNvPr id="6" name="Image 1" descr="preencoded.png">    </p:cNvPr>
+          <p:cNvPicPr>
+            <a:picLocks noChangeAspect="1"/>
+          </p:cNvPicPr>
+          <p:nvPr/>
+        </p:nvPicPr>
+        <p:blipFill>
+          <a:blip r:embed="rId2"/>
+          <a:stretch>
+            <a:fillRect/>
+          </a:stretch>
+        </p:blipFill>
+        <p:spPr>
+          <a:xfrm>
+            <a:off x="11101730" y="1836115"/>
+            <a:ext cx="351130" cy="351130"/>
+          </a:xfrm>
+          <a:prstGeom prst="rect">
+            <a:avLst/>
+          </a:prstGeom>
+        </p:spPr>
+      </p:pic>
+      <p:sp>
+        <p:nvSpPr>
+          <p:cNvPr id="7" name="Text 3"/>
+          <p:cNvSpPr/>
+          <p:nvPr/>
+        </p:nvSpPr>
+        <p:spPr>
+          <a:xfrm>
+            <a:off x="4892040" y="1554480"/>
+            <a:ext cx="5745175" cy="384048"/>
+          </a:xfrm>
+          <a:prstGeom prst="rect">
+            <a:avLst/>
+          </a:prstGeom>
+          <a:noFill/>
+          <a:ln/>
+        </p:spPr>
+        <p:txBody>
+          <a:bodyPr wrap="square" rtlCol="0" anchor="ctr"/>
+          <a:lstStyle/>
+          <a:p>
+            <a:pPr rtl="1" algn="r" indent="0" marL="0">
+              <a:buNone/>
+            </a:pPr>
+            <a:r>
+              <a:rPr lang="ar-SA" altLang="en-US" sz="1600" b="1" dirty="0">
+                <a:solidFill>
+                  <a:srgbClr val="0E2A32"/>
+                </a:solidFill>
+                <a:latin typeface="Arial" pitchFamily="34" charset="0"/>
+                <a:ea typeface="Arial" pitchFamily="34" charset="-122"/>
+                <a:cs typeface="Arial" pitchFamily="34" charset="-120"/>
+              </a:rPr>
+              <a:t>أساسيات البرمجة والبيانات</a:t>
+            </a:r>
+            <a:endParaRPr lang="ar-SA" sz="1600" dirty="0"/>
+          </a:p>
+        </p:txBody>
+      </p:sp>
+      <p:sp>
+        <p:nvSpPr>
+          <p:cNvPr id="8" name="Text 4"/>
+          <p:cNvSpPr/>
+          <p:nvPr/>
+        </p:nvSpPr>
+        <p:spPr>
+          <a:xfrm>
+            <a:off x="4892040" y="1938528"/>
+            <a:ext cx="5745175" cy="603504"/>
+          </a:xfrm>
+          <a:prstGeom prst="rect">
+            <a:avLst/>
+          </a:prstGeom>
+          <a:noFill/>
+          <a:ln/>
+        </p:spPr>
+        <p:txBody>
+          <a:bodyPr wrap="square" rtlCol="0" anchor="ctr"/>
+          <a:lstStyle/>
+          <a:p>
+            <a:pPr rtl="1" algn="r" indent="0" marL="0">
+              <a:lnSpc>
+                <a:spcPct val="112000"/>
+              </a:lnSpc>
+              <a:buNone/>
+            </a:pPr>
+            <a:r>
+              <a:rPr lang="ar-SA" altLang="en-US" sz="1250" dirty="0">
+                <a:solidFill>
+                  <a:srgbClr val="587076"/>
+                </a:solidFill>
+                <a:latin typeface="Arial" pitchFamily="34" charset="0"/>
+                <a:ea typeface="Arial" pitchFamily="34" charset="-122"/>
+                <a:cs typeface="Arial" pitchFamily="34" charset="-120"/>
+              </a:rPr>
+              <a:t>لغة Python مدخل ممتاز لفهم كيف تعمل هذه الأنظمة من الداخل.</a:t>
+            </a:r>
+            <a:endParaRPr lang="ar-SA" sz="1250" dirty="0"/>
+          </a:p>
+        </p:txBody>
+      </p:sp>
+      <p:sp>
+        <p:nvSpPr>
+          <p:cNvPr id="9" name="Shape 5"/>
+          <p:cNvSpPr/>
+          <p:nvPr/>
+        </p:nvSpPr>
+        <p:spPr>
+          <a:xfrm>
+            <a:off x="10911535" y="2798064"/>
+            <a:ext cx="731520" cy="731520"/>
+          </a:xfrm>
+          <a:prstGeom prst="ellipse">
+            <a:avLst/>
+          </a:prstGeom>
+          <a:solidFill>
+            <a:srgbClr val="00A896"/>
+          </a:solidFill>
+          <a:ln/>
+        </p:spPr>
+      </p:sp>
+      <p:pic>
+        <p:nvPicPr>
+          <p:cNvPr id="10" name="Image 2" descr="preencoded.png">    </p:cNvPr>
+          <p:cNvPicPr>
+            <a:picLocks noChangeAspect="1"/>
+          </p:cNvPicPr>
+          <p:nvPr/>
+        </p:nvPicPr>
+        <p:blipFill>
+          <a:blip r:embed="rId3"/>
+          <a:stretch>
+            <a:fillRect/>
+          </a:stretch>
+        </p:blipFill>
+        <p:spPr>
+          <a:xfrm>
+            <a:off x="11101730" y="2988259"/>
+            <a:ext cx="351130" cy="351130"/>
+          </a:xfrm>
+          <a:prstGeom prst="rect">
+            <a:avLst/>
+          </a:prstGeom>
+        </p:spPr>
+      </p:pic>
+      <p:sp>
+        <p:nvSpPr>
+          <p:cNvPr id="11" name="Text 6"/>
+          <p:cNvSpPr/>
+          <p:nvPr/>
+        </p:nvSpPr>
+        <p:spPr>
+          <a:xfrm>
+            <a:off x="4892040" y="2706624"/>
+            <a:ext cx="5745175" cy="384048"/>
+          </a:xfrm>
+          <a:prstGeom prst="rect">
+            <a:avLst/>
+          </a:prstGeom>
+          <a:noFill/>
+          <a:ln/>
+        </p:spPr>
+        <p:txBody>
+          <a:bodyPr wrap="square" rtlCol="0" anchor="ctr"/>
+          <a:lstStyle/>
+          <a:p>
+            <a:pPr rtl="1" algn="r" indent="0" marL="0">
+              <a:buNone/>
+            </a:pPr>
+            <a:r>
+              <a:rPr lang="ar-SA" altLang="en-US" sz="1600" b="1" dirty="0">
+                <a:solidFill>
+                  <a:srgbClr val="0E2A32"/>
+                </a:solidFill>
+                <a:latin typeface="Arial" pitchFamily="34" charset="0"/>
+                <a:ea typeface="Arial" pitchFamily="34" charset="-122"/>
+                <a:cs typeface="Arial" pitchFamily="34" charset="-120"/>
+              </a:rPr>
+              <a:t>التفكير النقدي</a:t>
+            </a:r>
+            <a:endParaRPr lang="ar-SA" sz="1600" dirty="0"/>
+          </a:p>
+        </p:txBody>
+      </p:sp>
+      <p:sp>
+        <p:nvSpPr>
+          <p:cNvPr id="12" name="Text 7"/>
+          <p:cNvSpPr/>
+          <p:nvPr/>
+        </p:nvSpPr>
+        <p:spPr>
+          <a:xfrm>
+            <a:off x="4892040" y="3090672"/>
+            <a:ext cx="5745175" cy="603504"/>
+          </a:xfrm>
+          <a:prstGeom prst="rect">
+            <a:avLst/>
+          </a:prstGeom>
+          <a:noFill/>
+          <a:ln/>
+        </p:spPr>
+        <p:txBody>
+          <a:bodyPr wrap="square" rtlCol="0" anchor="ctr"/>
+          <a:lstStyle/>
+          <a:p>
+            <a:pPr rtl="1" algn="r" indent="0" marL="0">
+              <a:lnSpc>
+                <a:spcPct val="112000"/>
+              </a:lnSpc>
+              <a:buNone/>
+            </a:pPr>
+            <a:r>
+              <a:rPr lang="ar-SA" altLang="en-US" sz="1250" dirty="0">
+                <a:solidFill>
+                  <a:srgbClr val="587076"/>
+                </a:solidFill>
+                <a:latin typeface="Arial" pitchFamily="34" charset="0"/>
+                <a:ea typeface="Arial" pitchFamily="34" charset="-122"/>
+                <a:cs typeface="Arial" pitchFamily="34" charset="-120"/>
+              </a:rPr>
+              <a:t>أهم مهارة في عصر المعلومات: اسأل، قارن، وتحقق قبل التصديق.</a:t>
+            </a:r>
+            <a:endParaRPr lang="ar-SA" sz="1250" dirty="0"/>
+          </a:p>
+        </p:txBody>
+      </p:sp>
+      <p:sp>
+        <p:nvSpPr>
+          <p:cNvPr id="13" name="Shape 8"/>
+          <p:cNvSpPr/>
+          <p:nvPr/>
+        </p:nvSpPr>
+        <p:spPr>
+          <a:xfrm>
+            <a:off x="10911535" y="3950208"/>
+            <a:ext cx="731520" cy="731520"/>
+          </a:xfrm>
+          <a:prstGeom prst="ellipse">
+            <a:avLst/>
+          </a:prstGeom>
+          <a:solidFill>
+            <a:srgbClr val="028090"/>
+          </a:solidFill>
+          <a:ln/>
+        </p:spPr>
+      </p:sp>
+      <p:pic>
+        <p:nvPicPr>
+          <p:cNvPr id="14" name="Image 3" descr="preencoded.png">    </p:cNvPr>
+          <p:cNvPicPr>
+            <a:picLocks noChangeAspect="1"/>
+          </p:cNvPicPr>
+          <p:nvPr/>
+        </p:nvPicPr>
+        <p:blipFill>
+          <a:blip r:embed="rId4"/>
+          <a:stretch>
+            <a:fillRect/>
+          </a:stretch>
+        </p:blipFill>
+        <p:spPr>
+          <a:xfrm>
+            <a:off x="11101730" y="4140403"/>
+            <a:ext cx="351130" cy="351130"/>
+          </a:xfrm>
+          <a:prstGeom prst="rect">
+            <a:avLst/>
+          </a:prstGeom>
+        </p:spPr>
+      </p:pic>
+      <p:sp>
+        <p:nvSpPr>
+          <p:cNvPr id="15" name="Text 9"/>
+          <p:cNvSpPr/>
+          <p:nvPr/>
+        </p:nvSpPr>
+        <p:spPr>
+          <a:xfrm>
+            <a:off x="4892040" y="3858768"/>
+            <a:ext cx="5745175" cy="384048"/>
+          </a:xfrm>
+          <a:prstGeom prst="rect">
+            <a:avLst/>
+          </a:prstGeom>
+          <a:noFill/>
+          <a:ln/>
+        </p:spPr>
+        <p:txBody>
+          <a:bodyPr wrap="square" rtlCol="0" anchor="ctr"/>
+          <a:lstStyle/>
+          <a:p>
+            <a:pPr rtl="1" algn="r" indent="0" marL="0">
+              <a:buNone/>
+            </a:pPr>
+            <a:r>
+              <a:rPr lang="ar-SA" altLang="en-US" sz="1600" b="1" dirty="0">
+                <a:solidFill>
+                  <a:srgbClr val="0E2A32"/>
+                </a:solidFill>
+                <a:latin typeface="Arial" pitchFamily="34" charset="0"/>
+                <a:ea typeface="Arial" pitchFamily="34" charset="-122"/>
+                <a:cs typeface="Arial" pitchFamily="34" charset="-120"/>
+              </a:rPr>
+              <a:t>التواصل مع النماذج</a:t>
+            </a:r>
+            <a:endParaRPr lang="ar-SA" sz="1600" dirty="0"/>
+          </a:p>
+        </p:txBody>
+      </p:sp>
+      <p:sp>
+        <p:nvSpPr>
+          <p:cNvPr id="16" name="Text 10"/>
+          <p:cNvSpPr/>
+          <p:nvPr/>
+        </p:nvSpPr>
+        <p:spPr>
+          <a:xfrm>
+            <a:off x="4892040" y="4242816"/>
+            <a:ext cx="5745175" cy="603504"/>
+          </a:xfrm>
+          <a:prstGeom prst="rect">
+            <a:avLst/>
+          </a:prstGeom>
+          <a:noFill/>
+          <a:ln/>
+        </p:spPr>
+        <p:txBody>
+          <a:bodyPr wrap="square" rtlCol="0" anchor="ctr"/>
+          <a:lstStyle/>
+          <a:p>
+            <a:pPr rtl="1" algn="r" indent="0" marL="0">
+              <a:lnSpc>
+                <a:spcPct val="112000"/>
+              </a:lnSpc>
+              <a:buNone/>
+            </a:pPr>
+            <a:r>
+              <a:rPr lang="ar-SA" altLang="en-US" sz="1250" dirty="0">
+                <a:solidFill>
+                  <a:srgbClr val="587076"/>
+                </a:solidFill>
+                <a:latin typeface="Arial" pitchFamily="34" charset="0"/>
+                <a:ea typeface="Arial" pitchFamily="34" charset="-122"/>
+                <a:cs typeface="Arial" pitchFamily="34" charset="-120"/>
+              </a:rPr>
+              <a:t>صياغة الأوامر بوضوح (Prompting) مهارة جديدة يحتاجها كل تخصص.</a:t>
+            </a:r>
+            <a:endParaRPr lang="ar-SA" sz="1250" dirty="0"/>
+          </a:p>
+        </p:txBody>
+      </p:sp>
+      <p:sp>
+        <p:nvSpPr>
+          <p:cNvPr id="17" name="Shape 11"/>
+          <p:cNvSpPr/>
+          <p:nvPr/>
+        </p:nvSpPr>
+        <p:spPr>
+          <a:xfrm>
+            <a:off x="10911535" y="5102352"/>
+            <a:ext cx="731520" cy="731520"/>
+          </a:xfrm>
+          <a:prstGeom prst="ellipse">
+            <a:avLst/>
+          </a:prstGeom>
+          <a:solidFill>
+            <a:srgbClr val="00A896"/>
+          </a:solidFill>
+          <a:ln/>
+        </p:spPr>
+      </p:sp>
+      <p:pic>
+        <p:nvPicPr>
+          <p:cNvPr id="18" name="Image 4" descr="preencoded.png">    </p:cNvPr>
+          <p:cNvPicPr>
+            <a:picLocks noChangeAspect="1"/>
+          </p:cNvPicPr>
+          <p:nvPr/>
+        </p:nvPicPr>
+        <p:blipFill>
+          <a:blip r:embed="rId5"/>
+          <a:stretch>
+            <a:fillRect/>
+          </a:stretch>
+        </p:blipFill>
+        <p:spPr>
+          <a:xfrm>
+            <a:off x="11101730" y="5292547"/>
+            <a:ext cx="351130" cy="351130"/>
+          </a:xfrm>
+          <a:prstGeom prst="rect">
+            <a:avLst/>
+          </a:prstGeom>
+        </p:spPr>
+      </p:pic>
+      <p:sp>
+        <p:nvSpPr>
+          <p:cNvPr id="19" name="Text 12"/>
+          <p:cNvSpPr/>
+          <p:nvPr/>
+        </p:nvSpPr>
+        <p:spPr>
+          <a:xfrm>
+            <a:off x="4892040" y="5010912"/>
+            <a:ext cx="5745175" cy="384048"/>
+          </a:xfrm>
+          <a:prstGeom prst="rect">
+            <a:avLst/>
+          </a:prstGeom>
+          <a:noFill/>
+          <a:ln/>
+        </p:spPr>
+        <p:txBody>
+          <a:bodyPr wrap="square" rtlCol="0" anchor="ctr"/>
+          <a:lstStyle/>
+          <a:p>
+            <a:pPr rtl="1" algn="r" indent="0" marL="0">
+              <a:buNone/>
+            </a:pPr>
+            <a:r>
+              <a:rPr lang="ar-SA" altLang="en-US" sz="1600" b="1" dirty="0">
+                <a:solidFill>
+                  <a:srgbClr val="0E2A32"/>
+                </a:solidFill>
+                <a:latin typeface="Arial" pitchFamily="34" charset="0"/>
+                <a:ea typeface="Arial" pitchFamily="34" charset="-122"/>
+                <a:cs typeface="Arial" pitchFamily="34" charset="-120"/>
+              </a:rPr>
+              <a:t>التعلم المستمر</a:t>
+            </a:r>
+            <a:endParaRPr lang="ar-SA" sz="1600" dirty="0"/>
+          </a:p>
+        </p:txBody>
+      </p:sp>
+      <p:sp>
+        <p:nvSpPr>
+          <p:cNvPr id="20" name="Text 13"/>
+          <p:cNvSpPr/>
+          <p:nvPr/>
+        </p:nvSpPr>
+        <p:spPr>
+          <a:xfrm>
+            <a:off x="4892040" y="5394960"/>
+            <a:ext cx="5745175" cy="603504"/>
+          </a:xfrm>
+          <a:prstGeom prst="rect">
+            <a:avLst/>
+          </a:prstGeom>
+          <a:noFill/>
+          <a:ln/>
+        </p:spPr>
+        <p:txBody>
+          <a:bodyPr wrap="square" rtlCol="0" anchor="ctr"/>
+          <a:lstStyle/>
+          <a:p>
+            <a:pPr rtl="1" algn="r" indent="0" marL="0">
+              <a:lnSpc>
+                <a:spcPct val="112000"/>
+              </a:lnSpc>
+              <a:buNone/>
+            </a:pPr>
+            <a:r>
+              <a:rPr lang="ar-SA" altLang="en-US" sz="1250" dirty="0">
+                <a:solidFill>
+                  <a:srgbClr val="587076"/>
+                </a:solidFill>
+                <a:latin typeface="Arial" pitchFamily="34" charset="0"/>
+                <a:ea typeface="Arial" pitchFamily="34" charset="-122"/>
+                <a:cs typeface="Arial" pitchFamily="34" charset="-120"/>
+              </a:rPr>
+              <a:t>التقنية تتغير كل عام — من يستمر في التعلم يبقى في المقدمة.</a:t>
+            </a:r>
+            <a:endParaRPr lang="ar-SA" sz="1250" dirty="0"/>
+          </a:p>
+        </p:txBody>
+      </p:sp>
+      <p:sp>
+        <p:nvSpPr>
+          <p:cNvPr id="21" name="Shape 14"/>
+          <p:cNvSpPr/>
+          <p:nvPr/>
+        </p:nvSpPr>
+        <p:spPr>
+          <a:xfrm>
+            <a:off x="548640" y="1554480"/>
+            <a:ext cx="3977640" cy="4480560"/>
+          </a:xfrm>
+          <a:prstGeom prst="roundRect">
+            <a:avLst>
+              <a:gd name="adj" fmla="val 3218"/>
+            </a:avLst>
+          </a:prstGeom>
+          <a:solidFill>
+            <a:srgbClr val="0E2A32"/>
+          </a:solidFill>
+          <a:ln/>
+          <a:effectLst>
+            <a:outerShdw sx="100000" sy="100000" kx="0" ky="0" algn="bl" rotWithShape="0" blurRad="88900" dist="25400" dir="5400000">
+              <a:srgbClr val="0E2A32">
+                <a:alpha val="16000"/>
+              </a:srgbClr>
+            </a:outerShdw>
+          </a:effectLst>
+        </p:spPr>
+      </p:sp>
+      <p:sp>
+        <p:nvSpPr>
+          <p:cNvPr id="22" name="Shape 15"/>
+          <p:cNvSpPr/>
+          <p:nvPr/>
+        </p:nvSpPr>
+        <p:spPr>
+          <a:xfrm>
+            <a:off x="2153412" y="1828800"/>
+            <a:ext cx="768096" cy="768096"/>
+          </a:xfrm>
+          <a:prstGeom prst="ellipse">
+            <a:avLst/>
+          </a:prstGeom>
+          <a:solidFill>
+            <a:srgbClr val="02C39A"/>
+          </a:solidFill>
+          <a:ln/>
+        </p:spPr>
+      </p:sp>
+      <p:pic>
+        <p:nvPicPr>
+          <p:cNvPr id="23" name="Image 5" descr="preencoded.png">    </p:cNvPr>
+          <p:cNvPicPr>
+            <a:picLocks noChangeAspect="1"/>
+          </p:cNvPicPr>
+          <p:nvPr/>
+        </p:nvPicPr>
+        <p:blipFill>
+          <a:blip r:embed="rId6"/>
+          <a:stretch>
+            <a:fillRect/>
+          </a:stretch>
+        </p:blipFill>
+        <p:spPr>
+          <a:xfrm>
+            <a:off x="2353117" y="2028505"/>
+            <a:ext cx="368686" cy="368686"/>
+          </a:xfrm>
+          <a:prstGeom prst="rect">
+            <a:avLst/>
+          </a:prstGeom>
+        </p:spPr>
+      </p:pic>
+      <p:sp>
+        <p:nvSpPr>
+          <p:cNvPr id="24" name="Text 16"/>
+          <p:cNvSpPr/>
+          <p:nvPr/>
+        </p:nvSpPr>
+        <p:spPr>
+          <a:xfrm>
+            <a:off x="777240" y="2697480"/>
+            <a:ext cx="3520440" cy="457200"/>
+          </a:xfrm>
+          <a:prstGeom prst="rect">
+            <a:avLst/>
+          </a:prstGeom>
+          <a:noFill/>
+          <a:ln/>
+        </p:spPr>
+        <p:txBody>
+          <a:bodyPr wrap="square" rtlCol="0" anchor="ctr"/>
+          <a:lstStyle/>
+          <a:p>
+            <a:pPr rtl="1" algn="ctr" indent="0" marL="0">
+              <a:buNone/>
+            </a:pPr>
+            <a:r>
+              <a:rPr lang="ar-SA" altLang="en-US" sz="1650" b="1" dirty="0">
+                <a:solidFill>
+                  <a:srgbClr val="FFFFFF"/>
+                </a:solidFill>
+                <a:latin typeface="Arial" pitchFamily="34" charset="0"/>
+                <a:ea typeface="Arial" pitchFamily="34" charset="-122"/>
+                <a:cs typeface="Arial" pitchFamily="34" charset="-120"/>
+              </a:rPr>
+              <a:t>وظائف يفتحها هذا المجال</a:t>
+            </a:r>
+            <a:endParaRPr lang="ar-SA" sz="1650" dirty="0"/>
+          </a:p>
+        </p:txBody>
+      </p:sp>
+      <p:sp>
+        <p:nvSpPr>
+          <p:cNvPr id="25" name="Shape 17"/>
+          <p:cNvSpPr/>
+          <p:nvPr/>
+        </p:nvSpPr>
+        <p:spPr>
+          <a:xfrm>
+            <a:off x="4050792" y="3374136"/>
+            <a:ext cx="128016" cy="128016"/>
+          </a:xfrm>
+          <a:prstGeom prst="ellipse">
+            <a:avLst/>
+          </a:prstGeom>
+          <a:solidFill>
+            <a:srgbClr val="02C39A"/>
+          </a:solidFill>
+          <a:ln/>
+        </p:spPr>
+      </p:sp>
+      <p:sp>
+        <p:nvSpPr>
+          <p:cNvPr id="26" name="Text 18"/>
+          <p:cNvSpPr/>
+          <p:nvPr/>
+        </p:nvSpPr>
+        <p:spPr>
+          <a:xfrm>
+            <a:off x="777240" y="3291840"/>
+            <a:ext cx="3108960" cy="512064"/>
+          </a:xfrm>
+          <a:prstGeom prst="rect">
+            <a:avLst/>
+          </a:prstGeom>
+          <a:noFill/>
+          <a:ln/>
+        </p:spPr>
+        <p:txBody>
+          <a:bodyPr wrap="square" rtlCol="0" anchor="t"/>
+          <a:lstStyle/>
+          <a:p>
+            <a:pPr rtl="1" algn="r" indent="0" marL="0">
+              <a:lnSpc>
+                <a:spcPct val="105000"/>
+              </a:lnSpc>
+              <a:buNone/>
+            </a:pPr>
+            <a:r>
+              <a:rPr lang="ar-SA" altLang="en-US" sz="1250" dirty="0">
+                <a:solidFill>
+                  <a:srgbClr val="CDE9E5"/>
+                </a:solidFill>
+                <a:latin typeface="Arial" pitchFamily="34" charset="0"/>
+                <a:ea typeface="Arial" pitchFamily="34" charset="-122"/>
+                <a:cs typeface="Arial" pitchFamily="34" charset="-120"/>
+              </a:rPr>
+              <a:t>مهندس تعلم آلة</a:t>
+            </a:r>
+            <a:endParaRPr lang="ar-SA" sz="1250" dirty="0"/>
+          </a:p>
+        </p:txBody>
+      </p:sp>
+      <p:sp>
+        <p:nvSpPr>
+          <p:cNvPr id="27" name="Shape 19"/>
+          <p:cNvSpPr/>
+          <p:nvPr/>
+        </p:nvSpPr>
+        <p:spPr>
+          <a:xfrm>
+            <a:off x="4050792" y="3904488"/>
+            <a:ext cx="128016" cy="128016"/>
+          </a:xfrm>
+          <a:prstGeom prst="ellipse">
+            <a:avLst/>
+          </a:prstGeom>
+          <a:solidFill>
+            <a:srgbClr val="02C39A"/>
+          </a:solidFill>
+          <a:ln/>
+        </p:spPr>
+      </p:sp>
+      <p:sp>
+        <p:nvSpPr>
+          <p:cNvPr id="28" name="Text 20"/>
+          <p:cNvSpPr/>
+          <p:nvPr/>
+        </p:nvSpPr>
+        <p:spPr>
+          <a:xfrm>
+            <a:off x="777240" y="3822192"/>
+            <a:ext cx="3108960" cy="512064"/>
+          </a:xfrm>
+          <a:prstGeom prst="rect">
+            <a:avLst/>
+          </a:prstGeom>
+          <a:noFill/>
+          <a:ln/>
+        </p:spPr>
+        <p:txBody>
+          <a:bodyPr wrap="square" rtlCol="0" anchor="t"/>
+          <a:lstStyle/>
+          <a:p>
+            <a:pPr rtl="1" algn="r" indent="0" marL="0">
+              <a:lnSpc>
+                <a:spcPct val="105000"/>
+              </a:lnSpc>
+              <a:buNone/>
+            </a:pPr>
+            <a:r>
+              <a:rPr lang="ar-SA" altLang="en-US" sz="1250" dirty="0">
+                <a:solidFill>
+                  <a:srgbClr val="CDE9E5"/>
+                </a:solidFill>
+                <a:latin typeface="Arial" pitchFamily="34" charset="0"/>
+                <a:ea typeface="Arial" pitchFamily="34" charset="-122"/>
+                <a:cs typeface="Arial" pitchFamily="34" charset="-120"/>
+              </a:rPr>
+              <a:t>محلل وعالم بيانات</a:t>
+            </a:r>
+            <a:endParaRPr lang="ar-SA" sz="1250" dirty="0"/>
+          </a:p>
+        </p:txBody>
+      </p:sp>
+      <p:sp>
+        <p:nvSpPr>
+          <p:cNvPr id="29" name="Shape 21"/>
+          <p:cNvSpPr/>
+          <p:nvPr/>
+        </p:nvSpPr>
+        <p:spPr>
+          <a:xfrm>
+            <a:off x="4050792" y="4434840"/>
+            <a:ext cx="128016" cy="128016"/>
+          </a:xfrm>
+          <a:prstGeom prst="ellipse">
+            <a:avLst/>
+          </a:prstGeom>
+          <a:solidFill>
+            <a:srgbClr val="02C39A"/>
+          </a:solidFill>
+          <a:ln/>
+        </p:spPr>
+      </p:sp>
+      <p:sp>
+        <p:nvSpPr>
+          <p:cNvPr id="30" name="Text 22"/>
+          <p:cNvSpPr/>
+          <p:nvPr/>
+        </p:nvSpPr>
+        <p:spPr>
+          <a:xfrm>
+            <a:off x="777240" y="4352544"/>
+            <a:ext cx="3108960" cy="512064"/>
+          </a:xfrm>
+          <a:prstGeom prst="rect">
+            <a:avLst/>
+          </a:prstGeom>
+          <a:noFill/>
+          <a:ln/>
+        </p:spPr>
+        <p:txBody>
+          <a:bodyPr wrap="square" rtlCol="0" anchor="t"/>
+          <a:lstStyle/>
+          <a:p>
+            <a:pPr rtl="1" algn="r" indent="0" marL="0">
+              <a:lnSpc>
+                <a:spcPct val="105000"/>
+              </a:lnSpc>
+              <a:buNone/>
+            </a:pPr>
+            <a:r>
+              <a:rPr lang="ar-SA" altLang="en-US" sz="1250" dirty="0">
+                <a:solidFill>
+                  <a:srgbClr val="CDE9E5"/>
+                </a:solidFill>
+                <a:latin typeface="Arial" pitchFamily="34" charset="0"/>
+                <a:ea typeface="Arial" pitchFamily="34" charset="-122"/>
+                <a:cs typeface="Arial" pitchFamily="34" charset="-120"/>
+              </a:rPr>
+              <a:t>مختص أخلاقيات الذكاء الاصطناعي</a:t>
+            </a:r>
+            <a:endParaRPr lang="ar-SA" sz="1250" dirty="0"/>
+          </a:p>
+        </p:txBody>
+      </p:sp>
+      <p:sp>
+        <p:nvSpPr>
+          <p:cNvPr id="31" name="Shape 23"/>
+          <p:cNvSpPr/>
+          <p:nvPr/>
+        </p:nvSpPr>
+        <p:spPr>
+          <a:xfrm>
+            <a:off x="4050792" y="4965192"/>
+            <a:ext cx="128016" cy="128016"/>
+          </a:xfrm>
+          <a:prstGeom prst="ellipse">
+            <a:avLst/>
+          </a:prstGeom>
+          <a:solidFill>
+            <a:srgbClr val="02C39A"/>
+          </a:solidFill>
+          <a:ln/>
+        </p:spPr>
+      </p:sp>
+      <p:sp>
+        <p:nvSpPr>
+          <p:cNvPr id="32" name="Text 24"/>
+          <p:cNvSpPr/>
+          <p:nvPr/>
+        </p:nvSpPr>
+        <p:spPr>
+          <a:xfrm>
+            <a:off x="777240" y="4882896"/>
+            <a:ext cx="3108960" cy="512064"/>
+          </a:xfrm>
+          <a:prstGeom prst="rect">
+            <a:avLst/>
+          </a:prstGeom>
+          <a:noFill/>
+          <a:ln/>
+        </p:spPr>
+        <p:txBody>
+          <a:bodyPr wrap="square" rtlCol="0" anchor="t"/>
+          <a:lstStyle/>
+          <a:p>
+            <a:pPr rtl="1" algn="r" indent="0" marL="0">
+              <a:lnSpc>
+                <a:spcPct val="105000"/>
+              </a:lnSpc>
+              <a:buNone/>
+            </a:pPr>
+            <a:r>
+              <a:rPr lang="ar-SA" altLang="en-US" sz="1250" dirty="0">
+                <a:solidFill>
+                  <a:srgbClr val="CDE9E5"/>
+                </a:solidFill>
+                <a:latin typeface="Arial" pitchFamily="34" charset="0"/>
+                <a:ea typeface="Arial" pitchFamily="34" charset="-122"/>
+                <a:cs typeface="Arial" pitchFamily="34" charset="-120"/>
+              </a:rPr>
+              <a:t>مطور تطبيقات ذكية</a:t>
+            </a:r>
+            <a:endParaRPr lang="ar-SA" sz="1250" dirty="0"/>
+          </a:p>
+        </p:txBody>
+      </p:sp>
+      <p:sp>
+        <p:nvSpPr>
+          <p:cNvPr id="33" name="Shape 25"/>
+          <p:cNvSpPr/>
+          <p:nvPr/>
+        </p:nvSpPr>
+        <p:spPr>
+          <a:xfrm>
+            <a:off x="4050792" y="5495544"/>
+            <a:ext cx="128016" cy="128016"/>
+          </a:xfrm>
+          <a:prstGeom prst="ellipse">
+            <a:avLst/>
+          </a:prstGeom>
+          <a:solidFill>
+            <a:srgbClr val="02C39A"/>
+          </a:solidFill>
+          <a:ln/>
+        </p:spPr>
+      </p:sp>
+      <p:sp>
+        <p:nvSpPr>
+          <p:cNvPr id="34" name="Text 26"/>
+          <p:cNvSpPr/>
+          <p:nvPr/>
+        </p:nvSpPr>
+        <p:spPr>
+          <a:xfrm>
+            <a:off x="777240" y="5413248"/>
+            <a:ext cx="3108960" cy="512064"/>
+          </a:xfrm>
+          <a:prstGeom prst="rect">
+            <a:avLst/>
+          </a:prstGeom>
+          <a:noFill/>
+          <a:ln/>
+        </p:spPr>
+        <p:txBody>
+          <a:bodyPr wrap="square" rtlCol="0" anchor="t"/>
+          <a:lstStyle/>
+          <a:p>
+            <a:pPr rtl="1" algn="r" indent="0" marL="0">
+              <a:lnSpc>
+                <a:spcPct val="105000"/>
+              </a:lnSpc>
+              <a:buNone/>
+            </a:pPr>
+            <a:r>
+              <a:rPr lang="ar-SA" altLang="en-US" sz="1250" dirty="0">
+                <a:solidFill>
+                  <a:srgbClr val="CDE9E5"/>
+                </a:solidFill>
+                <a:latin typeface="Arial" pitchFamily="34" charset="0"/>
+                <a:ea typeface="Arial" pitchFamily="34" charset="-122"/>
+                <a:cs typeface="Arial" pitchFamily="34" charset="-120"/>
+              </a:rPr>
+              <a:t>وكل تخصص + ذكاء اصطناعي: طب، قانون، تعليم، إعلام…</a:t>
+            </a:r>
+            <a:endParaRPr lang="ar-SA" sz="1250" dirty="0"/>
+          </a:p>
+        </p:txBody>
+      </p:sp>
+    </p:spTree>
+  </p:cSld>
+  <p:clrMapOvr>
+    <a:masterClrMapping/>
+  </p:clrMapOvr>
+</p:sld>
+</file>
+
+<file path=ppt/slides/slide14.xml><?xml version="1.0" encoding="utf-8"?>
+<p:sld xmlns:a="http://schemas.openxmlformats.org/drawingml/2006/main" xmlns:r="http://schemas.openxmlformats.org/officeDocument/2006/relationships" xmlns:p="http://schemas.openxmlformats.org/presentationml/2006/main">
+  <p:cSld name="Slide 14">
     <p:bg>
       <p:bgPr>
         <a:solidFill>
@@ -8132,7 +8879,7 @@
                 <a:ea typeface="Arial" pitchFamily="34" charset="-122"/>
                 <a:cs typeface="Arial" pitchFamily="34" charset="-120"/>
               </a:rPr>
-              <a:t>أنواع الذكاء الاصطناعي</a:t>
+              <a:t>الذكاء الاصطناعي وتعلم الآلة والتعلم العميق</a:t>
             </a:r>
             <a:endParaRPr lang="ar-SA" sz="3100" dirty="0"/>
           </a:p>
@@ -8146,23 +8893,16 @@
         </p:nvSpPr>
         <p:spPr>
           <a:xfrm>
-            <a:off x="8198968" y="1508760"/>
-            <a:ext cx="3566160" cy="3931920"/>
-          </a:xfrm>
-          <a:prstGeom prst="roundRect">
-            <a:avLst>
-              <a:gd name="adj" fmla="val 3590"/>
-            </a:avLst>
-          </a:prstGeom>
-          <a:solidFill>
-            <a:srgbClr val="FFFFFF"/>
-          </a:solidFill>
-          <a:ln w="12700">
-            <a:solidFill>
-              <a:srgbClr val="DCE8E8"/>
-            </a:solidFill>
-            <a:prstDash val="solid"/>
-          </a:ln>
+            <a:off x="685800" y="1554480"/>
+            <a:ext cx="4343400" cy="4343400"/>
+          </a:xfrm>
+          <a:prstGeom prst="ellipse">
+            <a:avLst/>
+          </a:prstGeom>
+          <a:solidFill>
+            <a:srgbClr val="0E2A32"/>
+          </a:solidFill>
+          <a:ln/>
           <a:effectLst>
             <a:outerShdw sx="100000" sy="100000" kx="0" ky="0" algn="bl" rotWithShape="0" blurRad="88900" dist="25400" dir="5400000">
               <a:srgbClr val="0E2A32">
@@ -8180,8 +8920,8 @@
         </p:nvSpPr>
         <p:spPr>
           <a:xfrm>
-            <a:off x="9479128" y="1874520"/>
-            <a:ext cx="1005840" cy="1005840"/>
+            <a:off x="1303020" y="2624328"/>
+            <a:ext cx="3108960" cy="3108960"/>
           </a:xfrm>
           <a:prstGeom prst="ellipse">
             <a:avLst/>
@@ -8189,43 +8929,237 @@
           <a:solidFill>
             <a:srgbClr val="028090"/>
           </a:solidFill>
-          <a:ln/>
-        </p:spPr>
-      </p:sp>
-      <p:pic>
-        <p:nvPicPr>
-          <p:cNvPr id="7" name="Image 1" descr="preencoded.png">    </p:cNvPr>
-          <p:cNvPicPr>
-            <a:picLocks noChangeAspect="1"/>
-          </p:cNvPicPr>
-          <p:nvPr/>
-        </p:nvPicPr>
-        <p:blipFill>
-          <a:blip r:embed="rId2"/>
-          <a:stretch>
-            <a:fillRect/>
-          </a:stretch>
-        </p:blipFill>
-        <p:spPr>
-          <a:xfrm>
-            <a:off x="9740646" y="2136038"/>
-            <a:ext cx="482803" cy="482803"/>
-          </a:xfrm>
-          <a:prstGeom prst="rect">
-            <a:avLst/>
-          </a:prstGeom>
-        </p:spPr>
-      </p:pic>
-      <p:sp>
-        <p:nvSpPr>
-          <p:cNvPr id="8" name="Text 4"/>
-          <p:cNvSpPr/>
-          <p:nvPr/>
-        </p:nvSpPr>
-        <p:spPr>
-          <a:xfrm>
-            <a:off x="8381848" y="3017520"/>
-            <a:ext cx="3200400" cy="457200"/>
+          <a:ln w="19050">
+            <a:solidFill>
+              <a:srgbClr val="FFFFFF"/>
+            </a:solidFill>
+            <a:prstDash val="solid"/>
+          </a:ln>
+        </p:spPr>
+      </p:sp>
+      <p:sp>
+        <p:nvSpPr>
+          <p:cNvPr id="7" name="Shape 4"/>
+          <p:cNvSpPr/>
+          <p:nvPr/>
+        </p:nvSpPr>
+        <p:spPr>
+          <a:xfrm>
+            <a:off x="1920240" y="3694176"/>
+            <a:ext cx="1874520" cy="1874520"/>
+          </a:xfrm>
+          <a:prstGeom prst="ellipse">
+            <a:avLst/>
+          </a:prstGeom>
+          <a:solidFill>
+            <a:srgbClr val="02C39A"/>
+          </a:solidFill>
+          <a:ln w="19050">
+            <a:solidFill>
+              <a:srgbClr val="FFFFFF"/>
+            </a:solidFill>
+            <a:prstDash val="solid"/>
+          </a:ln>
+        </p:spPr>
+      </p:sp>
+      <p:sp>
+        <p:nvSpPr>
+          <p:cNvPr id="8" name="Text 5"/>
+          <p:cNvSpPr/>
+          <p:nvPr/>
+        </p:nvSpPr>
+        <p:spPr>
+          <a:xfrm>
+            <a:off x="1234440" y="1810512"/>
+            <a:ext cx="3246120" cy="685800"/>
+          </a:xfrm>
+          <a:prstGeom prst="rect">
+            <a:avLst/>
+          </a:prstGeom>
+          <a:noFill/>
+          <a:ln/>
+        </p:spPr>
+        <p:txBody>
+          <a:bodyPr wrap="square" lIns="0" tIns="0" rIns="0" bIns="0" rtlCol="0" anchor="ctr"/>
+          <a:lstStyle/>
+          <a:p>
+            <a:pPr rtl="1" algn="ctr" indent="0" marL="0">
+              <a:buNone/>
+            </a:pPr>
+            <a:r>
+              <a:rPr lang="ar-SA" altLang="en-US" sz="1500" b="1" dirty="0">
+                <a:solidFill>
+                  <a:srgbClr val="FFFFFF"/>
+                </a:solidFill>
+                <a:latin typeface="Arial" pitchFamily="34" charset="0"/>
+                <a:ea typeface="Arial" pitchFamily="34" charset="-122"/>
+                <a:cs typeface="Arial" pitchFamily="34" charset="-120"/>
+              </a:rPr>
+              <a:t>الذكاء الاصطناعي</a:t>
+            </a:r>
+            <a:endParaRPr lang="ar-SA" sz="1500" dirty="0"/>
+          </a:p>
+          <a:p>
+            <a:pPr algn="ctr" indent="0" marL="0">
+              <a:buNone/>
+            </a:pPr>
+            <a:r>
+              <a:rPr lang="ar-SA" altLang="en-US" sz="1000" dirty="0">
+                <a:solidFill>
+                  <a:srgbClr val="CDE9E5"/>
+                </a:solidFill>
+                <a:latin typeface="Arial" pitchFamily="34" charset="0"/>
+                <a:ea typeface="Arial" pitchFamily="34" charset="-122"/>
+                <a:cs typeface="Arial" pitchFamily="34" charset="-120"/>
+              </a:rPr>
+              <a:t>Artificial Intelligence</a:t>
+            </a:r>
+            <a:endParaRPr lang="ar-SA" sz="1500" dirty="0"/>
+          </a:p>
+        </p:txBody>
+      </p:sp>
+      <p:sp>
+        <p:nvSpPr>
+          <p:cNvPr id="9" name="Text 6"/>
+          <p:cNvSpPr/>
+          <p:nvPr/>
+        </p:nvSpPr>
+        <p:spPr>
+          <a:xfrm>
+            <a:off x="1714500" y="2825496"/>
+            <a:ext cx="2286000" cy="640080"/>
+          </a:xfrm>
+          <a:prstGeom prst="rect">
+            <a:avLst/>
+          </a:prstGeom>
+          <a:noFill/>
+          <a:ln/>
+        </p:spPr>
+        <p:txBody>
+          <a:bodyPr wrap="square" lIns="0" tIns="0" rIns="0" bIns="0" rtlCol="0" anchor="ctr"/>
+          <a:lstStyle/>
+          <a:p>
+            <a:pPr rtl="1" algn="ctr" indent="0" marL="0">
+              <a:buNone/>
+            </a:pPr>
+            <a:r>
+              <a:rPr lang="ar-SA" altLang="en-US" sz="1400" b="1" dirty="0">
+                <a:solidFill>
+                  <a:srgbClr val="FFFFFF"/>
+                </a:solidFill>
+                <a:latin typeface="Arial" pitchFamily="34" charset="0"/>
+                <a:ea typeface="Arial" pitchFamily="34" charset="-122"/>
+                <a:cs typeface="Arial" pitchFamily="34" charset="-120"/>
+              </a:rPr>
+              <a:t>تعلم الآلة</a:t>
+            </a:r>
+            <a:endParaRPr lang="ar-SA" sz="1400" dirty="0"/>
+          </a:p>
+          <a:p>
+            <a:pPr algn="ctr" indent="0" marL="0">
+              <a:buNone/>
+            </a:pPr>
+            <a:r>
+              <a:rPr lang="ar-SA" altLang="en-US" sz="950" dirty="0">
+                <a:solidFill>
+                  <a:srgbClr val="D8F3EC"/>
+                </a:solidFill>
+                <a:latin typeface="Arial" pitchFamily="34" charset="0"/>
+                <a:ea typeface="Arial" pitchFamily="34" charset="-122"/>
+                <a:cs typeface="Arial" pitchFamily="34" charset="-120"/>
+              </a:rPr>
+              <a:t>Machine Learning</a:t>
+            </a:r>
+            <a:endParaRPr lang="ar-SA" sz="1400" dirty="0"/>
+          </a:p>
+        </p:txBody>
+      </p:sp>
+      <p:sp>
+        <p:nvSpPr>
+          <p:cNvPr id="10" name="Text 7"/>
+          <p:cNvSpPr/>
+          <p:nvPr/>
+        </p:nvSpPr>
+        <p:spPr>
+          <a:xfrm>
+            <a:off x="2057400" y="4197096"/>
+            <a:ext cx="1600200" cy="868680"/>
+          </a:xfrm>
+          <a:prstGeom prst="rect">
+            <a:avLst/>
+          </a:prstGeom>
+          <a:noFill/>
+          <a:ln/>
+        </p:spPr>
+        <p:txBody>
+          <a:bodyPr wrap="square" lIns="0" tIns="0" rIns="0" bIns="0" rtlCol="0" anchor="ctr"/>
+          <a:lstStyle/>
+          <a:p>
+            <a:pPr rtl="1" algn="ctr" indent="0" marL="0">
+              <a:buNone/>
+            </a:pPr>
+            <a:r>
+              <a:rPr lang="ar-SA" altLang="en-US" sz="1350" b="1" dirty="0">
+                <a:solidFill>
+                  <a:srgbClr val="0E2A32"/>
+                </a:solidFill>
+                <a:latin typeface="Arial" pitchFamily="34" charset="0"/>
+                <a:ea typeface="Arial" pitchFamily="34" charset="-122"/>
+                <a:cs typeface="Arial" pitchFamily="34" charset="-120"/>
+              </a:rPr>
+              <a:t>التعلم العميق</a:t>
+            </a:r>
+            <a:endParaRPr lang="ar-SA" sz="1350" dirty="0"/>
+          </a:p>
+          <a:p>
+            <a:pPr algn="ctr" indent="0" marL="0">
+              <a:buNone/>
+            </a:pPr>
+            <a:r>
+              <a:rPr lang="ar-SA" altLang="en-US" sz="950" dirty="0">
+                <a:solidFill>
+                  <a:srgbClr val="0B4F42"/>
+                </a:solidFill>
+                <a:latin typeface="Arial" pitchFamily="34" charset="0"/>
+                <a:ea typeface="Arial" pitchFamily="34" charset="-122"/>
+                <a:cs typeface="Arial" pitchFamily="34" charset="-120"/>
+              </a:rPr>
+              <a:t>Deep Learning</a:t>
+            </a:r>
+            <a:endParaRPr lang="ar-SA" sz="1350" dirty="0"/>
+          </a:p>
+        </p:txBody>
+      </p:sp>
+      <p:sp>
+        <p:nvSpPr>
+          <p:cNvPr id="11" name="Shape 8"/>
+          <p:cNvSpPr/>
+          <p:nvPr/>
+        </p:nvSpPr>
+        <p:spPr>
+          <a:xfrm>
+            <a:off x="11140135" y="1618488"/>
+            <a:ext cx="384048" cy="384048"/>
+          </a:xfrm>
+          <a:prstGeom prst="ellipse">
+            <a:avLst/>
+          </a:prstGeom>
+          <a:solidFill>
+            <a:srgbClr val="0E2A32"/>
+          </a:solidFill>
+          <a:ln/>
+        </p:spPr>
+      </p:sp>
+      <p:sp>
+        <p:nvSpPr>
+          <p:cNvPr id="12" name="Text 9"/>
+          <p:cNvSpPr/>
+          <p:nvPr/>
+        </p:nvSpPr>
+        <p:spPr>
+          <a:xfrm>
+            <a:off x="5440680" y="1600200"/>
+            <a:ext cx="5425135" cy="411480"/>
           </a:xfrm>
           <a:prstGeom prst="rect">
             <a:avLst/>
@@ -8237,11 +9171,11 @@
           <a:bodyPr wrap="square" rtlCol="0" anchor="ctr"/>
           <a:lstStyle/>
           <a:p>
-            <a:pPr rtl="1" algn="ctr" indent="0" marL="0">
-              <a:buNone/>
-            </a:pPr>
-            <a:r>
-              <a:rPr lang="ar-SA" altLang="en-US" sz="1800" b="1" dirty="0">
+            <a:pPr rtl="1" algn="r" indent="0" marL="0">
+              <a:buNone/>
+            </a:pPr>
+            <a:r>
+              <a:rPr lang="ar-SA" altLang="en-US" sz="1650" b="1" dirty="0">
                 <a:solidFill>
                   <a:srgbClr val="0E2A32"/>
                 </a:solidFill>
@@ -8249,22 +9183,22 @@
                 <a:ea typeface="Arial" pitchFamily="34" charset="-122"/>
                 <a:cs typeface="Arial" pitchFamily="34" charset="-120"/>
               </a:rPr>
-              <a:t>الذكاء الضيق (ANI)</a:t>
-            </a:r>
-            <a:endParaRPr lang="ar-SA" sz="1800" dirty="0"/>
-          </a:p>
-        </p:txBody>
-      </p:sp>
-      <p:sp>
-        <p:nvSpPr>
-          <p:cNvPr id="9" name="Text 5"/>
-          <p:cNvSpPr/>
-          <p:nvPr/>
-        </p:nvSpPr>
-        <p:spPr>
-          <a:xfrm>
-            <a:off x="8473288" y="3520440"/>
-            <a:ext cx="3017520" cy="1143000"/>
+              <a:t>الذكاء الاصطناعي (AI)</a:t>
+            </a:r>
+            <a:endParaRPr lang="ar-SA" sz="1650" dirty="0"/>
+          </a:p>
+        </p:txBody>
+      </p:sp>
+      <p:sp>
+        <p:nvSpPr>
+          <p:cNvPr id="13" name="Text 10"/>
+          <p:cNvSpPr/>
+          <p:nvPr/>
+        </p:nvSpPr>
+        <p:spPr>
+          <a:xfrm>
+            <a:off x="5440680" y="2029968"/>
+            <a:ext cx="5425135" cy="822960"/>
           </a:xfrm>
           <a:prstGeom prst="rect">
             <a:avLst/>
@@ -8276,14 +9210,14 @@
           <a:bodyPr wrap="square" rtlCol="0" anchor="ctr"/>
           <a:lstStyle/>
           <a:p>
-            <a:pPr rtl="1" algn="ctr" indent="0" marL="0">
+            <a:pPr rtl="1" algn="r" indent="0" marL="0">
               <a:lnSpc>
                 <a:spcPct val="120000"/>
               </a:lnSpc>
               <a:buNone/>
             </a:pPr>
             <a:r>
-              <a:rPr lang="ar-SA" altLang="en-US" sz="1350" dirty="0">
+              <a:rPr lang="ar-SA" altLang="en-US" sz="1300" dirty="0">
                 <a:solidFill>
                   <a:srgbClr val="587076"/>
                 </a:solidFill>
@@ -8291,161 +9225,42 @@
                 <a:ea typeface="Arial" pitchFamily="34" charset="-122"/>
                 <a:cs typeface="Arial" pitchFamily="34" charset="-120"/>
               </a:rPr>
-              <a:t>متخصص في مهمة واحدة يتقنها جيداً: تمييز الوجوه، الترجمة، التوصيات.</a:t>
-            </a:r>
-            <a:endParaRPr lang="ar-SA" sz="1350" dirty="0"/>
-          </a:p>
-        </p:txBody>
-      </p:sp>
-      <p:sp>
-        <p:nvSpPr>
-          <p:cNvPr id="10" name="Shape 6"/>
-          <p:cNvSpPr/>
-          <p:nvPr/>
-        </p:nvSpPr>
-        <p:spPr>
-          <a:xfrm>
-            <a:off x="8610448" y="4754880"/>
-            <a:ext cx="2743200" cy="457200"/>
-          </a:xfrm>
-          <a:prstGeom prst="roundRect">
-            <a:avLst>
-              <a:gd name="adj" fmla="val 50000"/>
-            </a:avLst>
-          </a:prstGeom>
-          <a:solidFill>
-            <a:srgbClr val="E4F7F1"/>
-          </a:solidFill>
-          <a:ln/>
-        </p:spPr>
-      </p:sp>
-      <p:sp>
-        <p:nvSpPr>
-          <p:cNvPr id="11" name="Text 7"/>
-          <p:cNvSpPr/>
-          <p:nvPr/>
-        </p:nvSpPr>
-        <p:spPr>
-          <a:xfrm>
-            <a:off x="8610448" y="4754880"/>
-            <a:ext cx="2743200" cy="457200"/>
-          </a:xfrm>
-          <a:prstGeom prst="rect">
-            <a:avLst/>
-          </a:prstGeom>
-          <a:noFill/>
-          <a:ln/>
-        </p:spPr>
-        <p:txBody>
-          <a:bodyPr wrap="square" lIns="0" tIns="0" rIns="0" bIns="0" rtlCol="0" anchor="ctr"/>
-          <a:lstStyle/>
-          <a:p>
-            <a:pPr rtl="1" algn="ctr" indent="0" marL="0">
-              <a:buNone/>
-            </a:pPr>
-            <a:r>
-              <a:rPr lang="ar-SA" altLang="en-US" sz="1150" b="1" dirty="0">
-                <a:solidFill>
-                  <a:srgbClr val="028090"/>
-                </a:solidFill>
-                <a:latin typeface="Arial" pitchFamily="34" charset="0"/>
-                <a:ea typeface="Arial" pitchFamily="34" charset="-122"/>
-                <a:cs typeface="Arial" pitchFamily="34" charset="-120"/>
-              </a:rPr>
-              <a:t>موجود في كل مكان اليوم</a:t>
-            </a:r>
-            <a:endParaRPr lang="ar-SA" sz="1150" dirty="0"/>
-          </a:p>
-        </p:txBody>
-      </p:sp>
-      <p:sp>
-        <p:nvSpPr>
-          <p:cNvPr id="12" name="Shape 8"/>
-          <p:cNvSpPr/>
-          <p:nvPr/>
-        </p:nvSpPr>
-        <p:spPr>
-          <a:xfrm>
-            <a:off x="4312768" y="1508760"/>
-            <a:ext cx="3566160" cy="3931920"/>
-          </a:xfrm>
-          <a:prstGeom prst="roundRect">
-            <a:avLst>
-              <a:gd name="adj" fmla="val 3590"/>
-            </a:avLst>
-          </a:prstGeom>
-          <a:solidFill>
-            <a:srgbClr val="FFFFFF"/>
-          </a:solidFill>
-          <a:ln w="12700">
-            <a:solidFill>
-              <a:srgbClr val="DCE8E8"/>
-            </a:solidFill>
-            <a:prstDash val="solid"/>
-          </a:ln>
-          <a:effectLst>
-            <a:outerShdw sx="100000" sy="100000" kx="0" ky="0" algn="bl" rotWithShape="0" blurRad="88900" dist="25400" dir="5400000">
-              <a:srgbClr val="0E2A32">
-                <a:alpha val="16000"/>
-              </a:srgbClr>
-            </a:outerShdw>
-          </a:effectLst>
-        </p:spPr>
-      </p:sp>
-      <p:sp>
-        <p:nvSpPr>
-          <p:cNvPr id="13" name="Shape 9"/>
-          <p:cNvSpPr/>
-          <p:nvPr/>
-        </p:nvSpPr>
-        <p:spPr>
-          <a:xfrm>
-            <a:off x="5592928" y="1874520"/>
-            <a:ext cx="1005840" cy="1005840"/>
+              <a:t>المظلة الأشمل: أي نظام يحاكي قدرات الإنسان الذهنية — بأي طريقة كانت.</a:t>
+            </a:r>
+            <a:endParaRPr lang="ar-SA" sz="1300" dirty="0"/>
+          </a:p>
+        </p:txBody>
+      </p:sp>
+      <p:sp>
+        <p:nvSpPr>
+          <p:cNvPr id="14" name="Shape 11"/>
+          <p:cNvSpPr/>
+          <p:nvPr/>
+        </p:nvSpPr>
+        <p:spPr>
+          <a:xfrm>
+            <a:off x="11140135" y="2990088"/>
+            <a:ext cx="384048" cy="384048"/>
           </a:xfrm>
           <a:prstGeom prst="ellipse">
             <a:avLst/>
           </a:prstGeom>
           <a:solidFill>
-            <a:srgbClr val="02C39A"/>
-          </a:solidFill>
-          <a:ln/>
-        </p:spPr>
-      </p:sp>
-      <p:pic>
-        <p:nvPicPr>
-          <p:cNvPr id="14" name="Image 2" descr="preencoded.png">    </p:cNvPr>
-          <p:cNvPicPr>
-            <a:picLocks noChangeAspect="1"/>
-          </p:cNvPicPr>
-          <p:nvPr/>
-        </p:nvPicPr>
-        <p:blipFill>
-          <a:blip r:embed="rId3"/>
-          <a:stretch>
-            <a:fillRect/>
-          </a:stretch>
-        </p:blipFill>
-        <p:spPr>
-          <a:xfrm>
-            <a:off x="5854446" y="2136038"/>
-            <a:ext cx="482803" cy="482803"/>
-          </a:xfrm>
-          <a:prstGeom prst="rect">
-            <a:avLst/>
-          </a:prstGeom>
-        </p:spPr>
-      </p:pic>
-      <p:sp>
-        <p:nvSpPr>
-          <p:cNvPr id="15" name="Text 10"/>
-          <p:cNvSpPr/>
-          <p:nvPr/>
-        </p:nvSpPr>
-        <p:spPr>
-          <a:xfrm>
-            <a:off x="4495648" y="3017520"/>
-            <a:ext cx="3200400" cy="457200"/>
+            <a:srgbClr val="028090"/>
+          </a:solidFill>
+          <a:ln/>
+        </p:spPr>
+      </p:sp>
+      <p:sp>
+        <p:nvSpPr>
+          <p:cNvPr id="15" name="Text 12"/>
+          <p:cNvSpPr/>
+          <p:nvPr/>
+        </p:nvSpPr>
+        <p:spPr>
+          <a:xfrm>
+            <a:off x="5440680" y="2971800"/>
+            <a:ext cx="5425135" cy="411480"/>
           </a:xfrm>
           <a:prstGeom prst="rect">
             <a:avLst/>
@@ -8457,11 +9272,11 @@
           <a:bodyPr wrap="square" rtlCol="0" anchor="ctr"/>
           <a:lstStyle/>
           <a:p>
-            <a:pPr rtl="1" algn="ctr" indent="0" marL="0">
-              <a:buNone/>
-            </a:pPr>
-            <a:r>
-              <a:rPr lang="ar-SA" altLang="en-US" sz="1800" b="1" dirty="0">
+            <a:pPr rtl="1" algn="r" indent="0" marL="0">
+              <a:buNone/>
+            </a:pPr>
+            <a:r>
+              <a:rPr lang="ar-SA" altLang="en-US" sz="1650" b="1" dirty="0">
                 <a:solidFill>
                   <a:srgbClr val="0E2A32"/>
                 </a:solidFill>
@@ -8469,22 +9284,22 @@
                 <a:ea typeface="Arial" pitchFamily="34" charset="-122"/>
                 <a:cs typeface="Arial" pitchFamily="34" charset="-120"/>
               </a:rPr>
-              <a:t>الذكاء التوليدي</a:t>
-            </a:r>
-            <a:endParaRPr lang="ar-SA" sz="1800" dirty="0"/>
-          </a:p>
-        </p:txBody>
-      </p:sp>
-      <p:sp>
-        <p:nvSpPr>
-          <p:cNvPr id="16" name="Text 11"/>
-          <p:cNvSpPr/>
-          <p:nvPr/>
-        </p:nvSpPr>
-        <p:spPr>
-          <a:xfrm>
-            <a:off x="4587088" y="3520440"/>
-            <a:ext cx="3017520" cy="1143000"/>
+              <a:t>تعلم الآلة (Machine Learning)</a:t>
+            </a:r>
+            <a:endParaRPr lang="ar-SA" sz="1650" dirty="0"/>
+          </a:p>
+        </p:txBody>
+      </p:sp>
+      <p:sp>
+        <p:nvSpPr>
+          <p:cNvPr id="16" name="Text 13"/>
+          <p:cNvSpPr/>
+          <p:nvPr/>
+        </p:nvSpPr>
+        <p:spPr>
+          <a:xfrm>
+            <a:off x="5440680" y="3401568"/>
+            <a:ext cx="5425135" cy="822960"/>
           </a:xfrm>
           <a:prstGeom prst="rect">
             <a:avLst/>
@@ -8496,14 +9311,14 @@
           <a:bodyPr wrap="square" rtlCol="0" anchor="ctr"/>
           <a:lstStyle/>
           <a:p>
-            <a:pPr rtl="1" algn="ctr" indent="0" marL="0">
+            <a:pPr rtl="1" algn="r" indent="0" marL="0">
               <a:lnSpc>
                 <a:spcPct val="120000"/>
               </a:lnSpc>
               <a:buNone/>
             </a:pPr>
             <a:r>
-              <a:rPr lang="ar-SA" altLang="en-US" sz="1350" dirty="0">
+              <a:rPr lang="ar-SA" altLang="en-US" sz="1300" dirty="0">
                 <a:solidFill>
                   <a:srgbClr val="587076"/>
                 </a:solidFill>
@@ -8511,161 +9326,42 @@
                 <a:ea typeface="Arial" pitchFamily="34" charset="-122"/>
                 <a:cs typeface="Arial" pitchFamily="34" charset="-120"/>
               </a:rPr>
-              <a:t>يُنتج محتوى جديداً: نصوصاً وصوراً وأصواتاً وفيديو، مثل ChatGPT وMidjourney.</a:t>
-            </a:r>
-            <a:endParaRPr lang="ar-SA" sz="1350" dirty="0"/>
-          </a:p>
-        </p:txBody>
-      </p:sp>
-      <p:sp>
-        <p:nvSpPr>
-          <p:cNvPr id="17" name="Shape 12"/>
-          <p:cNvSpPr/>
-          <p:nvPr/>
-        </p:nvSpPr>
-        <p:spPr>
-          <a:xfrm>
-            <a:off x="4724248" y="4754880"/>
-            <a:ext cx="2743200" cy="457200"/>
-          </a:xfrm>
-          <a:prstGeom prst="roundRect">
-            <a:avLst>
-              <a:gd name="adj" fmla="val 50000"/>
-            </a:avLst>
-          </a:prstGeom>
-          <a:solidFill>
-            <a:srgbClr val="E4F7F1"/>
-          </a:solidFill>
-          <a:ln/>
-        </p:spPr>
-      </p:sp>
-      <p:sp>
-        <p:nvSpPr>
-          <p:cNvPr id="18" name="Text 13"/>
-          <p:cNvSpPr/>
-          <p:nvPr/>
-        </p:nvSpPr>
-        <p:spPr>
-          <a:xfrm>
-            <a:off x="4724248" y="4754880"/>
-            <a:ext cx="2743200" cy="457200"/>
-          </a:xfrm>
-          <a:prstGeom prst="rect">
-            <a:avLst/>
-          </a:prstGeom>
-          <a:noFill/>
-          <a:ln/>
-        </p:spPr>
-        <p:txBody>
-          <a:bodyPr wrap="square" lIns="0" tIns="0" rIns="0" bIns="0" rtlCol="0" anchor="ctr"/>
-          <a:lstStyle/>
-          <a:p>
-            <a:pPr rtl="1" algn="ctr" indent="0" marL="0">
-              <a:buNone/>
-            </a:pPr>
-            <a:r>
-              <a:rPr lang="ar-SA" altLang="en-US" sz="1150" b="1" dirty="0">
-                <a:solidFill>
-                  <a:srgbClr val="028090"/>
-                </a:solidFill>
-                <a:latin typeface="Arial" pitchFamily="34" charset="0"/>
-                <a:ea typeface="Arial" pitchFamily="34" charset="-122"/>
-                <a:cs typeface="Arial" pitchFamily="34" charset="-120"/>
-              </a:rPr>
-              <a:t>الثورة الحالية منذ 2022</a:t>
-            </a:r>
-            <a:endParaRPr lang="ar-SA" sz="1150" dirty="0"/>
-          </a:p>
-        </p:txBody>
-      </p:sp>
-      <p:sp>
-        <p:nvSpPr>
-          <p:cNvPr id="19" name="Shape 14"/>
-          <p:cNvSpPr/>
-          <p:nvPr/>
-        </p:nvSpPr>
-        <p:spPr>
-          <a:xfrm>
-            <a:off x="426568" y="1508760"/>
-            <a:ext cx="3566160" cy="3931920"/>
-          </a:xfrm>
-          <a:prstGeom prst="roundRect">
-            <a:avLst>
-              <a:gd name="adj" fmla="val 3590"/>
-            </a:avLst>
-          </a:prstGeom>
-          <a:solidFill>
-            <a:srgbClr val="FFFFFF"/>
-          </a:solidFill>
-          <a:ln w="12700">
-            <a:solidFill>
-              <a:srgbClr val="DCE8E8"/>
-            </a:solidFill>
-            <a:prstDash val="solid"/>
-          </a:ln>
-          <a:effectLst>
-            <a:outerShdw sx="100000" sy="100000" kx="0" ky="0" algn="bl" rotWithShape="0" blurRad="88900" dist="25400" dir="5400000">
-              <a:srgbClr val="0E2A32">
-                <a:alpha val="16000"/>
-              </a:srgbClr>
-            </a:outerShdw>
-          </a:effectLst>
-        </p:spPr>
-      </p:sp>
-      <p:sp>
-        <p:nvSpPr>
-          <p:cNvPr id="20" name="Shape 15"/>
-          <p:cNvSpPr/>
-          <p:nvPr/>
-        </p:nvSpPr>
-        <p:spPr>
-          <a:xfrm>
-            <a:off x="1706728" y="1874520"/>
-            <a:ext cx="1005840" cy="1005840"/>
+              <a:t>فرع من الذكاء الاصطناعي: النظام يتعلم من البيانات والأمثلة بدلاً من برمجة كل قاعدة يدوياً.</a:t>
+            </a:r>
+            <a:endParaRPr lang="ar-SA" sz="1300" dirty="0"/>
+          </a:p>
+        </p:txBody>
+      </p:sp>
+      <p:sp>
+        <p:nvSpPr>
+          <p:cNvPr id="17" name="Shape 14"/>
+          <p:cNvSpPr/>
+          <p:nvPr/>
+        </p:nvSpPr>
+        <p:spPr>
+          <a:xfrm>
+            <a:off x="11140135" y="4361688"/>
+            <a:ext cx="384048" cy="384048"/>
           </a:xfrm>
           <a:prstGeom prst="ellipse">
             <a:avLst/>
           </a:prstGeom>
           <a:solidFill>
-            <a:srgbClr val="0E2A32"/>
-          </a:solidFill>
-          <a:ln/>
-        </p:spPr>
-      </p:sp>
-      <p:pic>
-        <p:nvPicPr>
-          <p:cNvPr id="21" name="Image 3" descr="preencoded.png">    </p:cNvPr>
-          <p:cNvPicPr>
-            <a:picLocks noChangeAspect="1"/>
-          </p:cNvPicPr>
-          <p:nvPr/>
-        </p:nvPicPr>
-        <p:blipFill>
-          <a:blip r:embed="rId4"/>
-          <a:stretch>
-            <a:fillRect/>
-          </a:stretch>
-        </p:blipFill>
-        <p:spPr>
-          <a:xfrm>
-            <a:off x="1968246" y="2136038"/>
-            <a:ext cx="482803" cy="482803"/>
-          </a:xfrm>
-          <a:prstGeom prst="rect">
-            <a:avLst/>
-          </a:prstGeom>
-        </p:spPr>
-      </p:pic>
-      <p:sp>
-        <p:nvSpPr>
-          <p:cNvPr id="22" name="Text 16"/>
-          <p:cNvSpPr/>
-          <p:nvPr/>
-        </p:nvSpPr>
-        <p:spPr>
-          <a:xfrm>
-            <a:off x="609448" y="3017520"/>
-            <a:ext cx="3200400" cy="457200"/>
+            <a:srgbClr val="02C39A"/>
+          </a:solidFill>
+          <a:ln/>
+        </p:spPr>
+      </p:sp>
+      <p:sp>
+        <p:nvSpPr>
+          <p:cNvPr id="18" name="Text 15"/>
+          <p:cNvSpPr/>
+          <p:nvPr/>
+        </p:nvSpPr>
+        <p:spPr>
+          <a:xfrm>
+            <a:off x="5440680" y="4343400"/>
+            <a:ext cx="5425135" cy="411480"/>
           </a:xfrm>
           <a:prstGeom prst="rect">
             <a:avLst/>
@@ -8677,11 +9373,11 @@
           <a:bodyPr wrap="square" rtlCol="0" anchor="ctr"/>
           <a:lstStyle/>
           <a:p>
-            <a:pPr rtl="1" algn="ctr" indent="0" marL="0">
-              <a:buNone/>
-            </a:pPr>
-            <a:r>
-              <a:rPr lang="ar-SA" altLang="en-US" sz="1800" b="1" dirty="0">
+            <a:pPr rtl="1" algn="r" indent="0" marL="0">
+              <a:buNone/>
+            </a:pPr>
+            <a:r>
+              <a:rPr lang="ar-SA" altLang="en-US" sz="1650" b="1" dirty="0">
                 <a:solidFill>
                   <a:srgbClr val="0E2A32"/>
                 </a:solidFill>
@@ -8689,22 +9385,22 @@
                 <a:ea typeface="Arial" pitchFamily="34" charset="-122"/>
                 <a:cs typeface="Arial" pitchFamily="34" charset="-120"/>
               </a:rPr>
-              <a:t>الذكاء العام (AGI)</a:t>
-            </a:r>
-            <a:endParaRPr lang="ar-SA" sz="1800" dirty="0"/>
-          </a:p>
-        </p:txBody>
-      </p:sp>
-      <p:sp>
-        <p:nvSpPr>
-          <p:cNvPr id="23" name="Text 17"/>
-          <p:cNvSpPr/>
-          <p:nvPr/>
-        </p:nvSpPr>
-        <p:spPr>
-          <a:xfrm>
-            <a:off x="700888" y="3520440"/>
-            <a:ext cx="3017520" cy="1143000"/>
+              <a:t>التعلم العميق (Deep Learning)</a:t>
+            </a:r>
+            <a:endParaRPr lang="ar-SA" sz="1650" dirty="0"/>
+          </a:p>
+        </p:txBody>
+      </p:sp>
+      <p:sp>
+        <p:nvSpPr>
+          <p:cNvPr id="19" name="Text 16"/>
+          <p:cNvSpPr/>
+          <p:nvPr/>
+        </p:nvSpPr>
+        <p:spPr>
+          <a:xfrm>
+            <a:off x="5440680" y="4773168"/>
+            <a:ext cx="5425135" cy="822960"/>
           </a:xfrm>
           <a:prstGeom prst="rect">
             <a:avLst/>
@@ -8716,14 +9412,14 @@
           <a:bodyPr wrap="square" rtlCol="0" anchor="ctr"/>
           <a:lstStyle/>
           <a:p>
-            <a:pPr rtl="1" algn="ctr" indent="0" marL="0">
+            <a:pPr rtl="1" algn="r" indent="0" marL="0">
               <a:lnSpc>
                 <a:spcPct val="120000"/>
               </a:lnSpc>
               <a:buNone/>
             </a:pPr>
             <a:r>
-              <a:rPr lang="ar-SA" altLang="en-US" sz="1350" dirty="0">
+              <a:rPr lang="ar-SA" altLang="en-US" sz="1300" dirty="0">
                 <a:solidFill>
                   <a:srgbClr val="587076"/>
                 </a:solidFill>
@@ -8731,83 +9427,22 @@
                 <a:ea typeface="Arial" pitchFamily="34" charset="-122"/>
                 <a:cs typeface="Arial" pitchFamily="34" charset="-120"/>
               </a:rPr>
-              <a:t>آلة تضاهي الإنسان في كل المهام الذهنية وتنقل تعلمها بين المجالات.</a:t>
-            </a:r>
-            <a:endParaRPr lang="ar-SA" sz="1350" dirty="0"/>
-          </a:p>
-        </p:txBody>
-      </p:sp>
-      <p:sp>
-        <p:nvSpPr>
-          <p:cNvPr id="24" name="Shape 18"/>
-          <p:cNvSpPr/>
-          <p:nvPr/>
-        </p:nvSpPr>
-        <p:spPr>
-          <a:xfrm>
-            <a:off x="838048" y="4754880"/>
-            <a:ext cx="2743200" cy="457200"/>
-          </a:xfrm>
-          <a:prstGeom prst="roundRect">
-            <a:avLst>
-              <a:gd name="adj" fmla="val 50000"/>
-            </a:avLst>
-          </a:prstGeom>
-          <a:solidFill>
-            <a:srgbClr val="EDF1F2"/>
-          </a:solidFill>
-          <a:ln/>
-        </p:spPr>
-      </p:sp>
-      <p:sp>
-        <p:nvSpPr>
-          <p:cNvPr id="25" name="Text 19"/>
-          <p:cNvSpPr/>
-          <p:nvPr/>
-        </p:nvSpPr>
-        <p:spPr>
-          <a:xfrm>
-            <a:off x="838048" y="4754880"/>
-            <a:ext cx="2743200" cy="457200"/>
-          </a:xfrm>
-          <a:prstGeom prst="rect">
-            <a:avLst/>
-          </a:prstGeom>
-          <a:noFill/>
-          <a:ln/>
-        </p:spPr>
-        <p:txBody>
-          <a:bodyPr wrap="square" lIns="0" tIns="0" rIns="0" bIns="0" rtlCol="0" anchor="ctr"/>
-          <a:lstStyle/>
-          <a:p>
-            <a:pPr rtl="1" algn="ctr" indent="0" marL="0">
-              <a:buNone/>
-            </a:pPr>
-            <a:r>
-              <a:rPr lang="ar-SA" altLang="en-US" sz="1150" b="1" dirty="0">
-                <a:solidFill>
-                  <a:srgbClr val="0E2A32"/>
-                </a:solidFill>
-                <a:latin typeface="Arial" pitchFamily="34" charset="0"/>
-                <a:ea typeface="Arial" pitchFamily="34" charset="-122"/>
-                <a:cs typeface="Arial" pitchFamily="34" charset="-120"/>
-              </a:rPr>
-              <a:t>لم يتحقق بعد — هدف بحثي</a:t>
-            </a:r>
-            <a:endParaRPr lang="ar-SA" sz="1150" dirty="0"/>
-          </a:p>
-        </p:txBody>
-      </p:sp>
-      <p:sp>
-        <p:nvSpPr>
-          <p:cNvPr id="26" name="Text 20"/>
-          <p:cNvSpPr/>
-          <p:nvPr/>
-        </p:nvSpPr>
-        <p:spPr>
-          <a:xfrm>
-            <a:off x="548640" y="5760720"/>
-            <a:ext cx="11094415" cy="411480"/>
+              <a:t>فرع من تعلم الآلة: شبكات عصبية متعددة الطبقات — التقنية وراء ChatGPT وتمييز الصور والصوت.</a:t>
+            </a:r>
+            <a:endParaRPr lang="ar-SA" sz="1300" dirty="0"/>
+          </a:p>
+        </p:txBody>
+      </p:sp>
+      <p:sp>
+        <p:nvSpPr>
+          <p:cNvPr id="20" name="Text 17"/>
+          <p:cNvSpPr/>
+          <p:nvPr/>
+        </p:nvSpPr>
+        <p:spPr>
+          <a:xfrm>
+            <a:off x="5440680" y="5806440"/>
+            <a:ext cx="5425135" cy="548640"/>
           </a:xfrm>
           <a:prstGeom prst="rect">
             <a:avLst/>
@@ -8819,7 +9454,10 @@
           <a:bodyPr wrap="square" rtlCol="0" anchor="ctr"/>
           <a:lstStyle/>
           <a:p>
-            <a:pPr rtl="1" algn="ctr" indent="0" marL="0">
+            <a:pPr rtl="1" algn="r" indent="0" marL="0">
+              <a:lnSpc>
+                <a:spcPct val="115000"/>
+              </a:lnSpc>
               <a:buNone/>
             </a:pPr>
             <a:r>
@@ -8831,7 +9469,7 @@
                 <a:ea typeface="Arial" pitchFamily="34" charset="-122"/>
                 <a:cs typeface="Arial" pitchFamily="34" charset="-120"/>
               </a:rPr>
-              <a:t>كل ما تستخدمه اليوم هو ذكاء «ضيق» أو «توليدي» — الذكاء العام ما زال في المختبرات وأفلام الخيال.</a:t>
+              <a:t>كل تعلم عميق هو تعلم آلة، وكل تعلم آلة هو ذكاء اصطناعي — والعكس ليس صحيحاً.</a:t>
             </a:r>
             <a:endParaRPr lang="ar-SA" sz="1400" dirty="0"/>
           </a:p>
@@ -8946,7 +9584,7 @@
                 <a:ea typeface="Arial" pitchFamily="34" charset="-122"/>
                 <a:cs typeface="Arial" pitchFamily="34" charset="-120"/>
               </a:rPr>
-              <a:t>في جيبك: هاتفك الذكي</a:t>
+              <a:t>أنواع الذكاء الاصطناعي</a:t>
             </a:r>
             <a:endParaRPr lang="ar-SA" sz="3100" dirty="0"/>
           </a:p>
@@ -8960,18 +9598,23 @@
         </p:nvSpPr>
         <p:spPr>
           <a:xfrm>
-            <a:off x="6255868" y="1600200"/>
-            <a:ext cx="5440680" cy="1920240"/>
+            <a:off x="8198968" y="1508760"/>
+            <a:ext cx="3566160" cy="3931920"/>
           </a:xfrm>
           <a:prstGeom prst="roundRect">
             <a:avLst>
-              <a:gd name="adj" fmla="val 5714"/>
+              <a:gd name="adj" fmla="val 3590"/>
             </a:avLst>
           </a:prstGeom>
           <a:solidFill>
-            <a:srgbClr val="F2F7F7"/>
-          </a:solidFill>
-          <a:ln/>
+            <a:srgbClr val="FFFFFF"/>
+          </a:solidFill>
+          <a:ln w="12700">
+            <a:solidFill>
+              <a:srgbClr val="DCE8E8"/>
+            </a:solidFill>
+            <a:prstDash val="solid"/>
+          </a:ln>
           <a:effectLst>
             <a:outerShdw sx="100000" sy="100000" kx="0" ky="0" algn="bl" rotWithShape="0" blurRad="88900" dist="25400" dir="5400000">
               <a:srgbClr val="0E2A32">
@@ -8989,8 +9632,8 @@
         </p:nvSpPr>
         <p:spPr>
           <a:xfrm>
-            <a:off x="10644988" y="2157984"/>
-            <a:ext cx="804672" cy="804672"/>
+            <a:off x="9479128" y="1874520"/>
+            <a:ext cx="1005840" cy="1005840"/>
           </a:xfrm>
           <a:prstGeom prst="ellipse">
             <a:avLst/>
@@ -9017,8 +9660,8 @@
         </p:blipFill>
         <p:spPr>
           <a:xfrm>
-            <a:off x="10854202" y="2367199"/>
-            <a:ext cx="386243" cy="386243"/>
+            <a:off x="9740646" y="2136038"/>
+            <a:ext cx="482803" cy="482803"/>
           </a:xfrm>
           <a:prstGeom prst="rect">
             <a:avLst/>
@@ -9033,8 +9676,8 @@
         </p:nvSpPr>
         <p:spPr>
           <a:xfrm>
-            <a:off x="6530188" y="1874520"/>
-            <a:ext cx="3977640" cy="411480"/>
+            <a:off x="8381848" y="3017520"/>
+            <a:ext cx="3200400" cy="457200"/>
           </a:xfrm>
           <a:prstGeom prst="rect">
             <a:avLst/>
@@ -9046,11 +9689,11 @@
           <a:bodyPr wrap="square" rtlCol="0" anchor="ctr"/>
           <a:lstStyle/>
           <a:p>
-            <a:pPr rtl="1" algn="r" indent="0" marL="0">
-              <a:buNone/>
-            </a:pPr>
-            <a:r>
-              <a:rPr lang="ar-SA" altLang="en-US" sz="1700" b="1" dirty="0">
+            <a:pPr rtl="1" algn="ctr" indent="0" marL="0">
+              <a:buNone/>
+            </a:pPr>
+            <a:r>
+              <a:rPr lang="ar-SA" altLang="en-US" sz="1800" b="1" dirty="0">
                 <a:solidFill>
                   <a:srgbClr val="0E2A32"/>
                 </a:solidFill>
@@ -9058,9 +9701,9 @@
                 <a:ea typeface="Arial" pitchFamily="34" charset="-122"/>
                 <a:cs typeface="Arial" pitchFamily="34" charset="-120"/>
               </a:rPr>
-              <a:t>المساعد الصوتي</a:t>
-            </a:r>
-            <a:endParaRPr lang="ar-SA" sz="1700" dirty="0"/>
+              <a:t>الذكاء الضيق (ANI)</a:t>
+            </a:r>
+            <a:endParaRPr lang="ar-SA" sz="1800" dirty="0"/>
           </a:p>
         </p:txBody>
       </p:sp>
@@ -9072,8 +9715,8 @@
         </p:nvSpPr>
         <p:spPr>
           <a:xfrm>
-            <a:off x="6530188" y="2331720"/>
-            <a:ext cx="3977640" cy="1005840"/>
+            <a:off x="8473288" y="3520440"/>
+            <a:ext cx="3017520" cy="1143000"/>
           </a:xfrm>
           <a:prstGeom prst="rect">
             <a:avLst/>
@@ -9085,14 +9728,14 @@
           <a:bodyPr wrap="square" rtlCol="0" anchor="ctr"/>
           <a:lstStyle/>
           <a:p>
-            <a:pPr rtl="1" algn="r" indent="0" marL="0">
+            <a:pPr rtl="1" algn="ctr" indent="0" marL="0">
               <a:lnSpc>
                 <a:spcPct val="120000"/>
               </a:lnSpc>
               <a:buNone/>
             </a:pPr>
             <a:r>
-              <a:rPr lang="ar-SA" altLang="en-US" sz="1300" dirty="0">
+              <a:rPr lang="ar-SA" altLang="en-US" sz="1350" dirty="0">
                 <a:solidFill>
                   <a:srgbClr val="587076"/>
                 </a:solidFill>
@@ -9100,9 +9743,9 @@
                 <a:ea typeface="Arial" pitchFamily="34" charset="-122"/>
                 <a:cs typeface="Arial" pitchFamily="34" charset="-120"/>
               </a:rPr>
-              <a:t>Siri وGoogle Assistant يحولان كلامك إلى نص ويفهمان طلبك وينفذانه.</a:t>
-            </a:r>
-            <a:endParaRPr lang="ar-SA" sz="1300" dirty="0"/>
+              <a:t>متخصص في مهمة واحدة يتقنها جيداً: تمييز الوجوه، الترجمة، التوصيات.</a:t>
+            </a:r>
+            <a:endParaRPr lang="ar-SA" sz="1350" dirty="0"/>
           </a:p>
         </p:txBody>
       </p:sp>
@@ -9114,18 +9757,84 @@
         </p:nvSpPr>
         <p:spPr>
           <a:xfrm>
-            <a:off x="495148" y="1600200"/>
-            <a:ext cx="5440680" cy="1920240"/>
+            <a:off x="8610448" y="4754880"/>
+            <a:ext cx="2743200" cy="457200"/>
           </a:xfrm>
           <a:prstGeom prst="roundRect">
             <a:avLst>
-              <a:gd name="adj" fmla="val 5714"/>
+              <a:gd name="adj" fmla="val 50000"/>
             </a:avLst>
           </a:prstGeom>
           <a:solidFill>
-            <a:srgbClr val="F2F7F7"/>
-          </a:solidFill>
-          <a:ln/>
+            <a:srgbClr val="E4F7F1"/>
+          </a:solidFill>
+          <a:ln/>
+        </p:spPr>
+      </p:sp>
+      <p:sp>
+        <p:nvSpPr>
+          <p:cNvPr id="11" name="Text 7"/>
+          <p:cNvSpPr/>
+          <p:nvPr/>
+        </p:nvSpPr>
+        <p:spPr>
+          <a:xfrm>
+            <a:off x="8610448" y="4754880"/>
+            <a:ext cx="2743200" cy="457200"/>
+          </a:xfrm>
+          <a:prstGeom prst="rect">
+            <a:avLst/>
+          </a:prstGeom>
+          <a:noFill/>
+          <a:ln/>
+        </p:spPr>
+        <p:txBody>
+          <a:bodyPr wrap="square" lIns="0" tIns="0" rIns="0" bIns="0" rtlCol="0" anchor="ctr"/>
+          <a:lstStyle/>
+          <a:p>
+            <a:pPr rtl="1" algn="ctr" indent="0" marL="0">
+              <a:buNone/>
+            </a:pPr>
+            <a:r>
+              <a:rPr lang="ar-SA" altLang="en-US" sz="1150" b="1" dirty="0">
+                <a:solidFill>
+                  <a:srgbClr val="028090"/>
+                </a:solidFill>
+                <a:latin typeface="Arial" pitchFamily="34" charset="0"/>
+                <a:ea typeface="Arial" pitchFamily="34" charset="-122"/>
+                <a:cs typeface="Arial" pitchFamily="34" charset="-120"/>
+              </a:rPr>
+              <a:t>موجود في كل مكان اليوم</a:t>
+            </a:r>
+            <a:endParaRPr lang="ar-SA" sz="1150" dirty="0"/>
+          </a:p>
+        </p:txBody>
+      </p:sp>
+      <p:sp>
+        <p:nvSpPr>
+          <p:cNvPr id="12" name="Shape 8"/>
+          <p:cNvSpPr/>
+          <p:nvPr/>
+        </p:nvSpPr>
+        <p:spPr>
+          <a:xfrm>
+            <a:off x="4312768" y="1508760"/>
+            <a:ext cx="3566160" cy="3931920"/>
+          </a:xfrm>
+          <a:prstGeom prst="roundRect">
+            <a:avLst>
+              <a:gd name="adj" fmla="val 3590"/>
+            </a:avLst>
+          </a:prstGeom>
+          <a:solidFill>
+            <a:srgbClr val="FFFFFF"/>
+          </a:solidFill>
+          <a:ln w="12700">
+            <a:solidFill>
+              <a:srgbClr val="DCE8E8"/>
+            </a:solidFill>
+            <a:prstDash val="solid"/>
+          </a:ln>
           <a:effectLst>
             <a:outerShdw sx="100000" sy="100000" kx="0" ky="0" algn="bl" rotWithShape="0" blurRad="88900" dist="25400" dir="5400000">
               <a:srgbClr val="0E2A32">
@@ -9137,27 +9846,27 @@
       </p:sp>
       <p:sp>
         <p:nvSpPr>
-          <p:cNvPr id="11" name="Shape 7"/>
-          <p:cNvSpPr/>
-          <p:nvPr/>
-        </p:nvSpPr>
-        <p:spPr>
-          <a:xfrm>
-            <a:off x="4884268" y="2157984"/>
-            <a:ext cx="804672" cy="804672"/>
+          <p:cNvPr id="13" name="Shape 9"/>
+          <p:cNvSpPr/>
+          <p:nvPr/>
+        </p:nvSpPr>
+        <p:spPr>
+          <a:xfrm>
+            <a:off x="5592928" y="1874520"/>
+            <a:ext cx="1005840" cy="1005840"/>
           </a:xfrm>
           <a:prstGeom prst="ellipse">
             <a:avLst/>
           </a:prstGeom>
           <a:solidFill>
-            <a:srgbClr val="028090"/>
+            <a:srgbClr val="02C39A"/>
           </a:solidFill>
           <a:ln/>
         </p:spPr>
       </p:sp>
       <p:pic>
         <p:nvPicPr>
-          <p:cNvPr id="12" name="Image 2" descr="preencoded.png">    </p:cNvPr>
+          <p:cNvPr id="14" name="Image 2" descr="preencoded.png">    </p:cNvPr>
           <p:cNvPicPr>
             <a:picLocks noChangeAspect="1"/>
           </p:cNvPicPr>
@@ -9171,8 +9880,8 @@
         </p:blipFill>
         <p:spPr>
           <a:xfrm>
-            <a:off x="5093482" y="2367199"/>
-            <a:ext cx="386243" cy="386243"/>
+            <a:off x="5854446" y="2136038"/>
+            <a:ext cx="482803" cy="482803"/>
           </a:xfrm>
           <a:prstGeom prst="rect">
             <a:avLst/>
@@ -9181,14 +9890,14 @@
       </p:pic>
       <p:sp>
         <p:nvSpPr>
-          <p:cNvPr id="13" name="Text 8"/>
-          <p:cNvSpPr/>
-          <p:nvPr/>
-        </p:nvSpPr>
-        <p:spPr>
-          <a:xfrm>
-            <a:off x="769468" y="1874520"/>
-            <a:ext cx="3977640" cy="411480"/>
+          <p:cNvPr id="15" name="Text 10"/>
+          <p:cNvSpPr/>
+          <p:nvPr/>
+        </p:nvSpPr>
+        <p:spPr>
+          <a:xfrm>
+            <a:off x="4495648" y="3017520"/>
+            <a:ext cx="3200400" cy="457200"/>
           </a:xfrm>
           <a:prstGeom prst="rect">
             <a:avLst/>
@@ -9200,11 +9909,11 @@
           <a:bodyPr wrap="square" rtlCol="0" anchor="ctr"/>
           <a:lstStyle/>
           <a:p>
-            <a:pPr rtl="1" algn="r" indent="0" marL="0">
-              <a:buNone/>
-            </a:pPr>
-            <a:r>
-              <a:rPr lang="ar-SA" altLang="en-US" sz="1700" b="1" dirty="0">
+            <a:pPr rtl="1" algn="ctr" indent="0" marL="0">
+              <a:buNone/>
+            </a:pPr>
+            <a:r>
+              <a:rPr lang="ar-SA" altLang="en-US" sz="1800" b="1" dirty="0">
                 <a:solidFill>
                   <a:srgbClr val="0E2A32"/>
                 </a:solidFill>
@@ -9212,22 +9921,22 @@
                 <a:ea typeface="Arial" pitchFamily="34" charset="-122"/>
                 <a:cs typeface="Arial" pitchFamily="34" charset="-120"/>
               </a:rPr>
-              <a:t>الكاميرا والصور</a:t>
-            </a:r>
-            <a:endParaRPr lang="ar-SA" sz="1700" dirty="0"/>
-          </a:p>
-        </p:txBody>
-      </p:sp>
-      <p:sp>
-        <p:nvSpPr>
-          <p:cNvPr id="14" name="Text 9"/>
-          <p:cNvSpPr/>
-          <p:nvPr/>
-        </p:nvSpPr>
-        <p:spPr>
-          <a:xfrm>
-            <a:off x="769468" y="2331720"/>
-            <a:ext cx="3977640" cy="1005840"/>
+              <a:t>الذكاء التوليدي</a:t>
+            </a:r>
+            <a:endParaRPr lang="ar-SA" sz="1800" dirty="0"/>
+          </a:p>
+        </p:txBody>
+      </p:sp>
+      <p:sp>
+        <p:nvSpPr>
+          <p:cNvPr id="16" name="Text 11"/>
+          <p:cNvSpPr/>
+          <p:nvPr/>
+        </p:nvSpPr>
+        <p:spPr>
+          <a:xfrm>
+            <a:off x="4587088" y="3520440"/>
+            <a:ext cx="3017520" cy="1143000"/>
           </a:xfrm>
           <a:prstGeom prst="rect">
             <a:avLst/>
@@ -9239,14 +9948,14 @@
           <a:bodyPr wrap="square" rtlCol="0" anchor="ctr"/>
           <a:lstStyle/>
           <a:p>
-            <a:pPr rtl="1" algn="r" indent="0" marL="0">
+            <a:pPr rtl="1" algn="ctr" indent="0" marL="0">
               <a:lnSpc>
                 <a:spcPct val="120000"/>
               </a:lnSpc>
               <a:buNone/>
             </a:pPr>
             <a:r>
-              <a:rPr lang="ar-SA" altLang="en-US" sz="1300" dirty="0">
+              <a:rPr lang="ar-SA" altLang="en-US" sz="1350" dirty="0">
                 <a:solidFill>
                   <a:srgbClr val="587076"/>
                 </a:solidFill>
@@ -9254,32 +9963,98 @@
                 <a:ea typeface="Arial" pitchFamily="34" charset="-122"/>
                 <a:cs typeface="Arial" pitchFamily="34" charset="-120"/>
               </a:rPr>
-              <a:t>تحسين تلقائي للإضاءة، وضع ليلي، وفتح القفل ببصمة الوجه.</a:t>
-            </a:r>
-            <a:endParaRPr lang="ar-SA" sz="1300" dirty="0"/>
-          </a:p>
-        </p:txBody>
-      </p:sp>
-      <p:sp>
-        <p:nvSpPr>
-          <p:cNvPr id="15" name="Shape 10"/>
-          <p:cNvSpPr/>
-          <p:nvPr/>
-        </p:nvSpPr>
-        <p:spPr>
-          <a:xfrm>
-            <a:off x="6255868" y="3840480"/>
-            <a:ext cx="5440680" cy="1920240"/>
+              <a:t>يُنتج محتوى جديداً: نصوصاً وصوراً وأصواتاً وفيديو، مثل ChatGPT وMidjourney.</a:t>
+            </a:r>
+            <a:endParaRPr lang="ar-SA" sz="1350" dirty="0"/>
+          </a:p>
+        </p:txBody>
+      </p:sp>
+      <p:sp>
+        <p:nvSpPr>
+          <p:cNvPr id="17" name="Shape 12"/>
+          <p:cNvSpPr/>
+          <p:nvPr/>
+        </p:nvSpPr>
+        <p:spPr>
+          <a:xfrm>
+            <a:off x="4724248" y="4754880"/>
+            <a:ext cx="2743200" cy="457200"/>
           </a:xfrm>
           <a:prstGeom prst="roundRect">
             <a:avLst>
-              <a:gd name="adj" fmla="val 5714"/>
+              <a:gd name="adj" fmla="val 50000"/>
             </a:avLst>
           </a:prstGeom>
           <a:solidFill>
-            <a:srgbClr val="F2F7F7"/>
-          </a:solidFill>
-          <a:ln/>
+            <a:srgbClr val="E4F7F1"/>
+          </a:solidFill>
+          <a:ln/>
+        </p:spPr>
+      </p:sp>
+      <p:sp>
+        <p:nvSpPr>
+          <p:cNvPr id="18" name="Text 13"/>
+          <p:cNvSpPr/>
+          <p:nvPr/>
+        </p:nvSpPr>
+        <p:spPr>
+          <a:xfrm>
+            <a:off x="4724248" y="4754880"/>
+            <a:ext cx="2743200" cy="457200"/>
+          </a:xfrm>
+          <a:prstGeom prst="rect">
+            <a:avLst/>
+          </a:prstGeom>
+          <a:noFill/>
+          <a:ln/>
+        </p:spPr>
+        <p:txBody>
+          <a:bodyPr wrap="square" lIns="0" tIns="0" rIns="0" bIns="0" rtlCol="0" anchor="ctr"/>
+          <a:lstStyle/>
+          <a:p>
+            <a:pPr rtl="1" algn="ctr" indent="0" marL="0">
+              <a:buNone/>
+            </a:pPr>
+            <a:r>
+              <a:rPr lang="ar-SA" altLang="en-US" sz="1150" b="1" dirty="0">
+                <a:solidFill>
+                  <a:srgbClr val="028090"/>
+                </a:solidFill>
+                <a:latin typeface="Arial" pitchFamily="34" charset="0"/>
+                <a:ea typeface="Arial" pitchFamily="34" charset="-122"/>
+                <a:cs typeface="Arial" pitchFamily="34" charset="-120"/>
+              </a:rPr>
+              <a:t>الثورة الحالية منذ 2022</a:t>
+            </a:r>
+            <a:endParaRPr lang="ar-SA" sz="1150" dirty="0"/>
+          </a:p>
+        </p:txBody>
+      </p:sp>
+      <p:sp>
+        <p:nvSpPr>
+          <p:cNvPr id="19" name="Shape 14"/>
+          <p:cNvSpPr/>
+          <p:nvPr/>
+        </p:nvSpPr>
+        <p:spPr>
+          <a:xfrm>
+            <a:off x="426568" y="1508760"/>
+            <a:ext cx="3566160" cy="3931920"/>
+          </a:xfrm>
+          <a:prstGeom prst="roundRect">
+            <a:avLst>
+              <a:gd name="adj" fmla="val 3590"/>
+            </a:avLst>
+          </a:prstGeom>
+          <a:solidFill>
+            <a:srgbClr val="FFFFFF"/>
+          </a:solidFill>
+          <a:ln w="12700">
+            <a:solidFill>
+              <a:srgbClr val="DCE8E8"/>
+            </a:solidFill>
+            <a:prstDash val="solid"/>
+          </a:ln>
           <a:effectLst>
             <a:outerShdw sx="100000" sy="100000" kx="0" ky="0" algn="bl" rotWithShape="0" blurRad="88900" dist="25400" dir="5400000">
               <a:srgbClr val="0E2A32">
@@ -9291,27 +10066,27 @@
       </p:sp>
       <p:sp>
         <p:nvSpPr>
-          <p:cNvPr id="16" name="Shape 11"/>
-          <p:cNvSpPr/>
-          <p:nvPr/>
-        </p:nvSpPr>
-        <p:spPr>
-          <a:xfrm>
-            <a:off x="10644988" y="4398264"/>
-            <a:ext cx="804672" cy="804672"/>
+          <p:cNvPr id="20" name="Shape 15"/>
+          <p:cNvSpPr/>
+          <p:nvPr/>
+        </p:nvSpPr>
+        <p:spPr>
+          <a:xfrm>
+            <a:off x="1706728" y="1874520"/>
+            <a:ext cx="1005840" cy="1005840"/>
           </a:xfrm>
           <a:prstGeom prst="ellipse">
             <a:avLst/>
           </a:prstGeom>
           <a:solidFill>
-            <a:srgbClr val="028090"/>
+            <a:srgbClr val="0E2A32"/>
           </a:solidFill>
           <a:ln/>
         </p:spPr>
       </p:sp>
       <p:pic>
         <p:nvPicPr>
-          <p:cNvPr id="17" name="Image 3" descr="preencoded.png">    </p:cNvPr>
+          <p:cNvPr id="21" name="Image 3" descr="preencoded.png">    </p:cNvPr>
           <p:cNvPicPr>
             <a:picLocks noChangeAspect="1"/>
           </p:cNvPicPr>
@@ -9325,8 +10100,8 @@
         </p:blipFill>
         <p:spPr>
           <a:xfrm>
-            <a:off x="10854202" y="4607479"/>
-            <a:ext cx="386243" cy="386243"/>
+            <a:off x="1968246" y="2136038"/>
+            <a:ext cx="482803" cy="482803"/>
           </a:xfrm>
           <a:prstGeom prst="rect">
             <a:avLst/>
@@ -9335,14 +10110,14 @@
       </p:pic>
       <p:sp>
         <p:nvSpPr>
-          <p:cNvPr id="18" name="Text 12"/>
-          <p:cNvSpPr/>
-          <p:nvPr/>
-        </p:nvSpPr>
-        <p:spPr>
-          <a:xfrm>
-            <a:off x="6530188" y="4114800"/>
-            <a:ext cx="3977640" cy="411480"/>
+          <p:cNvPr id="22" name="Text 16"/>
+          <p:cNvSpPr/>
+          <p:nvPr/>
+        </p:nvSpPr>
+        <p:spPr>
+          <a:xfrm>
+            <a:off x="609448" y="3017520"/>
+            <a:ext cx="3200400" cy="457200"/>
           </a:xfrm>
           <a:prstGeom prst="rect">
             <a:avLst/>
@@ -9354,11 +10129,11 @@
           <a:bodyPr wrap="square" rtlCol="0" anchor="ctr"/>
           <a:lstStyle/>
           <a:p>
-            <a:pPr rtl="1" algn="r" indent="0" marL="0">
-              <a:buNone/>
-            </a:pPr>
-            <a:r>
-              <a:rPr lang="ar-SA" altLang="en-US" sz="1700" b="1" dirty="0">
+            <a:pPr rtl="1" algn="ctr" indent="0" marL="0">
+              <a:buNone/>
+            </a:pPr>
+            <a:r>
+              <a:rPr lang="ar-SA" altLang="en-US" sz="1800" b="1" dirty="0">
                 <a:solidFill>
                   <a:srgbClr val="0E2A32"/>
                 </a:solidFill>
@@ -9366,22 +10141,22 @@
                 <a:ea typeface="Arial" pitchFamily="34" charset="-122"/>
                 <a:cs typeface="Arial" pitchFamily="34" charset="-120"/>
               </a:rPr>
-              <a:t>لوحة المفاتيح</a:t>
-            </a:r>
-            <a:endParaRPr lang="ar-SA" sz="1700" dirty="0"/>
-          </a:p>
-        </p:txBody>
-      </p:sp>
-      <p:sp>
-        <p:nvSpPr>
-          <p:cNvPr id="19" name="Text 13"/>
-          <p:cNvSpPr/>
-          <p:nvPr/>
-        </p:nvSpPr>
-        <p:spPr>
-          <a:xfrm>
-            <a:off x="6530188" y="4572000"/>
-            <a:ext cx="3977640" cy="1005840"/>
+              <a:t>الذكاء العام (AGI)</a:t>
+            </a:r>
+            <a:endParaRPr lang="ar-SA" sz="1800" dirty="0"/>
+          </a:p>
+        </p:txBody>
+      </p:sp>
+      <p:sp>
+        <p:nvSpPr>
+          <p:cNvPr id="23" name="Text 17"/>
+          <p:cNvSpPr/>
+          <p:nvPr/>
+        </p:nvSpPr>
+        <p:spPr>
+          <a:xfrm>
+            <a:off x="700888" y="3520440"/>
+            <a:ext cx="3017520" cy="1143000"/>
           </a:xfrm>
           <a:prstGeom prst="rect">
             <a:avLst/>
@@ -9393,14 +10168,14 @@
           <a:bodyPr wrap="square" rtlCol="0" anchor="ctr"/>
           <a:lstStyle/>
           <a:p>
-            <a:pPr rtl="1" algn="r" indent="0" marL="0">
+            <a:pPr rtl="1" algn="ctr" indent="0" marL="0">
               <a:lnSpc>
                 <a:spcPct val="120000"/>
               </a:lnSpc>
               <a:buNone/>
             </a:pPr>
             <a:r>
-              <a:rPr lang="ar-SA" altLang="en-US" sz="1300" dirty="0">
+              <a:rPr lang="ar-SA" altLang="en-US" sz="1350" dirty="0">
                 <a:solidFill>
                   <a:srgbClr val="587076"/>
                 </a:solidFill>
@@ -9408,95 +10183,83 @@
                 <a:ea typeface="Arial" pitchFamily="34" charset="-122"/>
                 <a:cs typeface="Arial" pitchFamily="34" charset="-120"/>
               </a:rPr>
-              <a:t>التصحيح التلقائي واقتراح الكلمة التالية يتعلمان من أسلوب كتابتك.</a:t>
-            </a:r>
-            <a:endParaRPr lang="ar-SA" sz="1300" dirty="0"/>
-          </a:p>
-        </p:txBody>
-      </p:sp>
-      <p:sp>
-        <p:nvSpPr>
-          <p:cNvPr id="20" name="Shape 14"/>
-          <p:cNvSpPr/>
-          <p:nvPr/>
-        </p:nvSpPr>
-        <p:spPr>
-          <a:xfrm>
-            <a:off x="495148" y="3840480"/>
-            <a:ext cx="5440680" cy="1920240"/>
+              <a:t>آلة تضاهي الإنسان في كل المهام الذهنية وتنقل تعلمها بين المجالات.</a:t>
+            </a:r>
+            <a:endParaRPr lang="ar-SA" sz="1350" dirty="0"/>
+          </a:p>
+        </p:txBody>
+      </p:sp>
+      <p:sp>
+        <p:nvSpPr>
+          <p:cNvPr id="24" name="Shape 18"/>
+          <p:cNvSpPr/>
+          <p:nvPr/>
+        </p:nvSpPr>
+        <p:spPr>
+          <a:xfrm>
+            <a:off x="838048" y="4754880"/>
+            <a:ext cx="2743200" cy="457200"/>
           </a:xfrm>
           <a:prstGeom prst="roundRect">
             <a:avLst>
-              <a:gd name="adj" fmla="val 5714"/>
+              <a:gd name="adj" fmla="val 50000"/>
             </a:avLst>
           </a:prstGeom>
           <a:solidFill>
-            <a:srgbClr val="F2F7F7"/>
-          </a:solidFill>
-          <a:ln/>
-          <a:effectLst>
-            <a:outerShdw sx="100000" sy="100000" kx="0" ky="0" algn="bl" rotWithShape="0" blurRad="88900" dist="25400" dir="5400000">
-              <a:srgbClr val="0E2A32">
-                <a:alpha val="16000"/>
-              </a:srgbClr>
-            </a:outerShdw>
-          </a:effectLst>
-        </p:spPr>
-      </p:sp>
-      <p:sp>
-        <p:nvSpPr>
-          <p:cNvPr id="21" name="Shape 15"/>
-          <p:cNvSpPr/>
-          <p:nvPr/>
-        </p:nvSpPr>
-        <p:spPr>
-          <a:xfrm>
-            <a:off x="4884268" y="4398264"/>
-            <a:ext cx="804672" cy="804672"/>
-          </a:xfrm>
-          <a:prstGeom prst="ellipse">
-            <a:avLst/>
-          </a:prstGeom>
-          <a:solidFill>
-            <a:srgbClr val="028090"/>
-          </a:solidFill>
-          <a:ln/>
-        </p:spPr>
-      </p:sp>
-      <p:pic>
-        <p:nvPicPr>
-          <p:cNvPr id="22" name="Image 4" descr="preencoded.png">    </p:cNvPr>
-          <p:cNvPicPr>
-            <a:picLocks noChangeAspect="1"/>
-          </p:cNvPicPr>
-          <p:nvPr/>
-        </p:nvPicPr>
-        <p:blipFill>
-          <a:blip r:embed="rId5"/>
-          <a:stretch>
-            <a:fillRect/>
-          </a:stretch>
-        </p:blipFill>
-        <p:spPr>
-          <a:xfrm>
-            <a:off x="5093482" y="4607479"/>
-            <a:ext cx="386243" cy="386243"/>
-          </a:xfrm>
-          <a:prstGeom prst="rect">
-            <a:avLst/>
-          </a:prstGeom>
-        </p:spPr>
-      </p:pic>
-      <p:sp>
-        <p:nvSpPr>
-          <p:cNvPr id="23" name="Text 16"/>
-          <p:cNvSpPr/>
-          <p:nvPr/>
-        </p:nvSpPr>
-        <p:spPr>
-          <a:xfrm>
-            <a:off x="769468" y="4114800"/>
-            <a:ext cx="3977640" cy="411480"/>
+            <a:srgbClr val="EDF1F2"/>
+          </a:solidFill>
+          <a:ln/>
+        </p:spPr>
+      </p:sp>
+      <p:sp>
+        <p:nvSpPr>
+          <p:cNvPr id="25" name="Text 19"/>
+          <p:cNvSpPr/>
+          <p:nvPr/>
+        </p:nvSpPr>
+        <p:spPr>
+          <a:xfrm>
+            <a:off x="838048" y="4754880"/>
+            <a:ext cx="2743200" cy="457200"/>
+          </a:xfrm>
+          <a:prstGeom prst="rect">
+            <a:avLst/>
+          </a:prstGeom>
+          <a:noFill/>
+          <a:ln/>
+        </p:spPr>
+        <p:txBody>
+          <a:bodyPr wrap="square" lIns="0" tIns="0" rIns="0" bIns="0" rtlCol="0" anchor="ctr"/>
+          <a:lstStyle/>
+          <a:p>
+            <a:pPr rtl="1" algn="ctr" indent="0" marL="0">
+              <a:buNone/>
+            </a:pPr>
+            <a:r>
+              <a:rPr lang="ar-SA" altLang="en-US" sz="1150" b="1" dirty="0">
+                <a:solidFill>
+                  <a:srgbClr val="0E2A32"/>
+                </a:solidFill>
+                <a:latin typeface="Arial" pitchFamily="34" charset="0"/>
+                <a:ea typeface="Arial" pitchFamily="34" charset="-122"/>
+                <a:cs typeface="Arial" pitchFamily="34" charset="-120"/>
+              </a:rPr>
+              <a:t>لم يتحقق بعد — هدف بحثي</a:t>
+            </a:r>
+            <a:endParaRPr lang="ar-SA" sz="1150" dirty="0"/>
+          </a:p>
+        </p:txBody>
+      </p:sp>
+      <p:sp>
+        <p:nvSpPr>
+          <p:cNvPr id="26" name="Text 20"/>
+          <p:cNvSpPr/>
+          <p:nvPr/>
+        </p:nvSpPr>
+        <p:spPr>
+          <a:xfrm>
+            <a:off x="548640" y="5760720"/>
+            <a:ext cx="11094415" cy="411480"/>
           </a:xfrm>
           <a:prstGeom prst="rect">
             <a:avLst/>
@@ -9508,87 +10271,6 @@
           <a:bodyPr wrap="square" rtlCol="0" anchor="ctr"/>
           <a:lstStyle/>
           <a:p>
-            <a:pPr rtl="1" algn="r" indent="0" marL="0">
-              <a:buNone/>
-            </a:pPr>
-            <a:r>
-              <a:rPr lang="ar-SA" altLang="en-US" sz="1700" b="1" dirty="0">
-                <a:solidFill>
-                  <a:srgbClr val="0E2A32"/>
-                </a:solidFill>
-                <a:latin typeface="Arial" pitchFamily="34" charset="0"/>
-                <a:ea typeface="Arial" pitchFamily="34" charset="-122"/>
-                <a:cs typeface="Arial" pitchFamily="34" charset="-120"/>
-              </a:rPr>
-              <a:t>الخرائط والملاحة</a:t>
-            </a:r>
-            <a:endParaRPr lang="ar-SA" sz="1700" dirty="0"/>
-          </a:p>
-        </p:txBody>
-      </p:sp>
-      <p:sp>
-        <p:nvSpPr>
-          <p:cNvPr id="24" name="Text 17"/>
-          <p:cNvSpPr/>
-          <p:nvPr/>
-        </p:nvSpPr>
-        <p:spPr>
-          <a:xfrm>
-            <a:off x="769468" y="4572000"/>
-            <a:ext cx="3977640" cy="1005840"/>
-          </a:xfrm>
-          <a:prstGeom prst="rect">
-            <a:avLst/>
-          </a:prstGeom>
-          <a:noFill/>
-          <a:ln/>
-        </p:spPr>
-        <p:txBody>
-          <a:bodyPr wrap="square" rtlCol="0" anchor="ctr"/>
-          <a:lstStyle/>
-          <a:p>
-            <a:pPr rtl="1" algn="r" indent="0" marL="0">
-              <a:lnSpc>
-                <a:spcPct val="120000"/>
-              </a:lnSpc>
-              <a:buNone/>
-            </a:pPr>
-            <a:r>
-              <a:rPr lang="ar-SA" altLang="en-US" sz="1300" dirty="0">
-                <a:solidFill>
-                  <a:srgbClr val="587076"/>
-                </a:solidFill>
-                <a:latin typeface="Arial" pitchFamily="34" charset="0"/>
-                <a:ea typeface="Arial" pitchFamily="34" charset="-122"/>
-                <a:cs typeface="Arial" pitchFamily="34" charset="-120"/>
-              </a:rPr>
-              <a:t>حساب أسرع طريق وتوقع الازدحام لحظياً من بيانات ملايين الهواتف.</a:t>
-            </a:r>
-            <a:endParaRPr lang="ar-SA" sz="1300" dirty="0"/>
-          </a:p>
-        </p:txBody>
-      </p:sp>
-      <p:sp>
-        <p:nvSpPr>
-          <p:cNvPr id="25" name="Text 18"/>
-          <p:cNvSpPr/>
-          <p:nvPr/>
-        </p:nvSpPr>
-        <p:spPr>
-          <a:xfrm>
-            <a:off x="548640" y="6080760"/>
-            <a:ext cx="11094415" cy="411480"/>
-          </a:xfrm>
-          <a:prstGeom prst="rect">
-            <a:avLst/>
-          </a:prstGeom>
-          <a:noFill/>
-          <a:ln/>
-        </p:spPr>
-        <p:txBody>
-          <a:bodyPr wrap="square" rtlCol="0" anchor="ctr"/>
-          <a:lstStyle/>
-          <a:p>
             <a:pPr rtl="1" algn="ctr" indent="0" marL="0">
               <a:buNone/>
             </a:pPr>
@@ -9601,7 +10283,7 @@
                 <a:ea typeface="Arial" pitchFamily="34" charset="-122"/>
                 <a:cs typeface="Arial" pitchFamily="34" charset="-120"/>
               </a:rPr>
-              <a:t>هاتفك يستخدم الذكاء الاصطناعي عشرات المرات يومياً — غالباً دون أن تلاحظ.</a:t>
+              <a:t>كل ما تستخدمه اليوم هو ذكاء «ضيق» أو «توليدي» — الذكاء العام ما زال في المختبرات وأفلام الخيال.</a:t>
             </a:r>
             <a:endParaRPr lang="ar-SA" sz="1400" dirty="0"/>
           </a:p>
@@ -9716,7 +10398,7 @@
                 <a:ea typeface="Arial" pitchFamily="34" charset="-122"/>
                 <a:cs typeface="Arial" pitchFamily="34" charset="-120"/>
               </a:rPr>
-              <a:t>الترفيه والتواصل الاجتماعي</a:t>
+              <a:t>في جيبك: هاتفك الذكي</a:t>
             </a:r>
             <a:endParaRPr lang="ar-SA" sz="3100" dirty="0"/>
           </a:p>
@@ -9730,8 +10412,37 @@
         </p:nvSpPr>
         <p:spPr>
           <a:xfrm>
-            <a:off x="10865815" y="1673352"/>
-            <a:ext cx="777240" cy="777240"/>
+            <a:off x="6255868" y="1600200"/>
+            <a:ext cx="5440680" cy="1920240"/>
+          </a:xfrm>
+          <a:prstGeom prst="roundRect">
+            <a:avLst>
+              <a:gd name="adj" fmla="val 5714"/>
+            </a:avLst>
+          </a:prstGeom>
+          <a:solidFill>
+            <a:srgbClr val="F2F7F7"/>
+          </a:solidFill>
+          <a:ln/>
+          <a:effectLst>
+            <a:outerShdw sx="100000" sy="100000" kx="0" ky="0" algn="bl" rotWithShape="0" blurRad="88900" dist="25400" dir="5400000">
+              <a:srgbClr val="0E2A32">
+                <a:alpha val="16000"/>
+              </a:srgbClr>
+            </a:outerShdw>
+          </a:effectLst>
+        </p:spPr>
+      </p:sp>
+      <p:sp>
+        <p:nvSpPr>
+          <p:cNvPr id="6" name="Shape 3"/>
+          <p:cNvSpPr/>
+          <p:nvPr/>
+        </p:nvSpPr>
+        <p:spPr>
+          <a:xfrm>
+            <a:off x="10644988" y="2157984"/>
+            <a:ext cx="804672" cy="804672"/>
           </a:xfrm>
           <a:prstGeom prst="ellipse">
             <a:avLst/>
@@ -9744,7 +10455,7 @@
       </p:sp>
       <p:pic>
         <p:nvPicPr>
-          <p:cNvPr id="6" name="Image 1" descr="preencoded.png">    </p:cNvPr>
+          <p:cNvPr id="7" name="Image 1" descr="preencoded.png">    </p:cNvPr>
           <p:cNvPicPr>
             <a:picLocks noChangeAspect="1"/>
           </p:cNvPicPr>
@@ -9758,8 +10469,8 @@
         </p:blipFill>
         <p:spPr>
           <a:xfrm>
-            <a:off x="11067898" y="1875434"/>
-            <a:ext cx="373075" cy="373075"/>
+            <a:off x="10854202" y="2367199"/>
+            <a:ext cx="386243" cy="386243"/>
           </a:xfrm>
           <a:prstGeom prst="rect">
             <a:avLst/>
@@ -9768,14 +10479,14 @@
       </p:pic>
       <p:sp>
         <p:nvSpPr>
-          <p:cNvPr id="7" name="Text 3"/>
-          <p:cNvSpPr/>
-          <p:nvPr/>
-        </p:nvSpPr>
-        <p:spPr>
-          <a:xfrm>
-            <a:off x="1828800" y="1554480"/>
-            <a:ext cx="8762695" cy="384048"/>
+          <p:cNvPr id="8" name="Text 4"/>
+          <p:cNvSpPr/>
+          <p:nvPr/>
+        </p:nvSpPr>
+        <p:spPr>
+          <a:xfrm>
+            <a:off x="6530188" y="1874520"/>
+            <a:ext cx="3977640" cy="411480"/>
           </a:xfrm>
           <a:prstGeom prst="rect">
             <a:avLst/>
@@ -9791,7 +10502,7 @@
               <a:buNone/>
             </a:pPr>
             <a:r>
-              <a:rPr lang="ar-SA" altLang="en-US" sz="1650" b="1" dirty="0">
+              <a:rPr lang="ar-SA" altLang="en-US" sz="1700" b="1" dirty="0">
                 <a:solidFill>
                   <a:srgbClr val="0E2A32"/>
                 </a:solidFill>
@@ -9799,22 +10510,22 @@
                 <a:ea typeface="Arial" pitchFamily="34" charset="-122"/>
                 <a:cs typeface="Arial" pitchFamily="34" charset="-120"/>
               </a:rPr>
-              <a:t>التوصيات الذكية</a:t>
-            </a:r>
-            <a:endParaRPr lang="ar-SA" sz="1650" dirty="0"/>
-          </a:p>
-        </p:txBody>
-      </p:sp>
-      <p:sp>
-        <p:nvSpPr>
-          <p:cNvPr id="8" name="Text 4"/>
-          <p:cNvSpPr/>
-          <p:nvPr/>
-        </p:nvSpPr>
-        <p:spPr>
-          <a:xfrm>
-            <a:off x="1828800" y="1938528"/>
-            <a:ext cx="8762695" cy="640080"/>
+              <a:t>المساعد الصوتي</a:t>
+            </a:r>
+            <a:endParaRPr lang="ar-SA" sz="1700" dirty="0"/>
+          </a:p>
+        </p:txBody>
+      </p:sp>
+      <p:sp>
+        <p:nvSpPr>
+          <p:cNvPr id="9" name="Text 5"/>
+          <p:cNvSpPr/>
+          <p:nvPr/>
+        </p:nvSpPr>
+        <p:spPr>
+          <a:xfrm>
+            <a:off x="6530188" y="2331720"/>
+            <a:ext cx="3977640" cy="1005840"/>
           </a:xfrm>
           <a:prstGeom prst="rect">
             <a:avLst/>
@@ -9828,7 +10539,7 @@
           <a:p>
             <a:pPr rtl="1" algn="r" indent="0" marL="0">
               <a:lnSpc>
-                <a:spcPct val="115000"/>
+                <a:spcPct val="120000"/>
               </a:lnSpc>
               <a:buNone/>
             </a:pPr>
@@ -9841,7 +10552,7 @@
                 <a:ea typeface="Arial" pitchFamily="34" charset="-122"/>
                 <a:cs typeface="Arial" pitchFamily="34" charset="-120"/>
               </a:rPr>
-              <a:t>Netflix وYouTube يحللان ما شاهدته ليقترحا ما يناسب ذوقك — 80% من المشاهدات على Netflix تأتي من التوصيات.</a:t>
+              <a:t>Siri وGoogle Assistant يحولان كلامك إلى نص ويفهمان طلبك وينفذانه.</a:t>
             </a:r>
             <a:endParaRPr lang="ar-SA" sz="1300" dirty="0"/>
           </a:p>
@@ -9849,27 +10560,56 @@
       </p:sp>
       <p:sp>
         <p:nvSpPr>
-          <p:cNvPr id="9" name="Shape 5"/>
-          <p:cNvSpPr/>
-          <p:nvPr/>
-        </p:nvSpPr>
-        <p:spPr>
-          <a:xfrm>
-            <a:off x="10865815" y="2862072"/>
-            <a:ext cx="777240" cy="777240"/>
+          <p:cNvPr id="10" name="Shape 6"/>
+          <p:cNvSpPr/>
+          <p:nvPr/>
+        </p:nvSpPr>
+        <p:spPr>
+          <a:xfrm>
+            <a:off x="495148" y="1600200"/>
+            <a:ext cx="5440680" cy="1920240"/>
+          </a:xfrm>
+          <a:prstGeom prst="roundRect">
+            <a:avLst>
+              <a:gd name="adj" fmla="val 5714"/>
+            </a:avLst>
+          </a:prstGeom>
+          <a:solidFill>
+            <a:srgbClr val="F2F7F7"/>
+          </a:solidFill>
+          <a:ln/>
+          <a:effectLst>
+            <a:outerShdw sx="100000" sy="100000" kx="0" ky="0" algn="bl" rotWithShape="0" blurRad="88900" dist="25400" dir="5400000">
+              <a:srgbClr val="0E2A32">
+                <a:alpha val="16000"/>
+              </a:srgbClr>
+            </a:outerShdw>
+          </a:effectLst>
+        </p:spPr>
+      </p:sp>
+      <p:sp>
+        <p:nvSpPr>
+          <p:cNvPr id="11" name="Shape 7"/>
+          <p:cNvSpPr/>
+          <p:nvPr/>
+        </p:nvSpPr>
+        <p:spPr>
+          <a:xfrm>
+            <a:off x="4884268" y="2157984"/>
+            <a:ext cx="804672" cy="804672"/>
           </a:xfrm>
           <a:prstGeom prst="ellipse">
             <a:avLst/>
           </a:prstGeom>
           <a:solidFill>
-            <a:srgbClr val="00A896"/>
+            <a:srgbClr val="028090"/>
           </a:solidFill>
           <a:ln/>
         </p:spPr>
       </p:sp>
       <p:pic>
         <p:nvPicPr>
-          <p:cNvPr id="10" name="Image 2" descr="preencoded.png">    </p:cNvPr>
+          <p:cNvPr id="12" name="Image 2" descr="preencoded.png">    </p:cNvPr>
           <p:cNvPicPr>
             <a:picLocks noChangeAspect="1"/>
           </p:cNvPicPr>
@@ -9883,8 +10623,8 @@
         </p:blipFill>
         <p:spPr>
           <a:xfrm>
-            <a:off x="11067898" y="3064154"/>
-            <a:ext cx="373075" cy="373075"/>
+            <a:off x="5093482" y="2367199"/>
+            <a:ext cx="386243" cy="386243"/>
           </a:xfrm>
           <a:prstGeom prst="rect">
             <a:avLst/>
@@ -9893,14 +10633,14 @@
       </p:pic>
       <p:sp>
         <p:nvSpPr>
-          <p:cNvPr id="11" name="Text 6"/>
-          <p:cNvSpPr/>
-          <p:nvPr/>
-        </p:nvSpPr>
-        <p:spPr>
-          <a:xfrm>
-            <a:off x="1828800" y="2743200"/>
-            <a:ext cx="8762695" cy="384048"/>
+          <p:cNvPr id="13" name="Text 8"/>
+          <p:cNvSpPr/>
+          <p:nvPr/>
+        </p:nvSpPr>
+        <p:spPr>
+          <a:xfrm>
+            <a:off x="769468" y="1874520"/>
+            <a:ext cx="3977640" cy="411480"/>
           </a:xfrm>
           <a:prstGeom prst="rect">
             <a:avLst/>
@@ -9916,7 +10656,7 @@
               <a:buNone/>
             </a:pPr>
             <a:r>
-              <a:rPr lang="ar-SA" altLang="en-US" sz="1650" b="1" dirty="0">
+              <a:rPr lang="ar-SA" altLang="en-US" sz="1700" b="1" dirty="0">
                 <a:solidFill>
                   <a:srgbClr val="0E2A32"/>
                 </a:solidFill>
@@ -9924,22 +10664,22 @@
                 <a:ea typeface="Arial" pitchFamily="34" charset="-122"/>
                 <a:cs typeface="Arial" pitchFamily="34" charset="-120"/>
               </a:rPr>
-              <a:t>خلاصة التواصل الاجتماعي</a:t>
-            </a:r>
-            <a:endParaRPr lang="ar-SA" sz="1650" dirty="0"/>
-          </a:p>
-        </p:txBody>
-      </p:sp>
-      <p:sp>
-        <p:nvSpPr>
-          <p:cNvPr id="12" name="Text 7"/>
-          <p:cNvSpPr/>
-          <p:nvPr/>
-        </p:nvSpPr>
-        <p:spPr>
-          <a:xfrm>
-            <a:off x="1828800" y="3127248"/>
-            <a:ext cx="8762695" cy="640080"/>
+              <a:t>الكاميرا والصور</a:t>
+            </a:r>
+            <a:endParaRPr lang="ar-SA" sz="1700" dirty="0"/>
+          </a:p>
+        </p:txBody>
+      </p:sp>
+      <p:sp>
+        <p:nvSpPr>
+          <p:cNvPr id="14" name="Text 9"/>
+          <p:cNvSpPr/>
+          <p:nvPr/>
+        </p:nvSpPr>
+        <p:spPr>
+          <a:xfrm>
+            <a:off x="769468" y="2331720"/>
+            <a:ext cx="3977640" cy="1005840"/>
           </a:xfrm>
           <a:prstGeom prst="rect">
             <a:avLst/>
@@ -9953,7 +10693,7 @@
           <a:p>
             <a:pPr rtl="1" algn="r" indent="0" marL="0">
               <a:lnSpc>
-                <a:spcPct val="115000"/>
+                <a:spcPct val="120000"/>
               </a:lnSpc>
               <a:buNone/>
             </a:pPr>
@@ -9966,7 +10706,7 @@
                 <a:ea typeface="Arial" pitchFamily="34" charset="-122"/>
                 <a:cs typeface="Arial" pitchFamily="34" charset="-120"/>
               </a:rPr>
-              <a:t>ترتيب المنشورات، فلاتر الصور، واكتشاف المحتوى المخالف — كلها خوارزميات تعلم آلي.</a:t>
+              <a:t>تحسين تلقائي للإضاءة، وضع ليلي، وفتح القفل ببصمة الوجه.</a:t>
             </a:r>
             <a:endParaRPr lang="ar-SA" sz="1300" dirty="0"/>
           </a:p>
@@ -9974,14 +10714,43 @@
       </p:sp>
       <p:sp>
         <p:nvSpPr>
-          <p:cNvPr id="13" name="Shape 8"/>
-          <p:cNvSpPr/>
-          <p:nvPr/>
-        </p:nvSpPr>
-        <p:spPr>
-          <a:xfrm>
-            <a:off x="10865815" y="4050792"/>
-            <a:ext cx="777240" cy="777240"/>
+          <p:cNvPr id="15" name="Shape 10"/>
+          <p:cNvSpPr/>
+          <p:nvPr/>
+        </p:nvSpPr>
+        <p:spPr>
+          <a:xfrm>
+            <a:off x="6255868" y="3840480"/>
+            <a:ext cx="5440680" cy="1920240"/>
+          </a:xfrm>
+          <a:prstGeom prst="roundRect">
+            <a:avLst>
+              <a:gd name="adj" fmla="val 5714"/>
+            </a:avLst>
+          </a:prstGeom>
+          <a:solidFill>
+            <a:srgbClr val="F2F7F7"/>
+          </a:solidFill>
+          <a:ln/>
+          <a:effectLst>
+            <a:outerShdw sx="100000" sy="100000" kx="0" ky="0" algn="bl" rotWithShape="0" blurRad="88900" dist="25400" dir="5400000">
+              <a:srgbClr val="0E2A32">
+                <a:alpha val="16000"/>
+              </a:srgbClr>
+            </a:outerShdw>
+          </a:effectLst>
+        </p:spPr>
+      </p:sp>
+      <p:sp>
+        <p:nvSpPr>
+          <p:cNvPr id="16" name="Shape 11"/>
+          <p:cNvSpPr/>
+          <p:nvPr/>
+        </p:nvSpPr>
+        <p:spPr>
+          <a:xfrm>
+            <a:off x="10644988" y="4398264"/>
+            <a:ext cx="804672" cy="804672"/>
           </a:xfrm>
           <a:prstGeom prst="ellipse">
             <a:avLst/>
@@ -9994,7 +10763,7 @@
       </p:sp>
       <p:pic>
         <p:nvPicPr>
-          <p:cNvPr id="14" name="Image 3" descr="preencoded.png">    </p:cNvPr>
+          <p:cNvPr id="17" name="Image 3" descr="preencoded.png">    </p:cNvPr>
           <p:cNvPicPr>
             <a:picLocks noChangeAspect="1"/>
           </p:cNvPicPr>
@@ -10008,8 +10777,8 @@
         </p:blipFill>
         <p:spPr>
           <a:xfrm>
-            <a:off x="11067898" y="4252874"/>
-            <a:ext cx="373075" cy="373075"/>
+            <a:off x="10854202" y="4607479"/>
+            <a:ext cx="386243" cy="386243"/>
           </a:xfrm>
           <a:prstGeom prst="rect">
             <a:avLst/>
@@ -10018,14 +10787,14 @@
       </p:pic>
       <p:sp>
         <p:nvSpPr>
-          <p:cNvPr id="15" name="Text 9"/>
-          <p:cNvSpPr/>
-          <p:nvPr/>
-        </p:nvSpPr>
-        <p:spPr>
-          <a:xfrm>
-            <a:off x="1828800" y="3931920"/>
-            <a:ext cx="8762695" cy="384048"/>
+          <p:cNvPr id="18" name="Text 12"/>
+          <p:cNvSpPr/>
+          <p:nvPr/>
+        </p:nvSpPr>
+        <p:spPr>
+          <a:xfrm>
+            <a:off x="6530188" y="4114800"/>
+            <a:ext cx="3977640" cy="411480"/>
           </a:xfrm>
           <a:prstGeom prst="rect">
             <a:avLst/>
@@ -10041,7 +10810,7 @@
               <a:buNone/>
             </a:pPr>
             <a:r>
-              <a:rPr lang="ar-SA" altLang="en-US" sz="1650" b="1" dirty="0">
+              <a:rPr lang="ar-SA" altLang="en-US" sz="1700" b="1" dirty="0">
                 <a:solidFill>
                   <a:srgbClr val="0E2A32"/>
                 </a:solidFill>
@@ -10049,22 +10818,22 @@
                 <a:ea typeface="Arial" pitchFamily="34" charset="-122"/>
                 <a:cs typeface="Arial" pitchFamily="34" charset="-120"/>
               </a:rPr>
-              <a:t>الترجمة الفورية</a:t>
-            </a:r>
-            <a:endParaRPr lang="ar-SA" sz="1650" dirty="0"/>
-          </a:p>
-        </p:txBody>
-      </p:sp>
-      <p:sp>
-        <p:nvSpPr>
-          <p:cNvPr id="16" name="Text 10"/>
-          <p:cNvSpPr/>
-          <p:nvPr/>
-        </p:nvSpPr>
-        <p:spPr>
-          <a:xfrm>
-            <a:off x="1828800" y="4315968"/>
-            <a:ext cx="8762695" cy="640080"/>
+              <a:t>لوحة المفاتيح</a:t>
+            </a:r>
+            <a:endParaRPr lang="ar-SA" sz="1700" dirty="0"/>
+          </a:p>
+        </p:txBody>
+      </p:sp>
+      <p:sp>
+        <p:nvSpPr>
+          <p:cNvPr id="19" name="Text 13"/>
+          <p:cNvSpPr/>
+          <p:nvPr/>
+        </p:nvSpPr>
+        <p:spPr>
+          <a:xfrm>
+            <a:off x="6530188" y="4572000"/>
+            <a:ext cx="3977640" cy="1005840"/>
           </a:xfrm>
           <a:prstGeom prst="rect">
             <a:avLst/>
@@ -10078,7 +10847,7 @@
           <a:p>
             <a:pPr rtl="1" algn="r" indent="0" marL="0">
               <a:lnSpc>
-                <a:spcPct val="115000"/>
+                <a:spcPct val="120000"/>
               </a:lnSpc>
               <a:buNone/>
             </a:pPr>
@@ -10091,7 +10860,7 @@
                 <a:ea typeface="Arial" pitchFamily="34" charset="-122"/>
                 <a:cs typeface="Arial" pitchFamily="34" charset="-120"/>
               </a:rPr>
-              <a:t>ترجمة نص وصوت وصورة بين أكثر من 100 لغة في ثوانٍ، وكسر حاجز اللغة في السفر والدراسة.</a:t>
+              <a:t>التصحيح التلقائي واقتراح الكلمة التالية يتعلمان من أسلوب كتابتك.</a:t>
             </a:r>
             <a:endParaRPr lang="ar-SA" sz="1300" dirty="0"/>
           </a:p>
@@ -10099,27 +10868,56 @@
       </p:sp>
       <p:sp>
         <p:nvSpPr>
-          <p:cNvPr id="17" name="Shape 11"/>
-          <p:cNvSpPr/>
-          <p:nvPr/>
-        </p:nvSpPr>
-        <p:spPr>
-          <a:xfrm>
-            <a:off x="10865815" y="5239512"/>
-            <a:ext cx="777240" cy="777240"/>
+          <p:cNvPr id="20" name="Shape 14"/>
+          <p:cNvSpPr/>
+          <p:nvPr/>
+        </p:nvSpPr>
+        <p:spPr>
+          <a:xfrm>
+            <a:off x="495148" y="3840480"/>
+            <a:ext cx="5440680" cy="1920240"/>
+          </a:xfrm>
+          <a:prstGeom prst="roundRect">
+            <a:avLst>
+              <a:gd name="adj" fmla="val 5714"/>
+            </a:avLst>
+          </a:prstGeom>
+          <a:solidFill>
+            <a:srgbClr val="F2F7F7"/>
+          </a:solidFill>
+          <a:ln/>
+          <a:effectLst>
+            <a:outerShdw sx="100000" sy="100000" kx="0" ky="0" algn="bl" rotWithShape="0" blurRad="88900" dist="25400" dir="5400000">
+              <a:srgbClr val="0E2A32">
+                <a:alpha val="16000"/>
+              </a:srgbClr>
+            </a:outerShdw>
+          </a:effectLst>
+        </p:spPr>
+      </p:sp>
+      <p:sp>
+        <p:nvSpPr>
+          <p:cNvPr id="21" name="Shape 15"/>
+          <p:cNvSpPr/>
+          <p:nvPr/>
+        </p:nvSpPr>
+        <p:spPr>
+          <a:xfrm>
+            <a:off x="4884268" y="4398264"/>
+            <a:ext cx="804672" cy="804672"/>
           </a:xfrm>
           <a:prstGeom prst="ellipse">
             <a:avLst/>
           </a:prstGeom>
           <a:solidFill>
-            <a:srgbClr val="00A896"/>
+            <a:srgbClr val="028090"/>
           </a:solidFill>
           <a:ln/>
         </p:spPr>
       </p:sp>
       <p:pic>
         <p:nvPicPr>
-          <p:cNvPr id="18" name="Image 4" descr="preencoded.png">    </p:cNvPr>
+          <p:cNvPr id="22" name="Image 4" descr="preencoded.png">    </p:cNvPr>
           <p:cNvPicPr>
             <a:picLocks noChangeAspect="1"/>
           </p:cNvPicPr>
@@ -10133,8 +10931,8 @@
         </p:blipFill>
         <p:spPr>
           <a:xfrm>
-            <a:off x="11067898" y="5441594"/>
-            <a:ext cx="373075" cy="373075"/>
+            <a:off x="5093482" y="4607479"/>
+            <a:ext cx="386243" cy="386243"/>
           </a:xfrm>
           <a:prstGeom prst="rect">
             <a:avLst/>
@@ -10143,14 +10941,14 @@
       </p:pic>
       <p:sp>
         <p:nvSpPr>
-          <p:cNvPr id="19" name="Text 12"/>
-          <p:cNvSpPr/>
-          <p:nvPr/>
-        </p:nvSpPr>
-        <p:spPr>
-          <a:xfrm>
-            <a:off x="1828800" y="5120640"/>
-            <a:ext cx="8762695" cy="384048"/>
+          <p:cNvPr id="23" name="Text 16"/>
+          <p:cNvSpPr/>
+          <p:nvPr/>
+        </p:nvSpPr>
+        <p:spPr>
+          <a:xfrm>
+            <a:off x="769468" y="4114800"/>
+            <a:ext cx="3977640" cy="411480"/>
           </a:xfrm>
           <a:prstGeom prst="rect">
             <a:avLst/>
@@ -10166,7 +10964,7 @@
               <a:buNone/>
             </a:pPr>
             <a:r>
-              <a:rPr lang="ar-SA" altLang="en-US" sz="1650" b="1" dirty="0">
+              <a:rPr lang="ar-SA" altLang="en-US" sz="1700" b="1" dirty="0">
                 <a:solidFill>
                   <a:srgbClr val="0E2A32"/>
                 </a:solidFill>
@@ -10174,22 +10972,22 @@
                 <a:ea typeface="Arial" pitchFamily="34" charset="-122"/>
                 <a:cs typeface="Arial" pitchFamily="34" charset="-120"/>
               </a:rPr>
-              <a:t>الموسيقى والألعاب</a:t>
-            </a:r>
-            <a:endParaRPr lang="ar-SA" sz="1650" dirty="0"/>
-          </a:p>
-        </p:txBody>
-      </p:sp>
-      <p:sp>
-        <p:nvSpPr>
-          <p:cNvPr id="20" name="Text 13"/>
-          <p:cNvSpPr/>
-          <p:nvPr/>
-        </p:nvSpPr>
-        <p:spPr>
-          <a:xfrm>
-            <a:off x="1828800" y="5504688"/>
-            <a:ext cx="8762695" cy="640080"/>
+              <a:t>الخرائط والملاحة</a:t>
+            </a:r>
+            <a:endParaRPr lang="ar-SA" sz="1700" dirty="0"/>
+          </a:p>
+        </p:txBody>
+      </p:sp>
+      <p:sp>
+        <p:nvSpPr>
+          <p:cNvPr id="24" name="Text 17"/>
+          <p:cNvSpPr/>
+          <p:nvPr/>
+        </p:nvSpPr>
+        <p:spPr>
+          <a:xfrm>
+            <a:off x="769468" y="4572000"/>
+            <a:ext cx="3977640" cy="1005840"/>
           </a:xfrm>
           <a:prstGeom prst="rect">
             <a:avLst/>
@@ -10203,7 +11001,7 @@
           <a:p>
             <a:pPr rtl="1" algn="r" indent="0" marL="0">
               <a:lnSpc>
-                <a:spcPct val="115000"/>
+                <a:spcPct val="120000"/>
               </a:lnSpc>
               <a:buNone/>
             </a:pPr>
@@ -10216,7 +11014,7 @@
                 <a:ea typeface="Arial" pitchFamily="34" charset="-122"/>
                 <a:cs typeface="Arial" pitchFamily="34" charset="-120"/>
               </a:rPr>
-              <a:t>قوائم Spotify الأسبوعية المخصصة لك، وخصوم أذكياء يتكيفون مع مستواك في الألعاب.</a:t>
+              <a:t>حساب أسرع طريق وتوقع الازدحام لحظياً من بيانات ملايين الهواتف.</a:t>
             </a:r>
             <a:endParaRPr lang="ar-SA" sz="1300" dirty="0"/>
           </a:p>
@@ -10224,111 +11022,40 @@
       </p:sp>
       <p:sp>
         <p:nvSpPr>
-          <p:cNvPr id="21" name="Shape 14"/>
-          <p:cNvSpPr/>
-          <p:nvPr/>
-        </p:nvSpPr>
-        <p:spPr>
-          <a:xfrm>
-            <a:off x="548640" y="2148840"/>
-            <a:ext cx="1417320" cy="2651760"/>
-          </a:xfrm>
-          <a:prstGeom prst="roundRect">
-            <a:avLst>
-              <a:gd name="adj" fmla="val 7742"/>
-            </a:avLst>
-          </a:prstGeom>
-          <a:solidFill>
-            <a:srgbClr val="0E2A32"/>
-          </a:solidFill>
-          <a:ln/>
-          <a:effectLst>
-            <a:outerShdw sx="100000" sy="100000" kx="0" ky="0" algn="bl" rotWithShape="0" blurRad="88900" dist="25400" dir="5400000">
-              <a:srgbClr val="0E2A32">
-                <a:alpha val="16000"/>
-              </a:srgbClr>
-            </a:outerShdw>
-          </a:effectLst>
-        </p:spPr>
-      </p:sp>
-      <p:sp>
-        <p:nvSpPr>
-          <p:cNvPr id="22" name="Text 15"/>
-          <p:cNvSpPr/>
-          <p:nvPr/>
-        </p:nvSpPr>
-        <p:spPr>
-          <a:xfrm>
-            <a:off x="548640" y="2514600"/>
-            <a:ext cx="1417320" cy="822960"/>
-          </a:xfrm>
-          <a:prstGeom prst="rect">
-            <a:avLst/>
-          </a:prstGeom>
-          <a:noFill/>
-          <a:ln/>
-        </p:spPr>
-        <p:txBody>
-          <a:bodyPr wrap="square" lIns="0" tIns="0" rIns="0" bIns="0" rtlCol="0" anchor="ctr"/>
+          <p:cNvPr id="25" name="Text 18"/>
+          <p:cNvSpPr/>
+          <p:nvPr/>
+        </p:nvSpPr>
+        <p:spPr>
+          <a:xfrm>
+            <a:off x="548640" y="6080760"/>
+            <a:ext cx="11094415" cy="411480"/>
+          </a:xfrm>
+          <a:prstGeom prst="rect">
+            <a:avLst/>
+          </a:prstGeom>
+          <a:noFill/>
+          <a:ln/>
+        </p:spPr>
+        <p:txBody>
+          <a:bodyPr wrap="square" rtlCol="0" anchor="ctr"/>
           <a:lstStyle/>
           <a:p>
             <a:pPr rtl="1" algn="ctr" indent="0" marL="0">
               <a:buNone/>
             </a:pPr>
             <a:r>
-              <a:rPr lang="ar-SA" altLang="en-US" sz="4000" b="1" dirty="0">
-                <a:solidFill>
-                  <a:srgbClr val="02C39A"/>
-                </a:solidFill>
-                <a:latin typeface="Arial" pitchFamily="34" charset="0"/>
-                <a:ea typeface="Arial" pitchFamily="34" charset="-122"/>
-                <a:cs typeface="Arial" pitchFamily="34" charset="-120"/>
-              </a:rPr>
-              <a:t>80%</a:t>
-            </a:r>
-            <a:endParaRPr lang="ar-SA" sz="4000" dirty="0"/>
-          </a:p>
-        </p:txBody>
-      </p:sp>
-      <p:sp>
-        <p:nvSpPr>
-          <p:cNvPr id="23" name="Text 16"/>
-          <p:cNvSpPr/>
-          <p:nvPr/>
-        </p:nvSpPr>
-        <p:spPr>
-          <a:xfrm>
-            <a:off x="621792" y="3383280"/>
-            <a:ext cx="1271016" cy="1188720"/>
-          </a:xfrm>
-          <a:prstGeom prst="rect">
-            <a:avLst/>
-          </a:prstGeom>
-          <a:noFill/>
-          <a:ln/>
-        </p:spPr>
-        <p:txBody>
-          <a:bodyPr wrap="square" rtlCol="0" anchor="ctr"/>
-          <a:lstStyle/>
-          <a:p>
-            <a:pPr rtl="1" algn="ctr" indent="0" marL="0">
-              <a:lnSpc>
-                <a:spcPct val="115000"/>
-              </a:lnSpc>
-              <a:buNone/>
-            </a:pPr>
-            <a:r>
-              <a:rPr lang="ar-SA" altLang="en-US" sz="1100" dirty="0">
-                <a:solidFill>
-                  <a:srgbClr val="CDE9E5"/>
-                </a:solidFill>
-                <a:latin typeface="Arial" pitchFamily="34" charset="0"/>
-                <a:ea typeface="Arial" pitchFamily="34" charset="-122"/>
-                <a:cs typeface="Arial" pitchFamily="34" charset="-120"/>
-              </a:rPr>
-              <a:t>من مشاهدات Netflix مصدرها التوصيات</a:t>
-            </a:r>
-            <a:endParaRPr lang="ar-SA" sz="1100" dirty="0"/>
+              <a:rPr lang="ar-SA" altLang="en-US" sz="1400" i="1" dirty="0">
+                <a:solidFill>
+                  <a:srgbClr val="028090"/>
+                </a:solidFill>
+                <a:latin typeface="Arial" pitchFamily="34" charset="0"/>
+                <a:ea typeface="Arial" pitchFamily="34" charset="-122"/>
+                <a:cs typeface="Arial" pitchFamily="34" charset="-120"/>
+              </a:rPr>
+              <a:t>هاتفك يستخدم الذكاء الاصطناعي عشرات المرات يومياً — غالباً دون أن تلاحظ.</a:t>
+            </a:r>
+            <a:endParaRPr lang="ar-SA" sz="1400" dirty="0"/>
           </a:p>
         </p:txBody>
       </p:sp>
@@ -10441,7 +11168,7 @@
                 <a:ea typeface="Arial" pitchFamily="34" charset="-122"/>
                 <a:cs typeface="Arial" pitchFamily="34" charset="-120"/>
               </a:rPr>
-              <a:t>في التعليم والدراسة</a:t>
+              <a:t>الترفيه والتواصل الاجتماعي</a:t>
             </a:r>
             <a:endParaRPr lang="ar-SA" sz="3100" dirty="0"/>
           </a:p>
@@ -10455,16 +11182,516 @@
         </p:nvSpPr>
         <p:spPr>
           <a:xfrm>
-            <a:off x="6263640" y="1508760"/>
-            <a:ext cx="5349240" cy="4206240"/>
+            <a:off x="10865815" y="1673352"/>
+            <a:ext cx="777240" cy="777240"/>
+          </a:xfrm>
+          <a:prstGeom prst="ellipse">
+            <a:avLst/>
+          </a:prstGeom>
+          <a:solidFill>
+            <a:srgbClr val="028090"/>
+          </a:solidFill>
+          <a:ln/>
+        </p:spPr>
+      </p:sp>
+      <p:pic>
+        <p:nvPicPr>
+          <p:cNvPr id="6" name="Image 1" descr="preencoded.png">    </p:cNvPr>
+          <p:cNvPicPr>
+            <a:picLocks noChangeAspect="1"/>
+          </p:cNvPicPr>
+          <p:nvPr/>
+        </p:nvPicPr>
+        <p:blipFill>
+          <a:blip r:embed="rId2"/>
+          <a:stretch>
+            <a:fillRect/>
+          </a:stretch>
+        </p:blipFill>
+        <p:spPr>
+          <a:xfrm>
+            <a:off x="11067898" y="1875434"/>
+            <a:ext cx="373075" cy="373075"/>
+          </a:xfrm>
+          <a:prstGeom prst="rect">
+            <a:avLst/>
+          </a:prstGeom>
+        </p:spPr>
+      </p:pic>
+      <p:sp>
+        <p:nvSpPr>
+          <p:cNvPr id="7" name="Text 3"/>
+          <p:cNvSpPr/>
+          <p:nvPr/>
+        </p:nvSpPr>
+        <p:spPr>
+          <a:xfrm>
+            <a:off x="1828800" y="1554480"/>
+            <a:ext cx="8762695" cy="384048"/>
+          </a:xfrm>
+          <a:prstGeom prst="rect">
+            <a:avLst/>
+          </a:prstGeom>
+          <a:noFill/>
+          <a:ln/>
+        </p:spPr>
+        <p:txBody>
+          <a:bodyPr wrap="square" rtlCol="0" anchor="ctr"/>
+          <a:lstStyle/>
+          <a:p>
+            <a:pPr rtl="1" algn="r" indent="0" marL="0">
+              <a:buNone/>
+            </a:pPr>
+            <a:r>
+              <a:rPr lang="ar-SA" altLang="en-US" sz="1650" b="1" dirty="0">
+                <a:solidFill>
+                  <a:srgbClr val="0E2A32"/>
+                </a:solidFill>
+                <a:latin typeface="Arial" pitchFamily="34" charset="0"/>
+                <a:ea typeface="Arial" pitchFamily="34" charset="-122"/>
+                <a:cs typeface="Arial" pitchFamily="34" charset="-120"/>
+              </a:rPr>
+              <a:t>التوصيات الذكية</a:t>
+            </a:r>
+            <a:endParaRPr lang="ar-SA" sz="1650" dirty="0"/>
+          </a:p>
+        </p:txBody>
+      </p:sp>
+      <p:sp>
+        <p:nvSpPr>
+          <p:cNvPr id="8" name="Text 4"/>
+          <p:cNvSpPr/>
+          <p:nvPr/>
+        </p:nvSpPr>
+        <p:spPr>
+          <a:xfrm>
+            <a:off x="1828800" y="1938528"/>
+            <a:ext cx="8762695" cy="640080"/>
+          </a:xfrm>
+          <a:prstGeom prst="rect">
+            <a:avLst/>
+          </a:prstGeom>
+          <a:noFill/>
+          <a:ln/>
+        </p:spPr>
+        <p:txBody>
+          <a:bodyPr wrap="square" rtlCol="0" anchor="ctr"/>
+          <a:lstStyle/>
+          <a:p>
+            <a:pPr rtl="1" algn="r" indent="0" marL="0">
+              <a:lnSpc>
+                <a:spcPct val="115000"/>
+              </a:lnSpc>
+              <a:buNone/>
+            </a:pPr>
+            <a:r>
+              <a:rPr lang="ar-SA" altLang="en-US" sz="1300" dirty="0">
+                <a:solidFill>
+                  <a:srgbClr val="587076"/>
+                </a:solidFill>
+                <a:latin typeface="Arial" pitchFamily="34" charset="0"/>
+                <a:ea typeface="Arial" pitchFamily="34" charset="-122"/>
+                <a:cs typeface="Arial" pitchFamily="34" charset="-120"/>
+              </a:rPr>
+              <a:t>Netflix وYouTube يحللان ما شاهدته ليقترحا ما يناسب ذوقك — 80% من المشاهدات على Netflix تأتي من التوصيات.</a:t>
+            </a:r>
+            <a:endParaRPr lang="ar-SA" sz="1300" dirty="0"/>
+          </a:p>
+        </p:txBody>
+      </p:sp>
+      <p:sp>
+        <p:nvSpPr>
+          <p:cNvPr id="9" name="Shape 5"/>
+          <p:cNvSpPr/>
+          <p:nvPr/>
+        </p:nvSpPr>
+        <p:spPr>
+          <a:xfrm>
+            <a:off x="10865815" y="2862072"/>
+            <a:ext cx="777240" cy="777240"/>
+          </a:xfrm>
+          <a:prstGeom prst="ellipse">
+            <a:avLst/>
+          </a:prstGeom>
+          <a:solidFill>
+            <a:srgbClr val="00A896"/>
+          </a:solidFill>
+          <a:ln/>
+        </p:spPr>
+      </p:sp>
+      <p:pic>
+        <p:nvPicPr>
+          <p:cNvPr id="10" name="Image 2" descr="preencoded.png">    </p:cNvPr>
+          <p:cNvPicPr>
+            <a:picLocks noChangeAspect="1"/>
+          </p:cNvPicPr>
+          <p:nvPr/>
+        </p:nvPicPr>
+        <p:blipFill>
+          <a:blip r:embed="rId3"/>
+          <a:stretch>
+            <a:fillRect/>
+          </a:stretch>
+        </p:blipFill>
+        <p:spPr>
+          <a:xfrm>
+            <a:off x="11067898" y="3064154"/>
+            <a:ext cx="373075" cy="373075"/>
+          </a:xfrm>
+          <a:prstGeom prst="rect">
+            <a:avLst/>
+          </a:prstGeom>
+        </p:spPr>
+      </p:pic>
+      <p:sp>
+        <p:nvSpPr>
+          <p:cNvPr id="11" name="Text 6"/>
+          <p:cNvSpPr/>
+          <p:nvPr/>
+        </p:nvSpPr>
+        <p:spPr>
+          <a:xfrm>
+            <a:off x="1828800" y="2743200"/>
+            <a:ext cx="8762695" cy="384048"/>
+          </a:xfrm>
+          <a:prstGeom prst="rect">
+            <a:avLst/>
+          </a:prstGeom>
+          <a:noFill/>
+          <a:ln/>
+        </p:spPr>
+        <p:txBody>
+          <a:bodyPr wrap="square" rtlCol="0" anchor="ctr"/>
+          <a:lstStyle/>
+          <a:p>
+            <a:pPr rtl="1" algn="r" indent="0" marL="0">
+              <a:buNone/>
+            </a:pPr>
+            <a:r>
+              <a:rPr lang="ar-SA" altLang="en-US" sz="1650" b="1" dirty="0">
+                <a:solidFill>
+                  <a:srgbClr val="0E2A32"/>
+                </a:solidFill>
+                <a:latin typeface="Arial" pitchFamily="34" charset="0"/>
+                <a:ea typeface="Arial" pitchFamily="34" charset="-122"/>
+                <a:cs typeface="Arial" pitchFamily="34" charset="-120"/>
+              </a:rPr>
+              <a:t>خلاصة التواصل الاجتماعي</a:t>
+            </a:r>
+            <a:endParaRPr lang="ar-SA" sz="1650" dirty="0"/>
+          </a:p>
+        </p:txBody>
+      </p:sp>
+      <p:sp>
+        <p:nvSpPr>
+          <p:cNvPr id="12" name="Text 7"/>
+          <p:cNvSpPr/>
+          <p:nvPr/>
+        </p:nvSpPr>
+        <p:spPr>
+          <a:xfrm>
+            <a:off x="1828800" y="3127248"/>
+            <a:ext cx="8762695" cy="640080"/>
+          </a:xfrm>
+          <a:prstGeom prst="rect">
+            <a:avLst/>
+          </a:prstGeom>
+          <a:noFill/>
+          <a:ln/>
+        </p:spPr>
+        <p:txBody>
+          <a:bodyPr wrap="square" rtlCol="0" anchor="ctr"/>
+          <a:lstStyle/>
+          <a:p>
+            <a:pPr rtl="1" algn="r" indent="0" marL="0">
+              <a:lnSpc>
+                <a:spcPct val="115000"/>
+              </a:lnSpc>
+              <a:buNone/>
+            </a:pPr>
+            <a:r>
+              <a:rPr lang="ar-SA" altLang="en-US" sz="1300" dirty="0">
+                <a:solidFill>
+                  <a:srgbClr val="587076"/>
+                </a:solidFill>
+                <a:latin typeface="Arial" pitchFamily="34" charset="0"/>
+                <a:ea typeface="Arial" pitchFamily="34" charset="-122"/>
+                <a:cs typeface="Arial" pitchFamily="34" charset="-120"/>
+              </a:rPr>
+              <a:t>ترتيب المنشورات، فلاتر الصور، واكتشاف المحتوى المخالف — كلها خوارزميات تعلم آلي.</a:t>
+            </a:r>
+            <a:endParaRPr lang="ar-SA" sz="1300" dirty="0"/>
+          </a:p>
+        </p:txBody>
+      </p:sp>
+      <p:sp>
+        <p:nvSpPr>
+          <p:cNvPr id="13" name="Shape 8"/>
+          <p:cNvSpPr/>
+          <p:nvPr/>
+        </p:nvSpPr>
+        <p:spPr>
+          <a:xfrm>
+            <a:off x="10865815" y="4050792"/>
+            <a:ext cx="777240" cy="777240"/>
+          </a:xfrm>
+          <a:prstGeom prst="ellipse">
+            <a:avLst/>
+          </a:prstGeom>
+          <a:solidFill>
+            <a:srgbClr val="028090"/>
+          </a:solidFill>
+          <a:ln/>
+        </p:spPr>
+      </p:sp>
+      <p:pic>
+        <p:nvPicPr>
+          <p:cNvPr id="14" name="Image 3" descr="preencoded.png">    </p:cNvPr>
+          <p:cNvPicPr>
+            <a:picLocks noChangeAspect="1"/>
+          </p:cNvPicPr>
+          <p:nvPr/>
+        </p:nvPicPr>
+        <p:blipFill>
+          <a:blip r:embed="rId4"/>
+          <a:stretch>
+            <a:fillRect/>
+          </a:stretch>
+        </p:blipFill>
+        <p:spPr>
+          <a:xfrm>
+            <a:off x="11067898" y="4252874"/>
+            <a:ext cx="373075" cy="373075"/>
+          </a:xfrm>
+          <a:prstGeom prst="rect">
+            <a:avLst/>
+          </a:prstGeom>
+        </p:spPr>
+      </p:pic>
+      <p:sp>
+        <p:nvSpPr>
+          <p:cNvPr id="15" name="Text 9"/>
+          <p:cNvSpPr/>
+          <p:nvPr/>
+        </p:nvSpPr>
+        <p:spPr>
+          <a:xfrm>
+            <a:off x="1828800" y="3931920"/>
+            <a:ext cx="8762695" cy="384048"/>
+          </a:xfrm>
+          <a:prstGeom prst="rect">
+            <a:avLst/>
+          </a:prstGeom>
+          <a:noFill/>
+          <a:ln/>
+        </p:spPr>
+        <p:txBody>
+          <a:bodyPr wrap="square" rtlCol="0" anchor="ctr"/>
+          <a:lstStyle/>
+          <a:p>
+            <a:pPr rtl="1" algn="r" indent="0" marL="0">
+              <a:buNone/>
+            </a:pPr>
+            <a:r>
+              <a:rPr lang="ar-SA" altLang="en-US" sz="1650" b="1" dirty="0">
+                <a:solidFill>
+                  <a:srgbClr val="0E2A32"/>
+                </a:solidFill>
+                <a:latin typeface="Arial" pitchFamily="34" charset="0"/>
+                <a:ea typeface="Arial" pitchFamily="34" charset="-122"/>
+                <a:cs typeface="Arial" pitchFamily="34" charset="-120"/>
+              </a:rPr>
+              <a:t>الترجمة الفورية</a:t>
+            </a:r>
+            <a:endParaRPr lang="ar-SA" sz="1650" dirty="0"/>
+          </a:p>
+        </p:txBody>
+      </p:sp>
+      <p:sp>
+        <p:nvSpPr>
+          <p:cNvPr id="16" name="Text 10"/>
+          <p:cNvSpPr/>
+          <p:nvPr/>
+        </p:nvSpPr>
+        <p:spPr>
+          <a:xfrm>
+            <a:off x="1828800" y="4315968"/>
+            <a:ext cx="8762695" cy="640080"/>
+          </a:xfrm>
+          <a:prstGeom prst="rect">
+            <a:avLst/>
+          </a:prstGeom>
+          <a:noFill/>
+          <a:ln/>
+        </p:spPr>
+        <p:txBody>
+          <a:bodyPr wrap="square" rtlCol="0" anchor="ctr"/>
+          <a:lstStyle/>
+          <a:p>
+            <a:pPr rtl="1" algn="r" indent="0" marL="0">
+              <a:lnSpc>
+                <a:spcPct val="115000"/>
+              </a:lnSpc>
+              <a:buNone/>
+            </a:pPr>
+            <a:r>
+              <a:rPr lang="ar-SA" altLang="en-US" sz="1300" dirty="0">
+                <a:solidFill>
+                  <a:srgbClr val="587076"/>
+                </a:solidFill>
+                <a:latin typeface="Arial" pitchFamily="34" charset="0"/>
+                <a:ea typeface="Arial" pitchFamily="34" charset="-122"/>
+                <a:cs typeface="Arial" pitchFamily="34" charset="-120"/>
+              </a:rPr>
+              <a:t>ترجمة نص وصوت وصورة بين أكثر من 100 لغة في ثوانٍ، وكسر حاجز اللغة في السفر والدراسة.</a:t>
+            </a:r>
+            <a:endParaRPr lang="ar-SA" sz="1300" dirty="0"/>
+          </a:p>
+        </p:txBody>
+      </p:sp>
+      <p:sp>
+        <p:nvSpPr>
+          <p:cNvPr id="17" name="Shape 11"/>
+          <p:cNvSpPr/>
+          <p:nvPr/>
+        </p:nvSpPr>
+        <p:spPr>
+          <a:xfrm>
+            <a:off x="10865815" y="5239512"/>
+            <a:ext cx="777240" cy="777240"/>
+          </a:xfrm>
+          <a:prstGeom prst="ellipse">
+            <a:avLst/>
+          </a:prstGeom>
+          <a:solidFill>
+            <a:srgbClr val="00A896"/>
+          </a:solidFill>
+          <a:ln/>
+        </p:spPr>
+      </p:sp>
+      <p:pic>
+        <p:nvPicPr>
+          <p:cNvPr id="18" name="Image 4" descr="preencoded.png">    </p:cNvPr>
+          <p:cNvPicPr>
+            <a:picLocks noChangeAspect="1"/>
+          </p:cNvPicPr>
+          <p:nvPr/>
+        </p:nvPicPr>
+        <p:blipFill>
+          <a:blip r:embed="rId5"/>
+          <a:stretch>
+            <a:fillRect/>
+          </a:stretch>
+        </p:blipFill>
+        <p:spPr>
+          <a:xfrm>
+            <a:off x="11067898" y="5441594"/>
+            <a:ext cx="373075" cy="373075"/>
+          </a:xfrm>
+          <a:prstGeom prst="rect">
+            <a:avLst/>
+          </a:prstGeom>
+        </p:spPr>
+      </p:pic>
+      <p:sp>
+        <p:nvSpPr>
+          <p:cNvPr id="19" name="Text 12"/>
+          <p:cNvSpPr/>
+          <p:nvPr/>
+        </p:nvSpPr>
+        <p:spPr>
+          <a:xfrm>
+            <a:off x="1828800" y="5120640"/>
+            <a:ext cx="8762695" cy="384048"/>
+          </a:xfrm>
+          <a:prstGeom prst="rect">
+            <a:avLst/>
+          </a:prstGeom>
+          <a:noFill/>
+          <a:ln/>
+        </p:spPr>
+        <p:txBody>
+          <a:bodyPr wrap="square" rtlCol="0" anchor="ctr"/>
+          <a:lstStyle/>
+          <a:p>
+            <a:pPr rtl="1" algn="r" indent="0" marL="0">
+              <a:buNone/>
+            </a:pPr>
+            <a:r>
+              <a:rPr lang="ar-SA" altLang="en-US" sz="1650" b="1" dirty="0">
+                <a:solidFill>
+                  <a:srgbClr val="0E2A32"/>
+                </a:solidFill>
+                <a:latin typeface="Arial" pitchFamily="34" charset="0"/>
+                <a:ea typeface="Arial" pitchFamily="34" charset="-122"/>
+                <a:cs typeface="Arial" pitchFamily="34" charset="-120"/>
+              </a:rPr>
+              <a:t>الموسيقى والألعاب</a:t>
+            </a:r>
+            <a:endParaRPr lang="ar-SA" sz="1650" dirty="0"/>
+          </a:p>
+        </p:txBody>
+      </p:sp>
+      <p:sp>
+        <p:nvSpPr>
+          <p:cNvPr id="20" name="Text 13"/>
+          <p:cNvSpPr/>
+          <p:nvPr/>
+        </p:nvSpPr>
+        <p:spPr>
+          <a:xfrm>
+            <a:off x="1828800" y="5504688"/>
+            <a:ext cx="8762695" cy="640080"/>
+          </a:xfrm>
+          <a:prstGeom prst="rect">
+            <a:avLst/>
+          </a:prstGeom>
+          <a:noFill/>
+          <a:ln/>
+        </p:spPr>
+        <p:txBody>
+          <a:bodyPr wrap="square" rtlCol="0" anchor="ctr"/>
+          <a:lstStyle/>
+          <a:p>
+            <a:pPr rtl="1" algn="r" indent="0" marL="0">
+              <a:lnSpc>
+                <a:spcPct val="115000"/>
+              </a:lnSpc>
+              <a:buNone/>
+            </a:pPr>
+            <a:r>
+              <a:rPr lang="ar-SA" altLang="en-US" sz="1300" dirty="0">
+                <a:solidFill>
+                  <a:srgbClr val="587076"/>
+                </a:solidFill>
+                <a:latin typeface="Arial" pitchFamily="34" charset="0"/>
+                <a:ea typeface="Arial" pitchFamily="34" charset="-122"/>
+                <a:cs typeface="Arial" pitchFamily="34" charset="-120"/>
+              </a:rPr>
+              <a:t>قوائم Spotify الأسبوعية المخصصة لك، وخصوم أذكياء يتكيفون مع مستواك في الألعاب.</a:t>
+            </a:r>
+            <a:endParaRPr lang="ar-SA" sz="1300" dirty="0"/>
+          </a:p>
+        </p:txBody>
+      </p:sp>
+      <p:sp>
+        <p:nvSpPr>
+          <p:cNvPr id="21" name="Shape 14"/>
+          <p:cNvSpPr/>
+          <p:nvPr/>
+        </p:nvSpPr>
+        <p:spPr>
+          <a:xfrm>
+            <a:off x="548640" y="2148840"/>
+            <a:ext cx="1417320" cy="2651760"/>
           </a:xfrm>
           <a:prstGeom prst="roundRect">
             <a:avLst>
-              <a:gd name="adj" fmla="val 3043"/>
+              <a:gd name="adj" fmla="val 7742"/>
             </a:avLst>
           </a:prstGeom>
           <a:solidFill>
-            <a:srgbClr val="E4F7F1"/>
+            <a:srgbClr val="0E2A32"/>
           </a:solidFill>
           <a:ln/>
           <a:effectLst>
@@ -10478,14 +11705,53 @@
       </p:sp>
       <p:sp>
         <p:nvSpPr>
-          <p:cNvPr id="6" name="Text 3"/>
-          <p:cNvSpPr/>
-          <p:nvPr/>
-        </p:nvSpPr>
-        <p:spPr>
-          <a:xfrm>
-            <a:off x="6537960" y="1737360"/>
-            <a:ext cx="4800600" cy="457200"/>
+          <p:cNvPr id="22" name="Text 15"/>
+          <p:cNvSpPr/>
+          <p:nvPr/>
+        </p:nvSpPr>
+        <p:spPr>
+          <a:xfrm>
+            <a:off x="548640" y="2514600"/>
+            <a:ext cx="1417320" cy="822960"/>
+          </a:xfrm>
+          <a:prstGeom prst="rect">
+            <a:avLst/>
+          </a:prstGeom>
+          <a:noFill/>
+          <a:ln/>
+        </p:spPr>
+        <p:txBody>
+          <a:bodyPr wrap="square" lIns="0" tIns="0" rIns="0" bIns="0" rtlCol="0" anchor="ctr"/>
+          <a:lstStyle/>
+          <a:p>
+            <a:pPr rtl="1" algn="ctr" indent="0" marL="0">
+              <a:buNone/>
+            </a:pPr>
+            <a:r>
+              <a:rPr lang="ar-SA" altLang="en-US" sz="4000" b="1" dirty="0">
+                <a:solidFill>
+                  <a:srgbClr val="02C39A"/>
+                </a:solidFill>
+                <a:latin typeface="Arial" pitchFamily="34" charset="0"/>
+                <a:ea typeface="Arial" pitchFamily="34" charset="-122"/>
+                <a:cs typeface="Arial" pitchFamily="34" charset="-120"/>
+              </a:rPr>
+              <a:t>80%</a:t>
+            </a:r>
+            <a:endParaRPr lang="ar-SA" sz="4000" dirty="0"/>
+          </a:p>
+        </p:txBody>
+      </p:sp>
+      <p:sp>
+        <p:nvSpPr>
+          <p:cNvPr id="23" name="Text 16"/>
+          <p:cNvSpPr/>
+          <p:nvPr/>
+        </p:nvSpPr>
+        <p:spPr>
+          <a:xfrm>
+            <a:off x="621792" y="3383280"/>
+            <a:ext cx="1271016" cy="1188720"/>
           </a:xfrm>
           <a:prstGeom prst="rect">
             <a:avLst/>
@@ -10497,782 +11763,24 @@
           <a:bodyPr wrap="square" rtlCol="0" anchor="ctr"/>
           <a:lstStyle/>
           <a:p>
-            <a:pPr rtl="1" algn="r" indent="0" marL="0">
-              <a:buNone/>
-            </a:pPr>
-            <a:r>
-              <a:rPr lang="ar-SA" altLang="en-US" sz="1800" b="1" dirty="0">
-                <a:solidFill>
-                  <a:srgbClr val="028090"/>
-                </a:solidFill>
-                <a:latin typeface="Arial" pitchFamily="34" charset="0"/>
-                <a:ea typeface="Arial" pitchFamily="34" charset="-122"/>
-                <a:cs typeface="Arial" pitchFamily="34" charset="-120"/>
-              </a:rPr>
-              <a:t>كيف يساعدك في الدراسة؟</a:t>
-            </a:r>
-            <a:endParaRPr lang="ar-SA" sz="1800" dirty="0"/>
-          </a:p>
-        </p:txBody>
-      </p:sp>
-      <p:sp>
-        <p:nvSpPr>
-          <p:cNvPr id="7" name="Shape 4"/>
-          <p:cNvSpPr/>
-          <p:nvPr/>
-        </p:nvSpPr>
-        <p:spPr>
-          <a:xfrm>
-            <a:off x="10927080" y="2423160"/>
-            <a:ext cx="438912" cy="438912"/>
-          </a:xfrm>
-          <a:prstGeom prst="ellipse">
-            <a:avLst/>
-          </a:prstGeom>
-          <a:solidFill>
-            <a:srgbClr val="02C39A"/>
-          </a:solidFill>
-          <a:ln/>
-        </p:spPr>
-      </p:sp>
-      <p:pic>
-        <p:nvPicPr>
-          <p:cNvPr id="8" name="Image 1" descr="preencoded.png">    </p:cNvPr>
-          <p:cNvPicPr>
-            <a:picLocks noChangeAspect="1"/>
-          </p:cNvPicPr>
-          <p:nvPr/>
-        </p:nvPicPr>
-        <p:blipFill>
-          <a:blip r:embed="rId2"/>
-          <a:stretch>
-            <a:fillRect/>
-          </a:stretch>
-        </p:blipFill>
-        <p:spPr>
-          <a:xfrm>
-            <a:off x="11041197" y="2537277"/>
-            <a:ext cx="210678" cy="210678"/>
-          </a:xfrm>
-          <a:prstGeom prst="rect">
-            <a:avLst/>
-          </a:prstGeom>
-        </p:spPr>
-      </p:pic>
-      <p:sp>
-        <p:nvSpPr>
-          <p:cNvPr id="9" name="Text 5"/>
-          <p:cNvSpPr/>
-          <p:nvPr/>
-        </p:nvSpPr>
-        <p:spPr>
-          <a:xfrm>
-            <a:off x="6537960" y="2331720"/>
-            <a:ext cx="4206240" cy="777240"/>
-          </a:xfrm>
-          <a:prstGeom prst="rect">
-            <a:avLst/>
-          </a:prstGeom>
-          <a:noFill/>
-          <a:ln/>
-        </p:spPr>
-        <p:txBody>
-          <a:bodyPr wrap="square" rtlCol="0" anchor="t"/>
-          <a:lstStyle/>
-          <a:p>
-            <a:pPr rtl="1" algn="r" indent="0" marL="0">
+            <a:pPr rtl="1" algn="ctr" indent="0" marL="0">
               <a:lnSpc>
                 <a:spcPct val="115000"/>
               </a:lnSpc>
               <a:buNone/>
             </a:pPr>
             <a:r>
-              <a:rPr lang="ar-SA" altLang="en-US" sz="1300" dirty="0">
-                <a:solidFill>
-                  <a:srgbClr val="16323A"/>
-                </a:solidFill>
-                <a:latin typeface="Arial" pitchFamily="34" charset="0"/>
-                <a:ea typeface="Arial" pitchFamily="34" charset="-122"/>
-                <a:cs typeface="Arial" pitchFamily="34" charset="-120"/>
-              </a:rPr>
-              <a:t>شرح مبسط لأي مفهوم صعب بأسلوب يناسبك، مع أمثلة إضافية عند الطلب</a:t>
-            </a:r>
-            <a:endParaRPr lang="ar-SA" sz="1300" dirty="0"/>
-          </a:p>
-        </p:txBody>
-      </p:sp>
-      <p:sp>
-        <p:nvSpPr>
-          <p:cNvPr id="10" name="Shape 6"/>
-          <p:cNvSpPr/>
-          <p:nvPr/>
-        </p:nvSpPr>
-        <p:spPr>
-          <a:xfrm>
-            <a:off x="10927080" y="3264408"/>
-            <a:ext cx="438912" cy="438912"/>
-          </a:xfrm>
-          <a:prstGeom prst="ellipse">
-            <a:avLst/>
-          </a:prstGeom>
-          <a:solidFill>
-            <a:srgbClr val="02C39A"/>
-          </a:solidFill>
-          <a:ln/>
-        </p:spPr>
-      </p:sp>
-      <p:pic>
-        <p:nvPicPr>
-          <p:cNvPr id="11" name="Image 2" descr="preencoded.png">    </p:cNvPr>
-          <p:cNvPicPr>
-            <a:picLocks noChangeAspect="1"/>
-          </p:cNvPicPr>
-          <p:nvPr/>
-        </p:nvPicPr>
-        <p:blipFill>
-          <a:blip r:embed="rId3"/>
-          <a:stretch>
-            <a:fillRect/>
-          </a:stretch>
-        </p:blipFill>
-        <p:spPr>
-          <a:xfrm>
-            <a:off x="11041197" y="3378525"/>
-            <a:ext cx="210678" cy="210678"/>
-          </a:xfrm>
-          <a:prstGeom prst="rect">
-            <a:avLst/>
-          </a:prstGeom>
-        </p:spPr>
-      </p:pic>
-      <p:sp>
-        <p:nvSpPr>
-          <p:cNvPr id="12" name="Text 7"/>
-          <p:cNvSpPr/>
-          <p:nvPr/>
-        </p:nvSpPr>
-        <p:spPr>
-          <a:xfrm>
-            <a:off x="6537960" y="3172968"/>
-            <a:ext cx="4206240" cy="777240"/>
-          </a:xfrm>
-          <a:prstGeom prst="rect">
-            <a:avLst/>
-          </a:prstGeom>
-          <a:noFill/>
-          <a:ln/>
-        </p:spPr>
-        <p:txBody>
-          <a:bodyPr wrap="square" rtlCol="0" anchor="t"/>
-          <a:lstStyle/>
-          <a:p>
-            <a:pPr rtl="1" algn="r" indent="0" marL="0">
-              <a:lnSpc>
-                <a:spcPct val="115000"/>
-              </a:lnSpc>
-              <a:buNone/>
-            </a:pPr>
-            <a:r>
-              <a:rPr lang="ar-SA" altLang="en-US" sz="1300" dirty="0">
-                <a:solidFill>
-                  <a:srgbClr val="16323A"/>
-                </a:solidFill>
-                <a:latin typeface="Arial" pitchFamily="34" charset="0"/>
-                <a:ea typeface="Arial" pitchFamily="34" charset="-122"/>
-                <a:cs typeface="Arial" pitchFamily="34" charset="-120"/>
-              </a:rPr>
-              <a:t>تلخيص الدروس والمقالات الطويلة ومراجعة سريعة قبل الاختبار</a:t>
-            </a:r>
-            <a:endParaRPr lang="ar-SA" sz="1300" dirty="0"/>
-          </a:p>
-        </p:txBody>
-      </p:sp>
-      <p:sp>
-        <p:nvSpPr>
-          <p:cNvPr id="13" name="Shape 8"/>
-          <p:cNvSpPr/>
-          <p:nvPr/>
-        </p:nvSpPr>
-        <p:spPr>
-          <a:xfrm>
-            <a:off x="10927080" y="4105656"/>
-            <a:ext cx="438912" cy="438912"/>
-          </a:xfrm>
-          <a:prstGeom prst="ellipse">
-            <a:avLst/>
-          </a:prstGeom>
-          <a:solidFill>
-            <a:srgbClr val="02C39A"/>
-          </a:solidFill>
-          <a:ln/>
-        </p:spPr>
-      </p:sp>
-      <p:pic>
-        <p:nvPicPr>
-          <p:cNvPr id="14" name="Image 3" descr="preencoded.png">    </p:cNvPr>
-          <p:cNvPicPr>
-            <a:picLocks noChangeAspect="1"/>
-          </p:cNvPicPr>
-          <p:nvPr/>
-        </p:nvPicPr>
-        <p:blipFill>
-          <a:blip r:embed="rId4"/>
-          <a:stretch>
-            <a:fillRect/>
-          </a:stretch>
-        </p:blipFill>
-        <p:spPr>
-          <a:xfrm>
-            <a:off x="11041197" y="4219773"/>
-            <a:ext cx="210678" cy="210678"/>
-          </a:xfrm>
-          <a:prstGeom prst="rect">
-            <a:avLst/>
-          </a:prstGeom>
-        </p:spPr>
-      </p:pic>
-      <p:sp>
-        <p:nvSpPr>
-          <p:cNvPr id="15" name="Text 9"/>
-          <p:cNvSpPr/>
-          <p:nvPr/>
-        </p:nvSpPr>
-        <p:spPr>
-          <a:xfrm>
-            <a:off x="6537960" y="4014216"/>
-            <a:ext cx="4206240" cy="777240"/>
-          </a:xfrm>
-          <a:prstGeom prst="rect">
-            <a:avLst/>
-          </a:prstGeom>
-          <a:noFill/>
-          <a:ln/>
-        </p:spPr>
-        <p:txBody>
-          <a:bodyPr wrap="square" rtlCol="0" anchor="t"/>
-          <a:lstStyle/>
-          <a:p>
-            <a:pPr rtl="1" algn="r" indent="0" marL="0">
-              <a:lnSpc>
-                <a:spcPct val="115000"/>
-              </a:lnSpc>
-              <a:buNone/>
-            </a:pPr>
-            <a:r>
-              <a:rPr lang="ar-SA" altLang="en-US" sz="1300" dirty="0">
-                <a:solidFill>
-                  <a:srgbClr val="16323A"/>
-                </a:solidFill>
-                <a:latin typeface="Arial" pitchFamily="34" charset="0"/>
-                <a:ea typeface="Arial" pitchFamily="34" charset="-122"/>
-                <a:cs typeface="Arial" pitchFamily="34" charset="-120"/>
-              </a:rPr>
-              <a:t>تعلم اللغات بالممارسة والتصحيح الفوري (مثل Duolingo)</a:t>
-            </a:r>
-            <a:endParaRPr lang="ar-SA" sz="1300" dirty="0"/>
-          </a:p>
-        </p:txBody>
-      </p:sp>
-      <p:sp>
-        <p:nvSpPr>
-          <p:cNvPr id="16" name="Shape 10"/>
-          <p:cNvSpPr/>
-          <p:nvPr/>
-        </p:nvSpPr>
-        <p:spPr>
-          <a:xfrm>
-            <a:off x="10927080" y="4946904"/>
-            <a:ext cx="438912" cy="438912"/>
-          </a:xfrm>
-          <a:prstGeom prst="ellipse">
-            <a:avLst/>
-          </a:prstGeom>
-          <a:solidFill>
-            <a:srgbClr val="02C39A"/>
-          </a:solidFill>
-          <a:ln/>
-        </p:spPr>
-      </p:sp>
-      <p:pic>
-        <p:nvPicPr>
-          <p:cNvPr id="17" name="Image 4" descr="preencoded.png">    </p:cNvPr>
-          <p:cNvPicPr>
-            <a:picLocks noChangeAspect="1"/>
-          </p:cNvPicPr>
-          <p:nvPr/>
-        </p:nvPicPr>
-        <p:blipFill>
-          <a:blip r:embed="rId5"/>
-          <a:stretch>
-            <a:fillRect/>
-          </a:stretch>
-        </p:blipFill>
-        <p:spPr>
-          <a:xfrm>
-            <a:off x="11041197" y="5061021"/>
-            <a:ext cx="210678" cy="210678"/>
-          </a:xfrm>
-          <a:prstGeom prst="rect">
-            <a:avLst/>
-          </a:prstGeom>
-        </p:spPr>
-      </p:pic>
-      <p:sp>
-        <p:nvSpPr>
-          <p:cNvPr id="18" name="Text 11"/>
-          <p:cNvSpPr/>
-          <p:nvPr/>
-        </p:nvSpPr>
-        <p:spPr>
-          <a:xfrm>
-            <a:off x="6537960" y="4855464"/>
-            <a:ext cx="4206240" cy="777240"/>
-          </a:xfrm>
-          <a:prstGeom prst="rect">
-            <a:avLst/>
-          </a:prstGeom>
-          <a:noFill/>
-          <a:ln/>
-        </p:spPr>
-        <p:txBody>
-          <a:bodyPr wrap="square" rtlCol="0" anchor="t"/>
-          <a:lstStyle/>
-          <a:p>
-            <a:pPr rtl="1" algn="r" indent="0" marL="0">
-              <a:lnSpc>
-                <a:spcPct val="115000"/>
-              </a:lnSpc>
-              <a:buNone/>
-            </a:pPr>
-            <a:r>
-              <a:rPr lang="ar-SA" altLang="en-US" sz="1300" dirty="0">
-                <a:solidFill>
-                  <a:srgbClr val="16323A"/>
-                </a:solidFill>
-                <a:latin typeface="Arial" pitchFamily="34" charset="0"/>
-                <a:ea typeface="Arial" pitchFamily="34" charset="-122"/>
-                <a:cs typeface="Arial" pitchFamily="34" charset="-120"/>
-              </a:rPr>
-              <a:t>توليد أسئلة تدريبية واختبار نفسك في أي موضوع</a:t>
-            </a:r>
-            <a:endParaRPr lang="ar-SA" sz="1300" dirty="0"/>
-          </a:p>
-        </p:txBody>
-      </p:sp>
-      <p:sp>
-        <p:nvSpPr>
-          <p:cNvPr id="19" name="Shape 12"/>
-          <p:cNvSpPr/>
-          <p:nvPr/>
-        </p:nvSpPr>
-        <p:spPr>
-          <a:xfrm>
-            <a:off x="548640" y="1508760"/>
-            <a:ext cx="5349240" cy="4206240"/>
-          </a:xfrm>
-          <a:prstGeom prst="roundRect">
-            <a:avLst>
-              <a:gd name="adj" fmla="val 3043"/>
-            </a:avLst>
-          </a:prstGeom>
-          <a:solidFill>
-            <a:srgbClr val="FFFFFF"/>
-          </a:solidFill>
-          <a:ln w="12700">
-            <a:solidFill>
-              <a:srgbClr val="DCE8E8"/>
-            </a:solidFill>
-            <a:prstDash val="solid"/>
-          </a:ln>
-          <a:effectLst>
-            <a:outerShdw sx="100000" sy="100000" kx="0" ky="0" algn="bl" rotWithShape="0" blurRad="88900" dist="25400" dir="5400000">
-              <a:srgbClr val="0E2A32">
-                <a:alpha val="16000"/>
-              </a:srgbClr>
-            </a:outerShdw>
-          </a:effectLst>
-        </p:spPr>
-      </p:sp>
-      <p:sp>
-        <p:nvSpPr>
-          <p:cNvPr id="20" name="Text 13"/>
-          <p:cNvSpPr/>
-          <p:nvPr/>
-        </p:nvSpPr>
-        <p:spPr>
-          <a:xfrm>
-            <a:off x="822960" y="1737360"/>
-            <a:ext cx="4800600" cy="457200"/>
-          </a:xfrm>
-          <a:prstGeom prst="rect">
-            <a:avLst/>
-          </a:prstGeom>
-          <a:noFill/>
-          <a:ln/>
-        </p:spPr>
-        <p:txBody>
-          <a:bodyPr wrap="square" rtlCol="0" anchor="ctr"/>
-          <a:lstStyle/>
-          <a:p>
-            <a:pPr rtl="1" algn="r" indent="0" marL="0">
-              <a:buNone/>
-            </a:pPr>
-            <a:r>
-              <a:rPr lang="ar-SA" altLang="en-US" sz="1800" b="1" dirty="0">
-                <a:solidFill>
-                  <a:srgbClr val="0E2A32"/>
-                </a:solidFill>
-                <a:latin typeface="Arial" pitchFamily="34" charset="0"/>
-                <a:ea typeface="Arial" pitchFamily="34" charset="-122"/>
-                <a:cs typeface="Arial" pitchFamily="34" charset="-120"/>
-              </a:rPr>
-              <a:t>استخدمه بذكاء… لا بدلاً عن عقلك</a:t>
-            </a:r>
-            <a:endParaRPr lang="ar-SA" sz="1800" dirty="0"/>
-          </a:p>
-        </p:txBody>
-      </p:sp>
-      <p:sp>
-        <p:nvSpPr>
-          <p:cNvPr id="21" name="Shape 14"/>
-          <p:cNvSpPr/>
-          <p:nvPr/>
-        </p:nvSpPr>
-        <p:spPr>
-          <a:xfrm>
-            <a:off x="5212080" y="2423160"/>
-            <a:ext cx="438912" cy="438912"/>
-          </a:xfrm>
-          <a:prstGeom prst="ellipse">
-            <a:avLst/>
-          </a:prstGeom>
-          <a:solidFill>
-            <a:srgbClr val="0E2A32"/>
-          </a:solidFill>
-          <a:ln/>
-        </p:spPr>
-      </p:sp>
-      <p:pic>
-        <p:nvPicPr>
-          <p:cNvPr id="22" name="Image 5" descr="preencoded.png">    </p:cNvPr>
-          <p:cNvPicPr>
-            <a:picLocks noChangeAspect="1"/>
-          </p:cNvPicPr>
-          <p:nvPr/>
-        </p:nvPicPr>
-        <p:blipFill>
-          <a:blip r:embed="rId6"/>
-          <a:stretch>
-            <a:fillRect/>
-          </a:stretch>
-        </p:blipFill>
-        <p:spPr>
-          <a:xfrm>
-            <a:off x="5326197" y="2537277"/>
-            <a:ext cx="210678" cy="210678"/>
-          </a:xfrm>
-          <a:prstGeom prst="rect">
-            <a:avLst/>
-          </a:prstGeom>
-        </p:spPr>
-      </p:pic>
-      <p:sp>
-        <p:nvSpPr>
-          <p:cNvPr id="23" name="Text 15"/>
-          <p:cNvSpPr/>
-          <p:nvPr/>
-        </p:nvSpPr>
-        <p:spPr>
-          <a:xfrm>
-            <a:off x="822960" y="2331720"/>
-            <a:ext cx="4206240" cy="777240"/>
-          </a:xfrm>
-          <a:prstGeom prst="rect">
-            <a:avLst/>
-          </a:prstGeom>
-          <a:noFill/>
-          <a:ln/>
-        </p:spPr>
-        <p:txBody>
-          <a:bodyPr wrap="square" rtlCol="0" anchor="t"/>
-          <a:lstStyle/>
-          <a:p>
-            <a:pPr rtl="1" algn="r" indent="0" marL="0">
-              <a:lnSpc>
-                <a:spcPct val="115000"/>
-              </a:lnSpc>
-              <a:buNone/>
-            </a:pPr>
-            <a:r>
-              <a:rPr lang="ar-SA" altLang="en-US" sz="1300" dirty="0">
-                <a:solidFill>
-                  <a:srgbClr val="16323A"/>
-                </a:solidFill>
-                <a:latin typeface="Arial" pitchFamily="34" charset="0"/>
-                <a:ea typeface="Arial" pitchFamily="34" charset="-122"/>
-                <a:cs typeface="Arial" pitchFamily="34" charset="-120"/>
-              </a:rPr>
-              <a:t>تحقق دائماً من المعلومات — النماذج قد «تهلوس» وتخترع إجابات واثقة لكنها خاطئة</a:t>
-            </a:r>
-            <a:endParaRPr lang="ar-SA" sz="1300" dirty="0"/>
-          </a:p>
-        </p:txBody>
-      </p:sp>
-      <p:sp>
-        <p:nvSpPr>
-          <p:cNvPr id="24" name="Shape 16"/>
-          <p:cNvSpPr/>
-          <p:nvPr/>
-        </p:nvSpPr>
-        <p:spPr>
-          <a:xfrm>
-            <a:off x="5212080" y="3264408"/>
-            <a:ext cx="438912" cy="438912"/>
-          </a:xfrm>
-          <a:prstGeom prst="ellipse">
-            <a:avLst/>
-          </a:prstGeom>
-          <a:solidFill>
-            <a:srgbClr val="0E2A32"/>
-          </a:solidFill>
-          <a:ln/>
-        </p:spPr>
-      </p:sp>
-      <p:pic>
-        <p:nvPicPr>
-          <p:cNvPr id="25" name="Image 6" descr="preencoded.png">    </p:cNvPr>
-          <p:cNvPicPr>
-            <a:picLocks noChangeAspect="1"/>
-          </p:cNvPicPr>
-          <p:nvPr/>
-        </p:nvPicPr>
-        <p:blipFill>
-          <a:blip r:embed="rId7"/>
-          <a:stretch>
-            <a:fillRect/>
-          </a:stretch>
-        </p:blipFill>
-        <p:spPr>
-          <a:xfrm>
-            <a:off x="5326197" y="3378525"/>
-            <a:ext cx="210678" cy="210678"/>
-          </a:xfrm>
-          <a:prstGeom prst="rect">
-            <a:avLst/>
-          </a:prstGeom>
-        </p:spPr>
-      </p:pic>
-      <p:sp>
-        <p:nvSpPr>
-          <p:cNvPr id="26" name="Text 17"/>
-          <p:cNvSpPr/>
-          <p:nvPr/>
-        </p:nvSpPr>
-        <p:spPr>
-          <a:xfrm>
-            <a:off x="822960" y="3172968"/>
-            <a:ext cx="4206240" cy="777240"/>
-          </a:xfrm>
-          <a:prstGeom prst="rect">
-            <a:avLst/>
-          </a:prstGeom>
-          <a:noFill/>
-          <a:ln/>
-        </p:spPr>
-        <p:txBody>
-          <a:bodyPr wrap="square" rtlCol="0" anchor="t"/>
-          <a:lstStyle/>
-          <a:p>
-            <a:pPr rtl="1" algn="r" indent="0" marL="0">
-              <a:lnSpc>
-                <a:spcPct val="115000"/>
-              </a:lnSpc>
-              <a:buNone/>
-            </a:pPr>
-            <a:r>
-              <a:rPr lang="ar-SA" altLang="en-US" sz="1300" dirty="0">
-                <a:solidFill>
-                  <a:srgbClr val="16323A"/>
-                </a:solidFill>
-                <a:latin typeface="Arial" pitchFamily="34" charset="0"/>
-                <a:ea typeface="Arial" pitchFamily="34" charset="-122"/>
-                <a:cs typeface="Arial" pitchFamily="34" charset="-120"/>
-              </a:rPr>
-              <a:t>اجعله معلماً خصوصياً يشرح لك، لا آلة تحل واجباتك مكانك</a:t>
-            </a:r>
-            <a:endParaRPr lang="ar-SA" sz="1300" dirty="0"/>
-          </a:p>
-        </p:txBody>
-      </p:sp>
-      <p:sp>
-        <p:nvSpPr>
-          <p:cNvPr id="27" name="Shape 18"/>
-          <p:cNvSpPr/>
-          <p:nvPr/>
-        </p:nvSpPr>
-        <p:spPr>
-          <a:xfrm>
-            <a:off x="5212080" y="4105656"/>
-            <a:ext cx="438912" cy="438912"/>
-          </a:xfrm>
-          <a:prstGeom prst="ellipse">
-            <a:avLst/>
-          </a:prstGeom>
-          <a:solidFill>
-            <a:srgbClr val="0E2A32"/>
-          </a:solidFill>
-          <a:ln/>
-        </p:spPr>
-      </p:sp>
-      <p:pic>
-        <p:nvPicPr>
-          <p:cNvPr id="28" name="Image 7" descr="preencoded.png">    </p:cNvPr>
-          <p:cNvPicPr>
-            <a:picLocks noChangeAspect="1"/>
-          </p:cNvPicPr>
-          <p:nvPr/>
-        </p:nvPicPr>
-        <p:blipFill>
-          <a:blip r:embed="rId8"/>
-          <a:stretch>
-            <a:fillRect/>
-          </a:stretch>
-        </p:blipFill>
-        <p:spPr>
-          <a:xfrm>
-            <a:off x="5326197" y="4219773"/>
-            <a:ext cx="210678" cy="210678"/>
-          </a:xfrm>
-          <a:prstGeom prst="rect">
-            <a:avLst/>
-          </a:prstGeom>
-        </p:spPr>
-      </p:pic>
-      <p:sp>
-        <p:nvSpPr>
-          <p:cNvPr id="29" name="Text 19"/>
-          <p:cNvSpPr/>
-          <p:nvPr/>
-        </p:nvSpPr>
-        <p:spPr>
-          <a:xfrm>
-            <a:off x="822960" y="4014216"/>
-            <a:ext cx="4206240" cy="777240"/>
-          </a:xfrm>
-          <a:prstGeom prst="rect">
-            <a:avLst/>
-          </a:prstGeom>
-          <a:noFill/>
-          <a:ln/>
-        </p:spPr>
-        <p:txBody>
-          <a:bodyPr wrap="square" rtlCol="0" anchor="t"/>
-          <a:lstStyle/>
-          <a:p>
-            <a:pPr rtl="1" algn="r" indent="0" marL="0">
-              <a:lnSpc>
-                <a:spcPct val="115000"/>
-              </a:lnSpc>
-              <a:buNone/>
-            </a:pPr>
-            <a:r>
-              <a:rPr lang="ar-SA" altLang="en-US" sz="1300" dirty="0">
-                <a:solidFill>
-                  <a:srgbClr val="16323A"/>
-                </a:solidFill>
-                <a:latin typeface="Arial" pitchFamily="34" charset="0"/>
-                <a:ea typeface="Arial" pitchFamily="34" charset="-122"/>
-                <a:cs typeface="Arial" pitchFamily="34" charset="-120"/>
-              </a:rPr>
-              <a:t>اذكر استخدامك له بأمانة والتزم بأنظمة مدرستك أو جامعتك</a:t>
-            </a:r>
-            <a:endParaRPr lang="ar-SA" sz="1300" dirty="0"/>
-          </a:p>
-        </p:txBody>
-      </p:sp>
-      <p:sp>
-        <p:nvSpPr>
-          <p:cNvPr id="30" name="Shape 20"/>
-          <p:cNvSpPr/>
-          <p:nvPr/>
-        </p:nvSpPr>
-        <p:spPr>
-          <a:xfrm>
-            <a:off x="5212080" y="4946904"/>
-            <a:ext cx="438912" cy="438912"/>
-          </a:xfrm>
-          <a:prstGeom prst="ellipse">
-            <a:avLst/>
-          </a:prstGeom>
-          <a:solidFill>
-            <a:srgbClr val="0E2A32"/>
-          </a:solidFill>
-          <a:ln/>
-        </p:spPr>
-      </p:sp>
-      <p:pic>
-        <p:nvPicPr>
-          <p:cNvPr id="31" name="Image 8" descr="preencoded.png">    </p:cNvPr>
-          <p:cNvPicPr>
-            <a:picLocks noChangeAspect="1"/>
-          </p:cNvPicPr>
-          <p:nvPr/>
-        </p:nvPicPr>
-        <p:blipFill>
-          <a:blip r:embed="rId9"/>
-          <a:stretch>
-            <a:fillRect/>
-          </a:stretch>
-        </p:blipFill>
-        <p:spPr>
-          <a:xfrm>
-            <a:off x="5326197" y="5061021"/>
-            <a:ext cx="210678" cy="210678"/>
-          </a:xfrm>
-          <a:prstGeom prst="rect">
-            <a:avLst/>
-          </a:prstGeom>
-        </p:spPr>
-      </p:pic>
-      <p:sp>
-        <p:nvSpPr>
-          <p:cNvPr id="32" name="Text 21"/>
-          <p:cNvSpPr/>
-          <p:nvPr/>
-        </p:nvSpPr>
-        <p:spPr>
-          <a:xfrm>
-            <a:off x="822960" y="4855464"/>
-            <a:ext cx="4206240" cy="777240"/>
-          </a:xfrm>
-          <a:prstGeom prst="rect">
-            <a:avLst/>
-          </a:prstGeom>
-          <a:noFill/>
-          <a:ln/>
-        </p:spPr>
-        <p:txBody>
-          <a:bodyPr wrap="square" rtlCol="0" anchor="t"/>
-          <a:lstStyle/>
-          <a:p>
-            <a:pPr rtl="1" algn="r" indent="0" marL="0">
-              <a:lnSpc>
-                <a:spcPct val="115000"/>
-              </a:lnSpc>
-              <a:buNone/>
-            </a:pPr>
-            <a:r>
-              <a:rPr lang="ar-SA" altLang="en-US" sz="1300" dirty="0">
-                <a:solidFill>
-                  <a:srgbClr val="16323A"/>
-                </a:solidFill>
-                <a:latin typeface="Arial" pitchFamily="34" charset="0"/>
-                <a:ea typeface="Arial" pitchFamily="34" charset="-122"/>
-                <a:cs typeface="Arial" pitchFamily="34" charset="-120"/>
-              </a:rPr>
-              <a:t>ما تتعلمه بنفسك يبقى — وما ينسخه لك الذكاء الاصطناعي يُنسى</a:t>
-            </a:r>
-            <a:endParaRPr lang="ar-SA" sz="1300" dirty="0"/>
+              <a:rPr lang="ar-SA" altLang="en-US" sz="1100" dirty="0">
+                <a:solidFill>
+                  <a:srgbClr val="CDE9E5"/>
+                </a:solidFill>
+                <a:latin typeface="Arial" pitchFamily="34" charset="0"/>
+                <a:ea typeface="Arial" pitchFamily="34" charset="-122"/>
+                <a:cs typeface="Arial" pitchFamily="34" charset="-120"/>
+              </a:rPr>
+              <a:t>من مشاهدات Netflix مصدرها التوصيات</a:t>
+            </a:r>
+            <a:endParaRPr lang="ar-SA" sz="1100" dirty="0"/>
           </a:p>
         </p:txBody>
       </p:sp>
@@ -11385,7 +11893,7 @@
                 <a:ea typeface="Arial" pitchFamily="34" charset="-122"/>
                 <a:cs typeface="Arial" pitchFamily="34" charset="-120"/>
               </a:rPr>
-              <a:t>في الصحة والطب</a:t>
+              <a:t>في التعليم والدراسة</a:t>
             </a:r>
             <a:endParaRPr lang="ar-SA" sz="3100" dirty="0"/>
           </a:p>
@@ -11399,16 +11907,16 @@
         </p:nvSpPr>
         <p:spPr>
           <a:xfrm>
-            <a:off x="8198968" y="1554480"/>
-            <a:ext cx="3566160" cy="3063240"/>
+            <a:off x="6263640" y="1508760"/>
+            <a:ext cx="5349240" cy="4206240"/>
           </a:xfrm>
           <a:prstGeom prst="roundRect">
             <a:avLst>
-              <a:gd name="adj" fmla="val 4179"/>
+              <a:gd name="adj" fmla="val 3043"/>
             </a:avLst>
           </a:prstGeom>
           <a:solidFill>
-            <a:srgbClr val="F2F7F7"/>
+            <a:srgbClr val="E4F7F1"/>
           </a:solidFill>
           <a:ln/>
           <a:effectLst>
@@ -11422,27 +11930,66 @@
       </p:sp>
       <p:sp>
         <p:nvSpPr>
-          <p:cNvPr id="6" name="Shape 3"/>
-          <p:cNvSpPr/>
-          <p:nvPr/>
-        </p:nvSpPr>
-        <p:spPr>
-          <a:xfrm>
-            <a:off x="9524848" y="1874520"/>
-            <a:ext cx="914400" cy="914400"/>
+          <p:cNvPr id="6" name="Text 3"/>
+          <p:cNvSpPr/>
+          <p:nvPr/>
+        </p:nvSpPr>
+        <p:spPr>
+          <a:xfrm>
+            <a:off x="6537960" y="1737360"/>
+            <a:ext cx="4800600" cy="457200"/>
+          </a:xfrm>
+          <a:prstGeom prst="rect">
+            <a:avLst/>
+          </a:prstGeom>
+          <a:noFill/>
+          <a:ln/>
+        </p:spPr>
+        <p:txBody>
+          <a:bodyPr wrap="square" rtlCol="0" anchor="ctr"/>
+          <a:lstStyle/>
+          <a:p>
+            <a:pPr rtl="1" algn="r" indent="0" marL="0">
+              <a:buNone/>
+            </a:pPr>
+            <a:r>
+              <a:rPr lang="ar-SA" altLang="en-US" sz="1800" b="1" dirty="0">
+                <a:solidFill>
+                  <a:srgbClr val="028090"/>
+                </a:solidFill>
+                <a:latin typeface="Arial" pitchFamily="34" charset="0"/>
+                <a:ea typeface="Arial" pitchFamily="34" charset="-122"/>
+                <a:cs typeface="Arial" pitchFamily="34" charset="-120"/>
+              </a:rPr>
+              <a:t>كيف يساعدك في الدراسة؟</a:t>
+            </a:r>
+            <a:endParaRPr lang="ar-SA" sz="1800" dirty="0"/>
+          </a:p>
+        </p:txBody>
+      </p:sp>
+      <p:sp>
+        <p:nvSpPr>
+          <p:cNvPr id="7" name="Shape 4"/>
+          <p:cNvSpPr/>
+          <p:nvPr/>
+        </p:nvSpPr>
+        <p:spPr>
+          <a:xfrm>
+            <a:off x="10927080" y="2423160"/>
+            <a:ext cx="438912" cy="438912"/>
           </a:xfrm>
           <a:prstGeom prst="ellipse">
             <a:avLst/>
           </a:prstGeom>
           <a:solidFill>
-            <a:srgbClr val="028090"/>
+            <a:srgbClr val="02C39A"/>
           </a:solidFill>
           <a:ln/>
         </p:spPr>
       </p:sp>
       <p:pic>
         <p:nvPicPr>
-          <p:cNvPr id="7" name="Image 1" descr="preencoded.png">    </p:cNvPr>
+          <p:cNvPr id="8" name="Image 1" descr="preencoded.png">    </p:cNvPr>
           <p:cNvPicPr>
             <a:picLocks noChangeAspect="1"/>
           </p:cNvPicPr>
@@ -11456,9 +12003,95 @@
         </p:blipFill>
         <p:spPr>
           <a:xfrm>
-            <a:off x="9762592" y="2112264"/>
+            <a:off x="11041197" y="2537277"/>
+            <a:ext cx="210678" cy="210678"/>
+          </a:xfrm>
+          <a:prstGeom prst="rect">
+            <a:avLst/>
+          </a:prstGeom>
+        </p:spPr>
+      </p:pic>
+      <p:sp>
+        <p:nvSpPr>
+          <p:cNvPr id="9" name="Text 5"/>
+          <p:cNvSpPr/>
+          <p:nvPr/>
+        </p:nvSpPr>
+        <p:spPr>
+          <a:xfrm>
+            <a:off x="6537960" y="2331720"/>
+            <a:ext cx="4206240" cy="777240"/>
+          </a:xfrm>
+          <a:prstGeom prst="rect">
+            <a:avLst/>
+          </a:prstGeom>
+          <a:noFill/>
+          <a:ln/>
+        </p:spPr>
+        <p:txBody>
+          <a:bodyPr wrap="square" rtlCol="0" anchor="t"/>
+          <a:lstStyle/>
+          <a:p>
+            <a:pPr rtl="1" algn="r" indent="0" marL="0">
+              <a:lnSpc>
+                <a:spcPct val="115000"/>
+              </a:lnSpc>
+              <a:buNone/>
+            </a:pPr>
+            <a:r>
+              <a:rPr lang="ar-SA" altLang="en-US" sz="1300" dirty="0">
+                <a:solidFill>
+                  <a:srgbClr val="16323A"/>
+                </a:solidFill>
+                <a:latin typeface="Arial" pitchFamily="34" charset="0"/>
+                <a:ea typeface="Arial" pitchFamily="34" charset="-122"/>
+                <a:cs typeface="Arial" pitchFamily="34" charset="-120"/>
+              </a:rPr>
+              <a:t>شرح مبسط لأي مفهوم صعب بأسلوب يناسبك، مع أمثلة إضافية عند الطلب</a:t>
+            </a:r>
+            <a:endParaRPr lang="ar-SA" sz="1300" dirty="0"/>
+          </a:p>
+        </p:txBody>
+      </p:sp>
+      <p:sp>
+        <p:nvSpPr>
+          <p:cNvPr id="10" name="Shape 6"/>
+          <p:cNvSpPr/>
+          <p:nvPr/>
+        </p:nvSpPr>
+        <p:spPr>
+          <a:xfrm>
+            <a:off x="10927080" y="3264408"/>
             <a:ext cx="438912" cy="438912"/>
           </a:xfrm>
+          <a:prstGeom prst="ellipse">
+            <a:avLst/>
+          </a:prstGeom>
+          <a:solidFill>
+            <a:srgbClr val="02C39A"/>
+          </a:solidFill>
+          <a:ln/>
+        </p:spPr>
+      </p:sp>
+      <p:pic>
+        <p:nvPicPr>
+          <p:cNvPr id="11" name="Image 2" descr="preencoded.png">    </p:cNvPr>
+          <p:cNvPicPr>
+            <a:picLocks noChangeAspect="1"/>
+          </p:cNvPicPr>
+          <p:nvPr/>
+        </p:nvPicPr>
+        <p:blipFill>
+          <a:blip r:embed="rId3"/>
+          <a:stretch>
+            <a:fillRect/>
+          </a:stretch>
+        </p:blipFill>
+        <p:spPr>
+          <a:xfrm>
+            <a:off x="11041197" y="3378525"/>
+            <a:ext cx="210678" cy="210678"/>
+          </a:xfrm>
           <a:prstGeom prst="rect">
             <a:avLst/>
           </a:prstGeom>
@@ -11466,105 +12099,243 @@
       </p:pic>
       <p:sp>
         <p:nvSpPr>
-          <p:cNvPr id="8" name="Text 4"/>
-          <p:cNvSpPr/>
-          <p:nvPr/>
-        </p:nvSpPr>
-        <p:spPr>
-          <a:xfrm>
-            <a:off x="8381848" y="2926080"/>
-            <a:ext cx="3200400" cy="457200"/>
-          </a:xfrm>
-          <a:prstGeom prst="rect">
-            <a:avLst/>
-          </a:prstGeom>
-          <a:noFill/>
-          <a:ln/>
-        </p:spPr>
-        <p:txBody>
-          <a:bodyPr wrap="square" rtlCol="0" anchor="ctr"/>
-          <a:lstStyle/>
-          <a:p>
-            <a:pPr rtl="1" algn="ctr" indent="0" marL="0">
-              <a:buNone/>
-            </a:pPr>
-            <a:r>
-              <a:rPr lang="ar-SA" altLang="en-US" sz="1650" b="1" dirty="0">
-                <a:solidFill>
-                  <a:srgbClr val="0E2A32"/>
-                </a:solidFill>
-                <a:latin typeface="Arial" pitchFamily="34" charset="0"/>
-                <a:ea typeface="Arial" pitchFamily="34" charset="-122"/>
-                <a:cs typeface="Arial" pitchFamily="34" charset="-120"/>
-              </a:rPr>
-              <a:t>تحليل الصور الطبية</a:t>
-            </a:r>
-            <a:endParaRPr lang="ar-SA" sz="1650" dirty="0"/>
-          </a:p>
-        </p:txBody>
-      </p:sp>
-      <p:sp>
-        <p:nvSpPr>
-          <p:cNvPr id="9" name="Text 5"/>
-          <p:cNvSpPr/>
-          <p:nvPr/>
-        </p:nvSpPr>
-        <p:spPr>
-          <a:xfrm>
-            <a:off x="8455000" y="3383280"/>
-            <a:ext cx="3054096" cy="1143000"/>
-          </a:xfrm>
-          <a:prstGeom prst="rect">
-            <a:avLst/>
-          </a:prstGeom>
-          <a:noFill/>
-          <a:ln/>
-        </p:spPr>
-        <p:txBody>
-          <a:bodyPr wrap="square" rtlCol="0" anchor="ctr"/>
-          <a:lstStyle/>
-          <a:p>
-            <a:pPr rtl="1" algn="ctr" indent="0" marL="0">
+          <p:cNvPr id="12" name="Text 7"/>
+          <p:cNvSpPr/>
+          <p:nvPr/>
+        </p:nvSpPr>
+        <p:spPr>
+          <a:xfrm>
+            <a:off x="6537960" y="3172968"/>
+            <a:ext cx="4206240" cy="777240"/>
+          </a:xfrm>
+          <a:prstGeom prst="rect">
+            <a:avLst/>
+          </a:prstGeom>
+          <a:noFill/>
+          <a:ln/>
+        </p:spPr>
+        <p:txBody>
+          <a:bodyPr wrap="square" rtlCol="0" anchor="t"/>
+          <a:lstStyle/>
+          <a:p>
+            <a:pPr rtl="1" algn="r" indent="0" marL="0">
               <a:lnSpc>
-                <a:spcPct val="118000"/>
+                <a:spcPct val="115000"/>
               </a:lnSpc>
               <a:buNone/>
             </a:pPr>
             <a:r>
-              <a:rPr lang="ar-SA" altLang="en-US" sz="1250" dirty="0">
-                <a:solidFill>
-                  <a:srgbClr val="587076"/>
-                </a:solidFill>
-                <a:latin typeface="Arial" pitchFamily="34" charset="0"/>
-                <a:ea typeface="Arial" pitchFamily="34" charset="-122"/>
-                <a:cs typeface="Arial" pitchFamily="34" charset="-120"/>
-              </a:rPr>
-              <a:t>أنظمة تكشف الأورام والكسور في صور الأشعة بدقة تضاهي الأطباء المتخصصين، وتساعدهم على قرارات أسرع.</a:t>
-            </a:r>
-            <a:endParaRPr lang="ar-SA" sz="1250" dirty="0"/>
-          </a:p>
-        </p:txBody>
-      </p:sp>
-      <p:sp>
-        <p:nvSpPr>
-          <p:cNvPr id="10" name="Shape 6"/>
-          <p:cNvSpPr/>
-          <p:nvPr/>
-        </p:nvSpPr>
-        <p:spPr>
-          <a:xfrm>
-            <a:off x="4312768" y="1554480"/>
-            <a:ext cx="3566160" cy="3063240"/>
+              <a:rPr lang="ar-SA" altLang="en-US" sz="1300" dirty="0">
+                <a:solidFill>
+                  <a:srgbClr val="16323A"/>
+                </a:solidFill>
+                <a:latin typeface="Arial" pitchFamily="34" charset="0"/>
+                <a:ea typeface="Arial" pitchFamily="34" charset="-122"/>
+                <a:cs typeface="Arial" pitchFamily="34" charset="-120"/>
+              </a:rPr>
+              <a:t>تلخيص الدروس والمقالات الطويلة ومراجعة سريعة قبل الاختبار</a:t>
+            </a:r>
+            <a:endParaRPr lang="ar-SA" sz="1300" dirty="0"/>
+          </a:p>
+        </p:txBody>
+      </p:sp>
+      <p:sp>
+        <p:nvSpPr>
+          <p:cNvPr id="13" name="Shape 8"/>
+          <p:cNvSpPr/>
+          <p:nvPr/>
+        </p:nvSpPr>
+        <p:spPr>
+          <a:xfrm>
+            <a:off x="10927080" y="4105656"/>
+            <a:ext cx="438912" cy="438912"/>
+          </a:xfrm>
+          <a:prstGeom prst="ellipse">
+            <a:avLst/>
+          </a:prstGeom>
+          <a:solidFill>
+            <a:srgbClr val="02C39A"/>
+          </a:solidFill>
+          <a:ln/>
+        </p:spPr>
+      </p:sp>
+      <p:pic>
+        <p:nvPicPr>
+          <p:cNvPr id="14" name="Image 3" descr="preencoded.png">    </p:cNvPr>
+          <p:cNvPicPr>
+            <a:picLocks noChangeAspect="1"/>
+          </p:cNvPicPr>
+          <p:nvPr/>
+        </p:nvPicPr>
+        <p:blipFill>
+          <a:blip r:embed="rId4"/>
+          <a:stretch>
+            <a:fillRect/>
+          </a:stretch>
+        </p:blipFill>
+        <p:spPr>
+          <a:xfrm>
+            <a:off x="11041197" y="4219773"/>
+            <a:ext cx="210678" cy="210678"/>
+          </a:xfrm>
+          <a:prstGeom prst="rect">
+            <a:avLst/>
+          </a:prstGeom>
+        </p:spPr>
+      </p:pic>
+      <p:sp>
+        <p:nvSpPr>
+          <p:cNvPr id="15" name="Text 9"/>
+          <p:cNvSpPr/>
+          <p:nvPr/>
+        </p:nvSpPr>
+        <p:spPr>
+          <a:xfrm>
+            <a:off x="6537960" y="4014216"/>
+            <a:ext cx="4206240" cy="777240"/>
+          </a:xfrm>
+          <a:prstGeom prst="rect">
+            <a:avLst/>
+          </a:prstGeom>
+          <a:noFill/>
+          <a:ln/>
+        </p:spPr>
+        <p:txBody>
+          <a:bodyPr wrap="square" rtlCol="0" anchor="t"/>
+          <a:lstStyle/>
+          <a:p>
+            <a:pPr rtl="1" algn="r" indent="0" marL="0">
+              <a:lnSpc>
+                <a:spcPct val="115000"/>
+              </a:lnSpc>
+              <a:buNone/>
+            </a:pPr>
+            <a:r>
+              <a:rPr lang="ar-SA" altLang="en-US" sz="1300" dirty="0">
+                <a:solidFill>
+                  <a:srgbClr val="16323A"/>
+                </a:solidFill>
+                <a:latin typeface="Arial" pitchFamily="34" charset="0"/>
+                <a:ea typeface="Arial" pitchFamily="34" charset="-122"/>
+                <a:cs typeface="Arial" pitchFamily="34" charset="-120"/>
+              </a:rPr>
+              <a:t>تعلم اللغات بالممارسة والتصحيح الفوري (مثل Duolingo)</a:t>
+            </a:r>
+            <a:endParaRPr lang="ar-SA" sz="1300" dirty="0"/>
+          </a:p>
+        </p:txBody>
+      </p:sp>
+      <p:sp>
+        <p:nvSpPr>
+          <p:cNvPr id="16" name="Shape 10"/>
+          <p:cNvSpPr/>
+          <p:nvPr/>
+        </p:nvSpPr>
+        <p:spPr>
+          <a:xfrm>
+            <a:off x="10927080" y="4946904"/>
+            <a:ext cx="438912" cy="438912"/>
+          </a:xfrm>
+          <a:prstGeom prst="ellipse">
+            <a:avLst/>
+          </a:prstGeom>
+          <a:solidFill>
+            <a:srgbClr val="02C39A"/>
+          </a:solidFill>
+          <a:ln/>
+        </p:spPr>
+      </p:sp>
+      <p:pic>
+        <p:nvPicPr>
+          <p:cNvPr id="17" name="Image 4" descr="preencoded.png">    </p:cNvPr>
+          <p:cNvPicPr>
+            <a:picLocks noChangeAspect="1"/>
+          </p:cNvPicPr>
+          <p:nvPr/>
+        </p:nvPicPr>
+        <p:blipFill>
+          <a:blip r:embed="rId5"/>
+          <a:stretch>
+            <a:fillRect/>
+          </a:stretch>
+        </p:blipFill>
+        <p:spPr>
+          <a:xfrm>
+            <a:off x="11041197" y="5061021"/>
+            <a:ext cx="210678" cy="210678"/>
+          </a:xfrm>
+          <a:prstGeom prst="rect">
+            <a:avLst/>
+          </a:prstGeom>
+        </p:spPr>
+      </p:pic>
+      <p:sp>
+        <p:nvSpPr>
+          <p:cNvPr id="18" name="Text 11"/>
+          <p:cNvSpPr/>
+          <p:nvPr/>
+        </p:nvSpPr>
+        <p:spPr>
+          <a:xfrm>
+            <a:off x="6537960" y="4855464"/>
+            <a:ext cx="4206240" cy="777240"/>
+          </a:xfrm>
+          <a:prstGeom prst="rect">
+            <a:avLst/>
+          </a:prstGeom>
+          <a:noFill/>
+          <a:ln/>
+        </p:spPr>
+        <p:txBody>
+          <a:bodyPr wrap="square" rtlCol="0" anchor="t"/>
+          <a:lstStyle/>
+          <a:p>
+            <a:pPr rtl="1" algn="r" indent="0" marL="0">
+              <a:lnSpc>
+                <a:spcPct val="115000"/>
+              </a:lnSpc>
+              <a:buNone/>
+            </a:pPr>
+            <a:r>
+              <a:rPr lang="ar-SA" altLang="en-US" sz="1300" dirty="0">
+                <a:solidFill>
+                  <a:srgbClr val="16323A"/>
+                </a:solidFill>
+                <a:latin typeface="Arial" pitchFamily="34" charset="0"/>
+                <a:ea typeface="Arial" pitchFamily="34" charset="-122"/>
+                <a:cs typeface="Arial" pitchFamily="34" charset="-120"/>
+              </a:rPr>
+              <a:t>توليد أسئلة تدريبية واختبار نفسك في أي موضوع</a:t>
+            </a:r>
+            <a:endParaRPr lang="ar-SA" sz="1300" dirty="0"/>
+          </a:p>
+        </p:txBody>
+      </p:sp>
+      <p:sp>
+        <p:nvSpPr>
+          <p:cNvPr id="19" name="Shape 12"/>
+          <p:cNvSpPr/>
+          <p:nvPr/>
+        </p:nvSpPr>
+        <p:spPr>
+          <a:xfrm>
+            <a:off x="548640" y="1508760"/>
+            <a:ext cx="5349240" cy="4206240"/>
           </a:xfrm>
           <a:prstGeom prst="roundRect">
             <a:avLst>
-              <a:gd name="adj" fmla="val 4179"/>
+              <a:gd name="adj" fmla="val 3043"/>
             </a:avLst>
           </a:prstGeom>
           <a:solidFill>
-            <a:srgbClr val="F2F7F7"/>
-          </a:solidFill>
-          <a:ln/>
+            <a:srgbClr val="FFFFFF"/>
+          </a:solidFill>
+          <a:ln w="12700">
+            <a:solidFill>
+              <a:srgbClr val="DCE8E8"/>
+            </a:solidFill>
+            <a:prstDash val="solid"/>
+          </a:ln>
           <a:effectLst>
             <a:outerShdw sx="100000" sy="100000" kx="0" ky="0" algn="bl" rotWithShape="0" blurRad="88900" dist="25400" dir="5400000">
               <a:srgbClr val="0E2A32">
@@ -11576,196 +12347,167 @@
       </p:sp>
       <p:sp>
         <p:nvSpPr>
-          <p:cNvPr id="11" name="Shape 7"/>
-          <p:cNvSpPr/>
-          <p:nvPr/>
-        </p:nvSpPr>
-        <p:spPr>
-          <a:xfrm>
-            <a:off x="5638648" y="1874520"/>
-            <a:ext cx="914400" cy="914400"/>
+          <p:cNvPr id="20" name="Text 13"/>
+          <p:cNvSpPr/>
+          <p:nvPr/>
+        </p:nvSpPr>
+        <p:spPr>
+          <a:xfrm>
+            <a:off x="822960" y="1737360"/>
+            <a:ext cx="4800600" cy="457200"/>
+          </a:xfrm>
+          <a:prstGeom prst="rect">
+            <a:avLst/>
+          </a:prstGeom>
+          <a:noFill/>
+          <a:ln/>
+        </p:spPr>
+        <p:txBody>
+          <a:bodyPr wrap="square" rtlCol="0" anchor="ctr"/>
+          <a:lstStyle/>
+          <a:p>
+            <a:pPr rtl="1" algn="r" indent="0" marL="0">
+              <a:buNone/>
+            </a:pPr>
+            <a:r>
+              <a:rPr lang="ar-SA" altLang="en-US" sz="1800" b="1" dirty="0">
+                <a:solidFill>
+                  <a:srgbClr val="0E2A32"/>
+                </a:solidFill>
+                <a:latin typeface="Arial" pitchFamily="34" charset="0"/>
+                <a:ea typeface="Arial" pitchFamily="34" charset="-122"/>
+                <a:cs typeface="Arial" pitchFamily="34" charset="-120"/>
+              </a:rPr>
+              <a:t>استخدمه بذكاء… لا بدلاً عن عقلك</a:t>
+            </a:r>
+            <a:endParaRPr lang="ar-SA" sz="1800" dirty="0"/>
+          </a:p>
+        </p:txBody>
+      </p:sp>
+      <p:sp>
+        <p:nvSpPr>
+          <p:cNvPr id="21" name="Shape 14"/>
+          <p:cNvSpPr/>
+          <p:nvPr/>
+        </p:nvSpPr>
+        <p:spPr>
+          <a:xfrm>
+            <a:off x="5212080" y="2423160"/>
+            <a:ext cx="438912" cy="438912"/>
           </a:xfrm>
           <a:prstGeom prst="ellipse">
             <a:avLst/>
           </a:prstGeom>
           <a:solidFill>
-            <a:srgbClr val="02C39A"/>
+            <a:srgbClr val="0E2A32"/>
           </a:solidFill>
           <a:ln/>
         </p:spPr>
       </p:sp>
       <p:pic>
         <p:nvPicPr>
-          <p:cNvPr id="12" name="Image 2" descr="preencoded.png">    </p:cNvPr>
+          <p:cNvPr id="22" name="Image 5" descr="preencoded.png">    </p:cNvPr>
           <p:cNvPicPr>
             <a:picLocks noChangeAspect="1"/>
           </p:cNvPicPr>
           <p:nvPr/>
         </p:nvPicPr>
         <p:blipFill>
-          <a:blip r:embed="rId3"/>
+          <a:blip r:embed="rId6"/>
           <a:stretch>
             <a:fillRect/>
           </a:stretch>
         </p:blipFill>
         <p:spPr>
           <a:xfrm>
-            <a:off x="5876392" y="2112264"/>
+            <a:off x="5326197" y="2537277"/>
+            <a:ext cx="210678" cy="210678"/>
+          </a:xfrm>
+          <a:prstGeom prst="rect">
+            <a:avLst/>
+          </a:prstGeom>
+        </p:spPr>
+      </p:pic>
+      <p:sp>
+        <p:nvSpPr>
+          <p:cNvPr id="23" name="Text 15"/>
+          <p:cNvSpPr/>
+          <p:nvPr/>
+        </p:nvSpPr>
+        <p:spPr>
+          <a:xfrm>
+            <a:off x="822960" y="2331720"/>
+            <a:ext cx="4206240" cy="777240"/>
+          </a:xfrm>
+          <a:prstGeom prst="rect">
+            <a:avLst/>
+          </a:prstGeom>
+          <a:noFill/>
+          <a:ln/>
+        </p:spPr>
+        <p:txBody>
+          <a:bodyPr wrap="square" rtlCol="0" anchor="t"/>
+          <a:lstStyle/>
+          <a:p>
+            <a:pPr rtl="1" algn="r" indent="0" marL="0">
+              <a:lnSpc>
+                <a:spcPct val="115000"/>
+              </a:lnSpc>
+              <a:buNone/>
+            </a:pPr>
+            <a:r>
+              <a:rPr lang="ar-SA" altLang="en-US" sz="1300" dirty="0">
+                <a:solidFill>
+                  <a:srgbClr val="16323A"/>
+                </a:solidFill>
+                <a:latin typeface="Arial" pitchFamily="34" charset="0"/>
+                <a:ea typeface="Arial" pitchFamily="34" charset="-122"/>
+                <a:cs typeface="Arial" pitchFamily="34" charset="-120"/>
+              </a:rPr>
+              <a:t>تحقق دائماً من المعلومات — النماذج قد «تهلوس» وتخترع إجابات واثقة لكنها خاطئة</a:t>
+            </a:r>
+            <a:endParaRPr lang="ar-SA" sz="1300" dirty="0"/>
+          </a:p>
+        </p:txBody>
+      </p:sp>
+      <p:sp>
+        <p:nvSpPr>
+          <p:cNvPr id="24" name="Shape 16"/>
+          <p:cNvSpPr/>
+          <p:nvPr/>
+        </p:nvSpPr>
+        <p:spPr>
+          <a:xfrm>
+            <a:off x="5212080" y="3264408"/>
             <a:ext cx="438912" cy="438912"/>
           </a:xfrm>
-          <a:prstGeom prst="rect">
-            <a:avLst/>
-          </a:prstGeom>
-        </p:spPr>
-      </p:pic>
-      <p:sp>
-        <p:nvSpPr>
-          <p:cNvPr id="13" name="Text 8"/>
-          <p:cNvSpPr/>
-          <p:nvPr/>
-        </p:nvSpPr>
-        <p:spPr>
-          <a:xfrm>
-            <a:off x="4495648" y="2926080"/>
-            <a:ext cx="3200400" cy="457200"/>
-          </a:xfrm>
-          <a:prstGeom prst="rect">
-            <a:avLst/>
-          </a:prstGeom>
-          <a:noFill/>
-          <a:ln/>
-        </p:spPr>
-        <p:txBody>
-          <a:bodyPr wrap="square" rtlCol="0" anchor="ctr"/>
-          <a:lstStyle/>
-          <a:p>
-            <a:pPr rtl="1" algn="ctr" indent="0" marL="0">
-              <a:buNone/>
-            </a:pPr>
-            <a:r>
-              <a:rPr lang="ar-SA" altLang="en-US" sz="1650" b="1" dirty="0">
-                <a:solidFill>
-                  <a:srgbClr val="0E2A32"/>
-                </a:solidFill>
-                <a:latin typeface="Arial" pitchFamily="34" charset="0"/>
-                <a:ea typeface="Arial" pitchFamily="34" charset="-122"/>
-                <a:cs typeface="Arial" pitchFamily="34" charset="-120"/>
-              </a:rPr>
-              <a:t>اكتشاف الأدوية</a:t>
-            </a:r>
-            <a:endParaRPr lang="ar-SA" sz="1650" dirty="0"/>
-          </a:p>
-        </p:txBody>
-      </p:sp>
-      <p:sp>
-        <p:nvSpPr>
-          <p:cNvPr id="14" name="Text 9"/>
-          <p:cNvSpPr/>
-          <p:nvPr/>
-        </p:nvSpPr>
-        <p:spPr>
-          <a:xfrm>
-            <a:off x="4568800" y="3383280"/>
-            <a:ext cx="3054096" cy="1143000"/>
-          </a:xfrm>
-          <a:prstGeom prst="rect">
-            <a:avLst/>
-          </a:prstGeom>
-          <a:noFill/>
-          <a:ln/>
-        </p:spPr>
-        <p:txBody>
-          <a:bodyPr wrap="square" rtlCol="0" anchor="ctr"/>
-          <a:lstStyle/>
-          <a:p>
-            <a:pPr rtl="1" algn="ctr" indent="0" marL="0">
-              <a:lnSpc>
-                <a:spcPct val="118000"/>
-              </a:lnSpc>
-              <a:buNone/>
-            </a:pPr>
-            <a:r>
-              <a:rPr lang="ar-SA" altLang="en-US" sz="1250" dirty="0">
-                <a:solidFill>
-                  <a:srgbClr val="587076"/>
-                </a:solidFill>
-                <a:latin typeface="Arial" pitchFamily="34" charset="0"/>
-                <a:ea typeface="Arial" pitchFamily="34" charset="-122"/>
-                <a:cs typeface="Arial" pitchFamily="34" charset="-120"/>
-              </a:rPr>
-              <a:t>نظام AlphaFold تنبأ ببنية أكثر من 200 مليون بروتين — عمل كان يستغرق سنوات في المختبر لكل بروتين.</a:t>
-            </a:r>
-            <a:endParaRPr lang="ar-SA" sz="1250" dirty="0"/>
-          </a:p>
-        </p:txBody>
-      </p:sp>
-      <p:sp>
-        <p:nvSpPr>
-          <p:cNvPr id="15" name="Shape 10"/>
-          <p:cNvSpPr/>
-          <p:nvPr/>
-        </p:nvSpPr>
-        <p:spPr>
-          <a:xfrm>
-            <a:off x="426568" y="1554480"/>
-            <a:ext cx="3566160" cy="3063240"/>
-          </a:xfrm>
-          <a:prstGeom prst="roundRect">
-            <a:avLst>
-              <a:gd name="adj" fmla="val 4179"/>
-            </a:avLst>
-          </a:prstGeom>
-          <a:solidFill>
-            <a:srgbClr val="F2F7F7"/>
-          </a:solidFill>
-          <a:ln/>
-          <a:effectLst>
-            <a:outerShdw sx="100000" sy="100000" kx="0" ky="0" algn="bl" rotWithShape="0" blurRad="88900" dist="25400" dir="5400000">
-              <a:srgbClr val="0E2A32">
-                <a:alpha val="16000"/>
-              </a:srgbClr>
-            </a:outerShdw>
-          </a:effectLst>
-        </p:spPr>
-      </p:sp>
-      <p:sp>
-        <p:nvSpPr>
-          <p:cNvPr id="16" name="Shape 11"/>
-          <p:cNvSpPr/>
-          <p:nvPr/>
-        </p:nvSpPr>
-        <p:spPr>
-          <a:xfrm>
-            <a:off x="1752448" y="1874520"/>
-            <a:ext cx="914400" cy="914400"/>
-          </a:xfrm>
           <a:prstGeom prst="ellipse">
             <a:avLst/>
           </a:prstGeom>
           <a:solidFill>
-            <a:srgbClr val="028090"/>
+            <a:srgbClr val="0E2A32"/>
           </a:solidFill>
           <a:ln/>
         </p:spPr>
       </p:sp>
       <p:pic>
         <p:nvPicPr>
-          <p:cNvPr id="17" name="Image 3" descr="preencoded.png">    </p:cNvPr>
+          <p:cNvPr id="25" name="Image 6" descr="preencoded.png">    </p:cNvPr>
           <p:cNvPicPr>
             <a:picLocks noChangeAspect="1"/>
           </p:cNvPicPr>
           <p:nvPr/>
         </p:nvPicPr>
         <p:blipFill>
-          <a:blip r:embed="rId4"/>
+          <a:blip r:embed="rId7"/>
           <a:stretch>
             <a:fillRect/>
           </a:stretch>
         </p:blipFill>
         <p:spPr>
           <a:xfrm>
-            <a:off x="1990192" y="2112264"/>
-            <a:ext cx="438912" cy="438912"/>
+            <a:off x="5326197" y="3378525"/>
+            <a:ext cx="210678" cy="210678"/>
           </a:xfrm>
           <a:prstGeom prst="rect">
             <a:avLst/>
@@ -11774,163 +12516,215 @@
       </p:pic>
       <p:sp>
         <p:nvSpPr>
-          <p:cNvPr id="18" name="Text 12"/>
-          <p:cNvSpPr/>
-          <p:nvPr/>
-        </p:nvSpPr>
-        <p:spPr>
-          <a:xfrm>
-            <a:off x="609448" y="2926080"/>
-            <a:ext cx="3200400" cy="457200"/>
-          </a:xfrm>
-          <a:prstGeom prst="rect">
-            <a:avLst/>
-          </a:prstGeom>
-          <a:noFill/>
-          <a:ln/>
-        </p:spPr>
-        <p:txBody>
-          <a:bodyPr wrap="square" rtlCol="0" anchor="ctr"/>
-          <a:lstStyle/>
-          <a:p>
-            <a:pPr rtl="1" algn="ctr" indent="0" marL="0">
-              <a:buNone/>
-            </a:pPr>
-            <a:r>
-              <a:rPr lang="ar-SA" altLang="en-US" sz="1650" b="1" dirty="0">
-                <a:solidFill>
-                  <a:srgbClr val="0E2A32"/>
-                </a:solidFill>
-                <a:latin typeface="Arial" pitchFamily="34" charset="0"/>
-                <a:ea typeface="Arial" pitchFamily="34" charset="-122"/>
-                <a:cs typeface="Arial" pitchFamily="34" charset="-120"/>
-              </a:rPr>
-              <a:t>الأجهزة القابلة للارتداء</a:t>
-            </a:r>
-            <a:endParaRPr lang="ar-SA" sz="1650" dirty="0"/>
-          </a:p>
-        </p:txBody>
-      </p:sp>
-      <p:sp>
-        <p:nvSpPr>
-          <p:cNvPr id="19" name="Text 13"/>
-          <p:cNvSpPr/>
-          <p:nvPr/>
-        </p:nvSpPr>
-        <p:spPr>
-          <a:xfrm>
-            <a:off x="682600" y="3383280"/>
-            <a:ext cx="3054096" cy="1143000"/>
-          </a:xfrm>
-          <a:prstGeom prst="rect">
-            <a:avLst/>
-          </a:prstGeom>
-          <a:noFill/>
-          <a:ln/>
-        </p:spPr>
-        <p:txBody>
-          <a:bodyPr wrap="square" rtlCol="0" anchor="ctr"/>
-          <a:lstStyle/>
-          <a:p>
-            <a:pPr rtl="1" algn="ctr" indent="0" marL="0">
-              <a:lnSpc>
-                <a:spcPct val="118000"/>
-              </a:lnSpc>
-              <a:buNone/>
-            </a:pPr>
-            <a:r>
-              <a:rPr lang="ar-SA" altLang="en-US" sz="1250" dirty="0">
-                <a:solidFill>
-                  <a:srgbClr val="587076"/>
-                </a:solidFill>
-                <a:latin typeface="Arial" pitchFamily="34" charset="0"/>
-                <a:ea typeface="Arial" pitchFamily="34" charset="-122"/>
-                <a:cs typeface="Arial" pitchFamily="34" charset="-120"/>
-              </a:rPr>
-              <a:t>الساعات الذكية تراقب نبض القلب والنوم وترسل تنبيهات مبكرة عند اكتشاف اضطراب في النظم.</a:t>
-            </a:r>
-            <a:endParaRPr lang="ar-SA" sz="1250" dirty="0"/>
-          </a:p>
-        </p:txBody>
-      </p:sp>
-      <p:sp>
-        <p:nvSpPr>
-          <p:cNvPr id="20" name="Shape 14"/>
-          <p:cNvSpPr/>
-          <p:nvPr/>
-        </p:nvSpPr>
-        <p:spPr>
-          <a:xfrm>
-            <a:off x="1645920" y="5074920"/>
-            <a:ext cx="8897112" cy="868680"/>
-          </a:xfrm>
-          <a:prstGeom prst="roundRect">
-            <a:avLst>
-              <a:gd name="adj" fmla="val 12632"/>
-            </a:avLst>
-          </a:prstGeom>
-          <a:solidFill>
-            <a:srgbClr val="0E2A32"/>
-          </a:solidFill>
-          <a:ln/>
-        </p:spPr>
-      </p:sp>
-      <p:sp>
-        <p:nvSpPr>
-          <p:cNvPr id="21" name="Text 15"/>
-          <p:cNvSpPr/>
-          <p:nvPr/>
-        </p:nvSpPr>
-        <p:spPr>
-          <a:xfrm>
-            <a:off x="1920240" y="5074920"/>
-            <a:ext cx="8321040" cy="868680"/>
-          </a:xfrm>
-          <a:prstGeom prst="rect">
-            <a:avLst/>
-          </a:prstGeom>
-          <a:noFill/>
-          <a:ln/>
-        </p:spPr>
-        <p:txBody>
-          <a:bodyPr wrap="square" rtlCol="0" anchor="ctr"/>
+          <p:cNvPr id="26" name="Text 17"/>
+          <p:cNvSpPr/>
+          <p:nvPr/>
+        </p:nvSpPr>
+        <p:spPr>
+          <a:xfrm>
+            <a:off x="822960" y="3172968"/>
+            <a:ext cx="4206240" cy="777240"/>
+          </a:xfrm>
+          <a:prstGeom prst="rect">
+            <a:avLst/>
+          </a:prstGeom>
+          <a:noFill/>
+          <a:ln/>
+        </p:spPr>
+        <p:txBody>
+          <a:bodyPr wrap="square" rtlCol="0" anchor="t"/>
           <a:lstStyle/>
           <a:p>
             <a:pPr rtl="1" algn="r" indent="0" marL="0">
               <a:lnSpc>
-                <a:spcPct val="110000"/>
+                <a:spcPct val="115000"/>
               </a:lnSpc>
               <a:buNone/>
             </a:pPr>
             <a:r>
-              <a:rPr lang="ar-SA" altLang="en-US" sz="1450" b="1" dirty="0">
-                <a:solidFill>
-                  <a:srgbClr val="02C39A"/>
-                </a:solidFill>
-                <a:latin typeface="Arial" pitchFamily="34" charset="0"/>
-                <a:ea typeface="Arial" pitchFamily="34" charset="-122"/>
-                <a:cs typeface="Arial" pitchFamily="34" charset="-120"/>
-              </a:rPr>
-              <a:t>القاعدة الذهبية:  </a:t>
-            </a:r>
+              <a:rPr lang="ar-SA" altLang="en-US" sz="1300" dirty="0">
+                <a:solidFill>
+                  <a:srgbClr val="16323A"/>
+                </a:solidFill>
+                <a:latin typeface="Arial" pitchFamily="34" charset="0"/>
+                <a:ea typeface="Arial" pitchFamily="34" charset="-122"/>
+                <a:cs typeface="Arial" pitchFamily="34" charset="-120"/>
+              </a:rPr>
+              <a:t>اجعله معلماً خصوصياً يشرح لك، لا آلة تحل واجباتك مكانك</a:t>
+            </a:r>
+            <a:endParaRPr lang="ar-SA" sz="1300" dirty="0"/>
+          </a:p>
+        </p:txBody>
+      </p:sp>
+      <p:sp>
+        <p:nvSpPr>
+          <p:cNvPr id="27" name="Shape 18"/>
+          <p:cNvSpPr/>
+          <p:nvPr/>
+        </p:nvSpPr>
+        <p:spPr>
+          <a:xfrm>
+            <a:off x="5212080" y="4105656"/>
+            <a:ext cx="438912" cy="438912"/>
+          </a:xfrm>
+          <a:prstGeom prst="ellipse">
+            <a:avLst/>
+          </a:prstGeom>
+          <a:solidFill>
+            <a:srgbClr val="0E2A32"/>
+          </a:solidFill>
+          <a:ln/>
+        </p:spPr>
+      </p:sp>
+      <p:pic>
+        <p:nvPicPr>
+          <p:cNvPr id="28" name="Image 7" descr="preencoded.png">    </p:cNvPr>
+          <p:cNvPicPr>
+            <a:picLocks noChangeAspect="1"/>
+          </p:cNvPicPr>
+          <p:nvPr/>
+        </p:nvPicPr>
+        <p:blipFill>
+          <a:blip r:embed="rId8"/>
+          <a:stretch>
+            <a:fillRect/>
+          </a:stretch>
+        </p:blipFill>
+        <p:spPr>
+          <a:xfrm>
+            <a:off x="5326197" y="4219773"/>
+            <a:ext cx="210678" cy="210678"/>
+          </a:xfrm>
+          <a:prstGeom prst="rect">
+            <a:avLst/>
+          </a:prstGeom>
+        </p:spPr>
+      </p:pic>
+      <p:sp>
+        <p:nvSpPr>
+          <p:cNvPr id="29" name="Text 19"/>
+          <p:cNvSpPr/>
+          <p:nvPr/>
+        </p:nvSpPr>
+        <p:spPr>
+          <a:xfrm>
+            <a:off x="822960" y="4014216"/>
+            <a:ext cx="4206240" cy="777240"/>
+          </a:xfrm>
+          <a:prstGeom prst="rect">
+            <a:avLst/>
+          </a:prstGeom>
+          <a:noFill/>
+          <a:ln/>
+        </p:spPr>
+        <p:txBody>
+          <a:bodyPr wrap="square" rtlCol="0" anchor="t"/>
+          <a:lstStyle/>
+          <a:p>
             <a:pPr rtl="1" algn="r" indent="0" marL="0">
               <a:lnSpc>
-                <a:spcPct val="110000"/>
+                <a:spcPct val="115000"/>
               </a:lnSpc>
               <a:buNone/>
             </a:pPr>
             <a:r>
-              <a:rPr lang="ar-SA" altLang="en-US" sz="1450" dirty="0">
-                <a:solidFill>
-                  <a:srgbClr val="FFFFFF"/>
-                </a:solidFill>
-                <a:latin typeface="Arial" pitchFamily="34" charset="0"/>
-                <a:ea typeface="Arial" pitchFamily="34" charset="-122"/>
-                <a:cs typeface="Arial" pitchFamily="34" charset="-120"/>
-              </a:rPr>
-              <a:t>الذكاء الاصطناعي مساعد للطبيب لا بديل عنه — القرار الطبي يبقى بشرياً.</a:t>
-            </a:r>
-            <a:endParaRPr lang="ar-SA" sz="1450" dirty="0"/>
+              <a:rPr lang="ar-SA" altLang="en-US" sz="1300" dirty="0">
+                <a:solidFill>
+                  <a:srgbClr val="16323A"/>
+                </a:solidFill>
+                <a:latin typeface="Arial" pitchFamily="34" charset="0"/>
+                <a:ea typeface="Arial" pitchFamily="34" charset="-122"/>
+                <a:cs typeface="Arial" pitchFamily="34" charset="-120"/>
+              </a:rPr>
+              <a:t>اذكر استخدامك له بأمانة والتزم بأنظمة مدرستك أو جامعتك</a:t>
+            </a:r>
+            <a:endParaRPr lang="ar-SA" sz="1300" dirty="0"/>
+          </a:p>
+        </p:txBody>
+      </p:sp>
+      <p:sp>
+        <p:nvSpPr>
+          <p:cNvPr id="30" name="Shape 20"/>
+          <p:cNvSpPr/>
+          <p:nvPr/>
+        </p:nvSpPr>
+        <p:spPr>
+          <a:xfrm>
+            <a:off x="5212080" y="4946904"/>
+            <a:ext cx="438912" cy="438912"/>
+          </a:xfrm>
+          <a:prstGeom prst="ellipse">
+            <a:avLst/>
+          </a:prstGeom>
+          <a:solidFill>
+            <a:srgbClr val="0E2A32"/>
+          </a:solidFill>
+          <a:ln/>
+        </p:spPr>
+      </p:sp>
+      <p:pic>
+        <p:nvPicPr>
+          <p:cNvPr id="31" name="Image 8" descr="preencoded.png">    </p:cNvPr>
+          <p:cNvPicPr>
+            <a:picLocks noChangeAspect="1"/>
+          </p:cNvPicPr>
+          <p:nvPr/>
+        </p:nvPicPr>
+        <p:blipFill>
+          <a:blip r:embed="rId9"/>
+          <a:stretch>
+            <a:fillRect/>
+          </a:stretch>
+        </p:blipFill>
+        <p:spPr>
+          <a:xfrm>
+            <a:off x="5326197" y="5061021"/>
+            <a:ext cx="210678" cy="210678"/>
+          </a:xfrm>
+          <a:prstGeom prst="rect">
+            <a:avLst/>
+          </a:prstGeom>
+        </p:spPr>
+      </p:pic>
+      <p:sp>
+        <p:nvSpPr>
+          <p:cNvPr id="32" name="Text 21"/>
+          <p:cNvSpPr/>
+          <p:nvPr/>
+        </p:nvSpPr>
+        <p:spPr>
+          <a:xfrm>
+            <a:off x="822960" y="4855464"/>
+            <a:ext cx="4206240" cy="777240"/>
+          </a:xfrm>
+          <a:prstGeom prst="rect">
+            <a:avLst/>
+          </a:prstGeom>
+          <a:noFill/>
+          <a:ln/>
+        </p:spPr>
+        <p:txBody>
+          <a:bodyPr wrap="square" rtlCol="0" anchor="t"/>
+          <a:lstStyle/>
+          <a:p>
+            <a:pPr rtl="1" algn="r" indent="0" marL="0">
+              <a:lnSpc>
+                <a:spcPct val="115000"/>
+              </a:lnSpc>
+              <a:buNone/>
+            </a:pPr>
+            <a:r>
+              <a:rPr lang="ar-SA" altLang="en-US" sz="1300" dirty="0">
+                <a:solidFill>
+                  <a:srgbClr val="16323A"/>
+                </a:solidFill>
+                <a:latin typeface="Arial" pitchFamily="34" charset="0"/>
+                <a:ea typeface="Arial" pitchFamily="34" charset="-122"/>
+                <a:cs typeface="Arial" pitchFamily="34" charset="-120"/>
+              </a:rPr>
+              <a:t>ما تتعلمه بنفسك يبقى — وما ينسخه لك الذكاء الاصطناعي يُنسى</a:t>
+            </a:r>
+            <a:endParaRPr lang="ar-SA" sz="1300" dirty="0"/>
           </a:p>
         </p:txBody>
       </p:sp>
